--- a/_implementation-notes/evening-series/FotH Evening Session 19 Slides DRAFT v1.pptx
+++ b/_implementation-notes/evening-series/FotH Evening Session 19 Slides DRAFT v1.pptx
@@ -10,6 +10,7 @@
   <p:sldIdLst>
     <p:sldId id="256" r:id="rId2"/>
     <p:sldId id="316" r:id="rId232"/>
+    <p:sldId id="543" r:id="rId23"/>
     <p:sldId id="317" r:id="rId233"/>
     <p:sldId id="483" r:id="rId234"/>
     <p:sldId id="484" r:id="rId235"/>
@@ -19,7 +20,8 @@
     <p:sldId id="488" r:id="rId239"/>
     <p:sldId id="489" r:id="rId240"/>
     <p:sldId id="490" r:id="rId241"/>
-    <p:sldId id="542" r:id="rId242"/>
+    <p:sldId id="544" r:id="rId24"/>
+    <p:sldId id="545" r:id="rId25"/>
     <p:sldId id="491" r:id="rId243"/>
     <p:sldId id="492" r:id="rId244"/>
   </p:sldIdLst>
@@ -751,6 +753,214 @@
 </p:notes>
 </file>
 
+<file path=ppt/notesSlides/notesSlide15.xml><?xml version="1.0" encoding="utf-8"?>
+<p:notes xmlns:a="http://schemas.openxmlformats.org/drawingml/2006/main" xmlns:p="http://schemas.openxmlformats.org/presentationml/2006/main" xmlns:r="http://schemas.openxmlformats.org/officeDocument/2006/relationships">
+  <p:cSld>
+    <p:spTree>
+      <p:nvGrpSpPr>
+        <p:cNvPr id="1" name=""/>
+        <p:cNvGrpSpPr/>
+        <p:nvPr/>
+      </p:nvGrpSpPr>
+      <p:grpSpPr>
+        <a:xfrm>
+          <a:off x="0" y="0"/>
+          <a:ext cx="0" cy="0"/>
+          <a:chOff x="0" y="0"/>
+          <a:chExt cx="0" cy="0"/>
+        </a:xfrm>
+      </p:grpSpPr>
+      <p:sp>
+        <p:nvSpPr>
+          <p:cNvPr id="2" name="Notes Placeholder 1"/>
+          <p:cNvSpPr>
+            <a:spLocks noGrp="1"/>
+          </p:cNvSpPr>
+          <p:nvPr>
+            <p:ph type="body" idx="1"/>
+          </p:nvPr>
+        </p:nvSpPr>
+        <p:spPr/>
+        <p:txBody>
+          <a:bodyPr/>
+          <a:lstStyle/>
+          <a:p>
+            <a:r>
+              <a:t>S19 · WELCOME · LEAD: CONTAINER HOLDER · GROUNDING — every session opens on this map</a:t>
+            </a:r>
+          </a:p>
+          <a:p>
+            <a:r>
+              <a:t>BEATS:</a:t>
+            </a:r>
+          </a:p>
+          <a:p>
+            <a:r>
+              <a:t>1. Locate tonight on the map, plainly: Session 19 rehearses across the whole map — all four Connects, in the Companions' hands. Each connection makes the next one real (Matt. 22:37–40).</a:t>
+            </a:r>
+          </a:p>
+          <a:p>
+            <a:r>
+              <a:t>2. The four boxes are one journey — each connection makes the next one real — rooted in the two great commandments: love God, love neighbor (Matt 22:37–40).</a:t>
+            </a:r>
+          </a:p>
+          <a:p>
+            <a:r>
+              <a:t>3. This is also the 'where we are on the map' minute the welcome owes any newcomer.</a:t>
+            </a:r>
+          </a:p>
+          <a:p>
+            <a:r>
+              <a:t>CUES: Two minutes at most; then tonight's road.</a:t>
+            </a:r>
+          </a:p>
+        </p:txBody>
+      </p:sp>
+    </p:spTree>
+  </p:cSld>
+  <p:clrMapOvr>
+    <a:masterClrMapping/>
+  </p:clrMapOvr>
+</p:notes>
+</file>
+
+<file path=ppt/notesSlides/notesSlide16.xml><?xml version="1.0" encoding="utf-8"?>
+<p:notes xmlns:a="http://schemas.openxmlformats.org/drawingml/2006/main" xmlns:p="http://schemas.openxmlformats.org/presentationml/2006/main" xmlns:r="http://schemas.openxmlformats.org/officeDocument/2006/relationships">
+  <p:cSld>
+    <p:spTree>
+      <p:nvGrpSpPr>
+        <p:cNvPr id="1" name=""/>
+        <p:cNvGrpSpPr/>
+        <p:nvPr/>
+      </p:nvGrpSpPr>
+      <p:grpSpPr>
+        <a:xfrm>
+          <a:off x="0" y="0"/>
+          <a:ext cx="0" cy="0"/>
+          <a:chOff x="0" y="0"/>
+          <a:chExt cx="0" cy="0"/>
+        </a:xfrm>
+      </p:grpSpPr>
+      <p:sp>
+        <p:nvSpPr>
+          <p:cNvPr id="2" name="Notes Placeholder 1"/>
+          <p:cNvSpPr>
+            <a:spLocks noGrp="1"/>
+          </p:cNvSpPr>
+          <p:nvPr>
+            <p:ph type="body" idx="1"/>
+          </p:nvPr>
+        </p:nvSpPr>
+        <p:spPr/>
+        <p:txBody>
+          <a:bodyPr/>
+          <a:lstStyle/>
+          <a:p>
+            <a:r>
+              <a:t>S19 · COMMISSIONING · LEAD: CONTENT PRESENTER</a:t>
+            </a:r>
+          </a:p>
+          <a:p>
+            <a:r>
+              <a:t>BEATS:</a:t>
+            </a:r>
+          </a:p>
+          <a:p>
+            <a:r>
+              <a:t>1. The sheet on the screen is the sheet in their hands — walk it, don't read it.</a:t>
+            </a:r>
+          </a:p>
+          <a:p>
+            <a:r>
+              <a:t>2. The standing rhythm first: the morning question, the evening journal line — one box per day on the week-grids.</a:t>
+            </a:r>
+          </a:p>
+          <a:p>
+            <a:r>
+              <a:t>3. A missed box is never a failure — it is an invitation to return.</a:t>
+            </a:r>
+          </a:p>
+          <a:p>
+            <a:r>
+              <a:t>CUES: The four parts are the next slide.</a:t>
+            </a:r>
+          </a:p>
+        </p:txBody>
+      </p:sp>
+    </p:spTree>
+  </p:cSld>
+  <p:clrMapOvr>
+    <a:masterClrMapping/>
+  </p:clrMapOvr>
+</p:notes>
+</file>
+
+<file path=ppt/notesSlides/notesSlide17.xml><?xml version="1.0" encoding="utf-8"?>
+<p:notes xmlns:a="http://schemas.openxmlformats.org/drawingml/2006/main" xmlns:p="http://schemas.openxmlformats.org/presentationml/2006/main" xmlns:r="http://schemas.openxmlformats.org/officeDocument/2006/relationships">
+  <p:cSld>
+    <p:spTree>
+      <p:nvGrpSpPr>
+        <p:cNvPr id="1" name=""/>
+        <p:cNvGrpSpPr/>
+        <p:nvPr/>
+      </p:nvGrpSpPr>
+      <p:grpSpPr>
+        <a:xfrm>
+          <a:off x="0" y="0"/>
+          <a:ext cx="0" cy="0"/>
+          <a:chOff x="0" y="0"/>
+          <a:chExt cx="0" cy="0"/>
+        </a:xfrm>
+      </p:grpSpPr>
+      <p:sp>
+        <p:nvSpPr>
+          <p:cNvPr id="2" name="Notes Placeholder 1"/>
+          <p:cNvSpPr>
+            <a:spLocks noGrp="1"/>
+          </p:cNvSpPr>
+          <p:nvPr>
+            <p:ph type="body" idx="1"/>
+          </p:nvPr>
+        </p:nvSpPr>
+        <p:spPr/>
+        <p:txBody>
+          <a:bodyPr/>
+          <a:lstStyle/>
+          <a:p>
+            <a:r>
+              <a:t>S19 · COMMISSIONING · LEAD: CONTENT PRESENTER</a:t>
+            </a:r>
+          </a:p>
+          <a:p>
+            <a:r>
+              <a:t>BEATS:</a:t>
+            </a:r>
+          </a:p>
+          <a:p>
+            <a:r>
+              <a:t>1. The four parts, in order: the homework practice, week one; the end-of-week-one check-in; the homework practice, week two; one sentence of preparation.</a:t>
+            </a:r>
+          </a:p>
+          <a:p>
+            <a:r>
+              <a:t>2. Check-in partners are named aloud before leaving this slide — the sheet has the line to write the name.</a:t>
+            </a:r>
+          </a:p>
+          <a:p>
+            <a:r>
+              <a:t>GUARD: The sheet-walk, not a re-teach.</a:t>
+            </a:r>
+          </a:p>
+        </p:txBody>
+      </p:sp>
+    </p:spTree>
+  </p:cSld>
+  <p:clrMapOvr>
+    <a:masterClrMapping/>
+  </p:clrMapOvr>
+</p:notes>
+</file>
+
 <file path=ppt/notesSlides/notesSlide229.xml><?xml version="1.0" encoding="utf-8"?>
 <p:notes xmlns:a="http://schemas.openxmlformats.org/drawingml/2006/main" xmlns:r="http://schemas.openxmlformats.org/officeDocument/2006/relationships" xmlns:p="http://schemas.openxmlformats.org/presentationml/2006/main">
   <p:cSld>
@@ -914,32 +1124,32 @@
           <a:lstStyle/>
           <a:p>
             <a:r>
-              <a:rPr lang="en-US" sz="1200"/>
               <a:t>S19 · 7:00–7:08 · LEAD: CONTAINER HOLDER CIRCLE</a:t>
             </a:r>
           </a:p>
           <a:p>
             <a:r>
-              <a:rPr lang="en-US" sz="1200"/>
               <a:t>BEATS:</a:t>
             </a:r>
           </a:p>
           <a:p>
             <a:r>
-              <a:rPr lang="en-US" sz="1200"/>
               <a:t>1. A Companion-in-Formation opens with the full protocol from memory — the weekly free rep.</a:t>
             </a:r>
           </a:p>
           <a:p>
             <a:r>
-              <a:rPr lang="en-US" sz="1200"/>
               <a:t>2. The open goes to a CiF who is NOT teaching first-round in their strongest pair, so the session's reps spread rather than stack.</a:t>
             </a:r>
           </a:p>
           <a:p>
             <a:r>
-              <a:rPr lang="en-US" sz="1200"/>
               <a:t>3. Receive every check-in word; read the room — today's subject is dryness, and somebody is statistically in it right now.</a:t>
+            </a:r>
+          </a:p>
+          <a:p>
+            <a:r>
+              <a:t>PAIR LEAD: name the leading pair in the welcome — two leaders hold tonight, and the room will see the evening handed back and forth between them; that is the design. The pair practices the session together beforehand.</a:t>
             </a:r>
           </a:p>
         </p:txBody>
@@ -1068,38 +1278,37 @@
           <a:lstStyle/>
           <a:p>
             <a:r>
-              <a:rPr lang="en-US" sz="1200"/>
               <a:t>S19 · 7:31–7:32 · LEAD: CONTENT PRESENTER CIRCLE</a:t>
             </a:r>
           </a:p>
           <a:p>
             <a:r>
-              <a:rPr lang="en-US" sz="1200"/>
               <a:t>BEATS:</a:t>
             </a:r>
           </a:p>
           <a:p>
             <a:r>
-              <a:rPr lang="en-US" sz="1200"/>
               <a:t>1. Name each pair: its families, its adult coach-and-catch, its first-round teacher.</a:t>
             </a:r>
           </a:p>
           <a:p>
             <a:r>
-              <a:rPr lang="en-US" sz="1200"/>
               <a:t>2. Pray briefly — for the teachers by name, and for any dry ground in the room, unnamed.</a:t>
             </a:r>
           </a:p>
           <a:p>
             <a:r>
-              <a:rPr lang="en-US" sz="1200"/>
               <a:t>3. Split fast — the teaching minutes are protected.</a:t>
             </a:r>
           </a:p>
           <a:p>
             <a:r>
-              <a:rPr lang="en-US" sz="1200"/>
               <a:t>CUES: About ten or fewer in the room? Small-room variation: one circle, two CiFs split the cards, feedback after each, then a compressed second pass with the cards swapped — everyone still teaches twice.</a:t>
+            </a:r>
+          </a:p>
+          <a:p>
+            <a:r>
+              <a:t>SMALL ROOM: the split is only necessary if the room is large enough to need it. With six or so, stay one circle — or quick pair work in place, knee to knee. Pair work is also the standing time-recovery lever: a full split-and-merge costs about five minutes.</a:t>
             </a:r>
           </a:p>
         </p:txBody>
@@ -1479,77 +1688,6 @@
             <a:r>
               <a:rPr lang="en-US" sz="1200"/>
               <a:t>3. Name next week: The Long Walk — whole room, whole teaching, these same teachers. Come ready to receive them again.</a:t>
-            </a:r>
-          </a:p>
-        </p:txBody>
-      </p:sp>
-    </p:spTree>
-  </p:cSld>
-  <p:clrMapOvr>
-    <a:masterClrMapping/>
-  </p:clrMapOvr>
-</p:notes>
-</file>
-
-<file path=ppt/notesSlides/notesSlide239.xml><?xml version="1.0" encoding="utf-8"?>
-<p:notes xmlns:a="http://schemas.openxmlformats.org/drawingml/2006/main" xmlns:r="http://schemas.openxmlformats.org/officeDocument/2006/relationships" xmlns:p="http://schemas.openxmlformats.org/presentationml/2006/main">
-  <p:cSld>
-    <p:spTree>
-      <p:nvGrpSpPr>
-        <p:cNvPr id="1" name=""/>
-        <p:cNvGrpSpPr/>
-        <p:nvPr/>
-      </p:nvGrpSpPr>
-      <p:grpSpPr>
-        <a:xfrm>
-          <a:off x="0" y="0"/>
-          <a:ext cx="0" cy="0"/>
-          <a:chOff x="0" y="0"/>
-          <a:chExt cx="0" cy="0"/>
-        </a:xfrm>
-      </p:grpSpPr>
-      <p:sp>
-        <p:nvSpPr>
-          <p:cNvPr id="2" name="Notes Placeholder 1"/>
-          <p:cNvSpPr>
-            <a:spLocks noGrp="1"/>
-          </p:cNvSpPr>
-          <p:nvPr>
-            <p:ph type="body" idx="1"/>
-          </p:nvPr>
-        </p:nvSpPr>
-        <p:spPr/>
-        <p:txBody>
-          <a:bodyPr/>
-          <a:lstStyle/>
-          <a:p>
-            <a:r>
-              <a:rPr lang="en-US" sz="1200"/>
-              <a:t>S19 · 8:19–8:20 · LEAD: CONTENT PRESENTER CIRCLE</a:t>
-            </a:r>
-          </a:p>
-          <a:p>
-            <a:r>
-              <a:rPr lang="en-US" sz="1200"/>
-              <a:t>BEATS:</a:t>
-            </a:r>
-          </a:p>
-          <a:p>
-            <a:r>
-              <a:rPr lang="en-US" sz="1200"/>
-              <a:t>1. Check-off card H19.1: the Rhythm Card dailies as built — the standing rhythm, nothing new this week.</a:t>
-            </a:r>
-          </a:p>
-          <a:p>
-            <a:r>
-              <a:rPr lang="en-US" sz="1200"/>
-              <a:t>2. One one-time box: the two mercy cards given a findable spot at home, decided together as a family.</a:t>
-            </a:r>
-          </a:p>
-          <a:p>
-            <a:r>
-              <a:rPr lang="en-US" sz="1200"/>
-              <a:t>3. A missed box is never a failure; it is an invitation to return.</a:t>
             </a:r>
           </a:p>
         </p:txBody>
@@ -4909,7 +5047,1807 @@
 </p:sld>
 </file>
 
-<file path=ppt/slides/slide231.xml><?xml version="1.0" encoding="utf-8"?>
+<file path=ppt/slides/slide10.xml><?xml version="1.0" encoding="utf-8"?>
+<p:sld xmlns:a="http://schemas.openxmlformats.org/drawingml/2006/main" xmlns:r="http://schemas.openxmlformats.org/officeDocument/2006/relationships" xmlns:p="http://schemas.openxmlformats.org/presentationml/2006/main">
+  <p:cSld>
+    <p:spTree>
+      <p:nvGrpSpPr>
+        <p:cNvPr id="1" name=""/>
+        <p:cNvGrpSpPr/>
+        <p:nvPr/>
+      </p:nvGrpSpPr>
+      <p:grpSpPr>
+        <a:xfrm>
+          <a:off x="0" y="0"/>
+          <a:ext cx="0" cy="0"/>
+          <a:chOff x="0" y="0"/>
+          <a:chExt cx="0" cy="0"/>
+        </a:xfrm>
+      </p:grpSpPr>
+      <p:sp>
+        <p:nvSpPr>
+          <p:cNvPr id="2" name="Rectangle 1"/>
+          <p:cNvSpPr/>
+          <p:nvPr/>
+        </p:nvSpPr>
+        <p:spPr>
+          <a:xfrm>
+            <a:off x="0" y="0"/>
+            <a:ext cx="12191695" cy="6858000"/>
+          </a:xfrm>
+          <a:prstGeom prst="rect">
+            <a:avLst/>
+          </a:prstGeom>
+          <a:solidFill>
+            <a:srgbClr val="FFFFFF"/>
+          </a:solidFill>
+          <a:ln>
+            <a:noFill/>
+          </a:ln>
+        </p:spPr>
+        <p:txBody>
+          <a:bodyPr/>
+          <a:lstStyle/>
+          <a:p>
+            <a:endParaRPr/>
+          </a:p>
+        </p:txBody>
+      </p:sp>
+      <p:sp>
+        <p:nvSpPr>
+          <p:cNvPr id="3" name="TextBox 2"/>
+          <p:cNvSpPr txBox="1"/>
+          <p:nvPr/>
+        </p:nvSpPr>
+        <p:spPr>
+          <a:xfrm>
+            <a:off x="822960" y="502920"/>
+            <a:ext cx="10515600" cy="822960"/>
+          </a:xfrm>
+          <a:prstGeom prst="rect">
+            <a:avLst/>
+          </a:prstGeom>
+          <a:noFill/>
+        </p:spPr>
+        <p:txBody>
+          <a:bodyPr wrap="square">
+            <a:spAutoFit/>
+          </a:bodyPr>
+          <a:lstStyle/>
+          <a:p>
+            <a:pPr algn="l">
+              <a:spcAft>
+                <a:spcPts val="600"/>
+              </a:spcAft>
+            </a:pPr>
+            <a:r>
+              <a:rPr sz="2800" b="1" i="0">
+                <a:solidFill>
+                  <a:srgbClr val="2C5F2D"/>
+                </a:solidFill>
+                <a:latin typeface="Cambria"/>
+              </a:rPr>
+              <a:t>Second pair Feedback</a:t>
+            </a:r>
+          </a:p>
+        </p:txBody>
+      </p:sp>
+      <p:sp>
+        <p:nvSpPr>
+          <p:cNvPr id="4" name="TextBox 4"/>
+          <p:cNvSpPr txBox="1"/>
+          <p:nvPr/>
+        </p:nvSpPr>
+        <p:spPr>
+          <a:xfrm>
+            <a:off x="822960" y="1554480"/>
+            <a:ext cx="10515600" cy="4892040"/>
+          </a:xfrm>
+          <a:prstGeom prst="rect">
+            <a:avLst/>
+          </a:prstGeom>
+          <a:noFill/>
+        </p:spPr>
+        <p:txBody>
+          <a:bodyPr wrap="square" lIns="91440" tIns="91440" rIns="91440" bIns="91440"/>
+          <a:lstStyle/>
+          <a:p>
+            <a:pPr marL="274320" indent="-274320">
+              <a:spcAft>
+                <a:spcPts val="900"/>
+              </a:spcAft>
+            </a:pPr>
+            <a:r>
+              <a:rPr sz="2800" b="1" i="0">
+                <a:solidFill>
+                  <a:srgbClr val="97BC62"/>
+                </a:solidFill>
+                <a:latin typeface="Calibri"/>
+              </a:rPr>
+              <a:t>•  </a:t>
+            </a:r>
+            <a:r>
+              <a:rPr sz="2800" b="0" i="0">
+                <a:solidFill>
+                  <a:srgbClr val="222B22"/>
+                </a:solidFill>
+                <a:latin typeface="Calibri"/>
+              </a:rPr>
+              <a:t>Same shape, briefer — the adult’s keep and adjust, then one pair voice</a:t>
+            </a:r>
+          </a:p>
+          <a:p>
+            <a:pPr marL="274320" indent="-274320">
+              <a:spcAft>
+                <a:spcPts val="900"/>
+              </a:spcAft>
+            </a:pPr>
+            <a:r>
+              <a:rPr sz="2800" b="1" i="0">
+                <a:solidFill>
+                  <a:srgbClr val="97BC62"/>
+                </a:solidFill>
+                <a:latin typeface="Calibri"/>
+              </a:rPr>
+              <a:t>•  </a:t>
+            </a:r>
+            <a:r>
+              <a:rPr sz="2800" b="0" i="0">
+                <a:solidFill>
+                  <a:srgbClr val="222B22"/>
+                </a:solidFill>
+                <a:latin typeface="Calibri"/>
+              </a:rPr>
+              <a:t>The keep, wherever honest, names the adjust that got tried</a:t>
+            </a:r>
+          </a:p>
+          <a:p>
+            <a:pPr marL="274320" indent="-274320">
+              <a:spcAft>
+                <a:spcPts val="900"/>
+              </a:spcAft>
+            </a:pPr>
+            <a:r>
+              <a:rPr sz="2800" b="1" i="0">
+                <a:solidFill>
+                  <a:srgbClr val="97BC62"/>
+                </a:solidFill>
+                <a:latin typeface="Calibri"/>
+              </a:rPr>
+              <a:t>•  </a:t>
+            </a:r>
+            <a:r>
+              <a:rPr sz="2800" b="0" i="0">
+                <a:solidFill>
+                  <a:srgbClr val="222B22"/>
+                </a:solidFill>
+                <a:latin typeface="Calibri"/>
+              </a:rPr>
+              <a:t>Both recorded per teacher — these notes are next week’s prep meeting</a:t>
+            </a:r>
+          </a:p>
+        </p:txBody>
+      </p:sp>
+      <p:sp>
+        <p:nvSpPr>
+          <p:cNvPr id="90" name="SlideNum"/>
+          <p:cNvSpPr txBox="1"/>
+          <p:nvPr/>
+        </p:nvSpPr>
+        <p:spPr>
+          <a:xfrm>
+            <a:off x="11384280" y="6446520"/>
+            <a:ext cx="640080" cy="292608"/>
+          </a:xfrm>
+          <a:prstGeom prst="rect">
+            <a:avLst/>
+          </a:prstGeom>
+          <a:noFill/>
+        </p:spPr>
+        <p:txBody>
+          <a:bodyPr wrap="none" lIns="0" tIns="0" rIns="45720" bIns="0" anchor="ctr"/>
+          <a:lstStyle/>
+          <a:p>
+            <a:pPr algn="r"/>
+            <a:r>
+              <a:t>239</a:t>
+            </a:r>
+            <a:endParaRPr sz="1000" b="1">
+              <a:solidFill>
+                <a:srgbClr val="7A8A6E"/>
+              </a:solidFill>
+              <a:latin typeface="Calibri"/>
+            </a:endParaRPr>
+          </a:p>
+        </p:txBody>
+      </p:sp>
+    </p:spTree>
+  </p:cSld>
+  <p:clrMapOvr>
+    <a:masterClrMapping/>
+  </p:clrMapOvr>
+</p:sld>
+</file>
+
+<file path=ppt/slides/slide11.xml><?xml version="1.0" encoding="utf-8"?>
+<p:sld xmlns:a="http://schemas.openxmlformats.org/drawingml/2006/main" xmlns:r="http://schemas.openxmlformats.org/officeDocument/2006/relationships" xmlns:p="http://schemas.openxmlformats.org/presentationml/2006/main">
+  <p:cSld>
+    <p:spTree>
+      <p:nvGrpSpPr>
+        <p:cNvPr id="1" name=""/>
+        <p:cNvGrpSpPr/>
+        <p:nvPr/>
+      </p:nvGrpSpPr>
+      <p:grpSpPr>
+        <a:xfrm>
+          <a:off x="0" y="0"/>
+          <a:ext cx="0" cy="0"/>
+          <a:chOff x="0" y="0"/>
+          <a:chExt cx="0" cy="0"/>
+        </a:xfrm>
+      </p:grpSpPr>
+      <p:sp>
+        <p:nvSpPr>
+          <p:cNvPr id="2" name="Rectangle 1"/>
+          <p:cNvSpPr/>
+          <p:nvPr/>
+        </p:nvSpPr>
+        <p:spPr>
+          <a:xfrm>
+            <a:off x="0" y="0"/>
+            <a:ext cx="12191695" cy="6858000"/>
+          </a:xfrm>
+          <a:prstGeom prst="rect">
+            <a:avLst/>
+          </a:prstGeom>
+          <a:solidFill>
+            <a:srgbClr val="FFFFFF"/>
+          </a:solidFill>
+          <a:ln>
+            <a:noFill/>
+          </a:ln>
+        </p:spPr>
+        <p:txBody>
+          <a:bodyPr/>
+          <a:lstStyle/>
+          <a:p>
+            <a:endParaRPr/>
+          </a:p>
+        </p:txBody>
+      </p:sp>
+      <p:sp>
+        <p:nvSpPr>
+          <p:cNvPr id="3" name="TextBox 2"/>
+          <p:cNvSpPr txBox="1"/>
+          <p:nvPr/>
+        </p:nvSpPr>
+        <p:spPr>
+          <a:xfrm>
+            <a:off x="822960" y="502920"/>
+            <a:ext cx="10515600" cy="822960"/>
+          </a:xfrm>
+          <a:prstGeom prst="rect">
+            <a:avLst/>
+          </a:prstGeom>
+          <a:noFill/>
+        </p:spPr>
+        <p:txBody>
+          <a:bodyPr wrap="square">
+            <a:spAutoFit/>
+          </a:bodyPr>
+          <a:lstStyle/>
+          <a:p>
+            <a:pPr algn="l">
+              <a:spcAft>
+                <a:spcPts val="600"/>
+              </a:spcAft>
+            </a:pPr>
+            <a:r>
+              <a:rPr sz="2800" b="1" i="0">
+                <a:solidFill>
+                  <a:srgbClr val="2C5F2D"/>
+                </a:solidFill>
+                <a:latin typeface="Cambria"/>
+              </a:rPr>
+              <a:t>Merge and Homework Practice</a:t>
+            </a:r>
+          </a:p>
+        </p:txBody>
+      </p:sp>
+      <p:sp>
+        <p:nvSpPr>
+          <p:cNvPr id="4" name="TextBox 4"/>
+          <p:cNvSpPr txBox="1"/>
+          <p:nvPr/>
+        </p:nvSpPr>
+        <p:spPr>
+          <a:xfrm>
+            <a:off x="822960" y="1554480"/>
+            <a:ext cx="10515600" cy="4892040"/>
+          </a:xfrm>
+          <a:prstGeom prst="rect">
+            <a:avLst/>
+          </a:prstGeom>
+          <a:noFill/>
+        </p:spPr>
+        <p:txBody>
+          <a:bodyPr wrap="square" lIns="91440" tIns="91440" rIns="91440" bIns="91440"/>
+          <a:lstStyle/>
+          <a:p>
+            <a:pPr marL="274320" indent="-274320">
+              <a:spcAft>
+                <a:spcPts val="900"/>
+              </a:spcAft>
+            </a:pPr>
+            <a:r>
+              <a:rPr sz="2800" b="1" i="0">
+                <a:solidFill>
+                  <a:srgbClr val="97BC62"/>
+                </a:solidFill>
+                <a:latin typeface="Calibri"/>
+              </a:rPr>
+              <a:t>•  </a:t>
+            </a:r>
+            <a:r>
+              <a:rPr sz="2800" b="0" i="0">
+                <a:solidFill>
+                  <a:srgbClr val="222B22"/>
+                </a:solidFill>
+                <a:latin typeface="Calibri"/>
+              </a:rPr>
+              <a:t>One practice this week — the easiest assignment of the year: the two cards go home and get a spot</a:t>
+            </a:r>
+          </a:p>
+          <a:p>
+            <a:pPr marL="274320" indent="-274320">
+              <a:spcAft>
+                <a:spcPts val="900"/>
+              </a:spcAft>
+            </a:pPr>
+            <a:r>
+              <a:rPr sz="2800" b="1" i="0">
+                <a:solidFill>
+                  <a:srgbClr val="97BC62"/>
+                </a:solidFill>
+                <a:latin typeface="Calibri"/>
+              </a:rPr>
+              <a:t>•  </a:t>
+            </a:r>
+            <a:r>
+              <a:rPr sz="2800" b="0" i="0">
+                <a:solidFill>
+                  <a:srgbClr val="222B22"/>
+                </a:solidFill>
+                <a:latin typeface="Calibri"/>
+              </a:rPr>
+              <a:t>Somewhere findable — a drawer everyone knows about, the kitchen cabinet door, inside the family Bible. Decide the spot together.</a:t>
+            </a:r>
+          </a:p>
+          <a:p>
+            <a:pPr marL="274320" indent="-274320">
+              <a:spcAft>
+                <a:spcPts val="900"/>
+              </a:spcAft>
+            </a:pPr>
+            <a:r>
+              <a:rPr sz="2800" b="1" i="0">
+                <a:solidFill>
+                  <a:srgbClr val="97BC62"/>
+                </a:solidFill>
+                <a:latin typeface="Calibri"/>
+              </a:rPr>
+              <a:t>•  </a:t>
+            </a:r>
+            <a:r>
+              <a:rPr sz="2800" b="0" i="0">
+                <a:solidFill>
+                  <a:srgbClr val="222B22"/>
+                </a:solidFill>
+                <a:latin typeface="Calibri"/>
+              </a:rPr>
+              <a:t>If all goes well, they will sit there gathering dust for years. That is the job — the cards wait.</a:t>
+            </a:r>
+          </a:p>
+          <a:p>
+            <a:pPr marL="274320" indent="-274320">
+              <a:spcAft>
+                <a:spcPts val="900"/>
+              </a:spcAft>
+            </a:pPr>
+            <a:r>
+              <a:rPr sz="2800" b="1" i="0">
+                <a:solidFill>
+                  <a:srgbClr val="97BC62"/>
+                </a:solidFill>
+                <a:latin typeface="Calibri"/>
+              </a:rPr>
+              <a:t>•  </a:t>
+            </a:r>
+            <a:r>
+              <a:rPr sz="2800" b="0" i="0">
+                <a:solidFill>
+                  <a:srgbClr val="222B22"/>
+                </a:solidFill>
+                <a:latin typeface="Calibri"/>
+              </a:rPr>
+              <a:t>Next Wednesday is The Long Walk — the whole room, the whole teaching, these same teachers. Come ready to receive them again.</a:t>
+            </a:r>
+          </a:p>
+        </p:txBody>
+      </p:sp>
+      <p:sp>
+        <p:nvSpPr>
+          <p:cNvPr id="90" name="SlideNum"/>
+          <p:cNvSpPr txBox="1"/>
+          <p:nvPr/>
+        </p:nvSpPr>
+        <p:spPr>
+          <a:xfrm>
+            <a:off x="11384280" y="6446520"/>
+            <a:ext cx="640080" cy="292608"/>
+          </a:xfrm>
+          <a:prstGeom prst="rect">
+            <a:avLst/>
+          </a:prstGeom>
+          <a:noFill/>
+        </p:spPr>
+        <p:txBody>
+          <a:bodyPr wrap="none" lIns="0" tIns="0" rIns="45720" bIns="0" anchor="ctr"/>
+          <a:lstStyle/>
+          <a:p>
+            <a:pPr algn="r"/>
+            <a:r>
+              <a:t>240</a:t>
+            </a:r>
+            <a:endParaRPr sz="1000" b="1">
+              <a:solidFill>
+                <a:srgbClr val="7A8A6E"/>
+              </a:solidFill>
+              <a:latin typeface="Calibri"/>
+            </a:endParaRPr>
+          </a:p>
+        </p:txBody>
+      </p:sp>
+    </p:spTree>
+  </p:cSld>
+  <p:clrMapOvr>
+    <a:masterClrMapping/>
+  </p:clrMapOvr>
+</p:sld>
+</file>
+
+<file path=ppt/slides/slide13.xml><?xml version="1.0" encoding="utf-8"?>
+<p:sld xmlns:a="http://schemas.openxmlformats.org/drawingml/2006/main" xmlns:r="http://schemas.openxmlformats.org/officeDocument/2006/relationships" xmlns:p="http://schemas.openxmlformats.org/presentationml/2006/main">
+  <p:cSld>
+    <p:spTree>
+      <p:nvGrpSpPr>
+        <p:cNvPr id="1" name=""/>
+        <p:cNvGrpSpPr/>
+        <p:nvPr/>
+      </p:nvGrpSpPr>
+      <p:grpSpPr>
+        <a:xfrm>
+          <a:off x="0" y="0"/>
+          <a:ext cx="0" cy="0"/>
+          <a:chOff x="0" y="0"/>
+          <a:chExt cx="0" cy="0"/>
+        </a:xfrm>
+      </p:grpSpPr>
+      <p:sp>
+        <p:nvSpPr>
+          <p:cNvPr id="2" name="Rectangle 1"/>
+          <p:cNvSpPr/>
+          <p:nvPr/>
+        </p:nvSpPr>
+        <p:spPr>
+          <a:xfrm>
+            <a:off x="0" y="0"/>
+            <a:ext cx="12191695" cy="6858000"/>
+          </a:xfrm>
+          <a:prstGeom prst="rect">
+            <a:avLst/>
+          </a:prstGeom>
+          <a:solidFill>
+            <a:srgbClr val="FFFFFF"/>
+          </a:solidFill>
+          <a:ln>
+            <a:noFill/>
+          </a:ln>
+        </p:spPr>
+        <p:txBody>
+          <a:bodyPr/>
+          <a:lstStyle/>
+          <a:p>
+            <a:endParaRPr/>
+          </a:p>
+        </p:txBody>
+      </p:sp>
+      <p:sp>
+        <p:nvSpPr>
+          <p:cNvPr id="3" name="TextBox 2"/>
+          <p:cNvSpPr txBox="1"/>
+          <p:nvPr/>
+        </p:nvSpPr>
+        <p:spPr>
+          <a:xfrm>
+            <a:off x="822960" y="502920"/>
+            <a:ext cx="10515600" cy="822960"/>
+          </a:xfrm>
+          <a:prstGeom prst="rect">
+            <a:avLst/>
+          </a:prstGeom>
+          <a:noFill/>
+        </p:spPr>
+        <p:txBody>
+          <a:bodyPr wrap="square">
+            <a:spAutoFit/>
+          </a:bodyPr>
+          <a:lstStyle/>
+          <a:p>
+            <a:pPr algn="l">
+              <a:spcAft>
+                <a:spcPts val="600"/>
+              </a:spcAft>
+            </a:pPr>
+            <a:r>
+              <a:rPr sz="2800" b="1" i="0">
+                <a:solidFill>
+                  <a:srgbClr val="2C5F2D"/>
+                </a:solidFill>
+                <a:latin typeface="Cambria"/>
+              </a:rPr>
+              <a:t>Closing the Container + Aaronic Blessing</a:t>
+            </a:r>
+          </a:p>
+        </p:txBody>
+      </p:sp>
+      <p:sp>
+        <p:nvSpPr>
+          <p:cNvPr id="4" name="TextBox 4"/>
+          <p:cNvSpPr txBox="1"/>
+          <p:nvPr/>
+        </p:nvSpPr>
+        <p:spPr>
+          <a:xfrm>
+            <a:off x="822960" y="1600200"/>
+            <a:ext cx="5669280" cy="4572000"/>
+          </a:xfrm>
+          <a:prstGeom prst="rect">
+            <a:avLst/>
+          </a:prstGeom>
+          <a:noFill/>
+        </p:spPr>
+        <p:txBody>
+          <a:bodyPr wrap="square" lIns="91440" tIns="91440" rIns="91440" bIns="91440"/>
+          <a:lstStyle/>
+          <a:p>
+            <a:pPr marL="274320" indent="-274320">
+              <a:spcAft>
+                <a:spcPts val="900"/>
+              </a:spcAft>
+            </a:pPr>
+            <a:r>
+              <a:rPr sz="2200" b="1" i="0">
+                <a:solidFill>
+                  <a:srgbClr val="97BC62"/>
+                </a:solidFill>
+                <a:latin typeface="Calibri"/>
+              </a:rPr>
+              <a:t>•  </a:t>
+            </a:r>
+            <a:r>
+              <a:rPr sz="2200" b="0" i="0">
+                <a:solidFill>
+                  <a:srgbClr val="222B22"/>
+                </a:solidFill>
+                <a:latin typeface="Calibri"/>
+              </a:rPr>
+              <a:t>We close the way we opened — the container, six steps:</a:t>
+            </a:r>
+          </a:p>
+          <a:p>
+            <a:pPr marL="685800" indent="-274320">
+              <a:spcAft>
+                <a:spcPts val="700"/>
+              </a:spcAft>
+            </a:pPr>
+            <a:r>
+              <a:rPr sz="2000" b="1" i="0">
+                <a:solidFill>
+                  <a:srgbClr val="97BC62"/>
+                </a:solidFill>
+                <a:latin typeface="Calibri"/>
+              </a:rPr>
+              <a:t>1   </a:t>
+            </a:r>
+            <a:r>
+              <a:rPr sz="2000" b="0" i="0">
+                <a:solidFill>
+                  <a:srgbClr val="222B22"/>
+                </a:solidFill>
+                <a:latin typeface="Calibri"/>
+              </a:rPr>
+              <a:t>Stand again — same circle, same posture as the open</a:t>
+            </a:r>
+          </a:p>
+          <a:p>
+            <a:pPr marL="685800" indent="-274320">
+              <a:spcAft>
+                <a:spcPts val="700"/>
+              </a:spcAft>
+            </a:pPr>
+            <a:r>
+              <a:rPr sz="2000" b="1" i="0">
+                <a:solidFill>
+                  <a:srgbClr val="97BC62"/>
+                </a:solidFill>
+                <a:latin typeface="Calibri"/>
+              </a:rPr>
+              <a:t>2   </a:t>
+            </a:r>
+            <a:r>
+              <a:rPr sz="2000" b="0" i="0">
+                <a:solidFill>
+                  <a:srgbClr val="222B22"/>
+                </a:solidFill>
+                <a:latin typeface="Calibri"/>
+              </a:rPr>
+              <a:t>One-word landing — compare it to your opening word</a:t>
+            </a:r>
+          </a:p>
+          <a:p>
+            <a:pPr marL="685800" indent="-274320">
+              <a:spcAft>
+                <a:spcPts val="700"/>
+              </a:spcAft>
+            </a:pPr>
+            <a:r>
+              <a:rPr sz="2000" b="1" i="0">
+                <a:solidFill>
+                  <a:srgbClr val="97BC62"/>
+                </a:solidFill>
+                <a:latin typeface="Calibri"/>
+              </a:rPr>
+              <a:t>3   </a:t>
+            </a:r>
+            <a:r>
+              <a:rPr sz="2000" b="0" i="0">
+                <a:solidFill>
+                  <a:srgbClr val="222B22"/>
+                </a:solidFill>
+                <a:latin typeface="Calibri"/>
+              </a:rPr>
+              <a:t>The one thing you are taking from tonight</a:t>
+            </a:r>
+          </a:p>
+          <a:p>
+            <a:pPr marL="685800" indent="-274320">
+              <a:spcAft>
+                <a:spcPts val="700"/>
+              </a:spcAft>
+            </a:pPr>
+            <a:r>
+              <a:rPr sz="2000" b="1" i="0">
+                <a:solidFill>
+                  <a:srgbClr val="97BC62"/>
+                </a:solidFill>
+                <a:latin typeface="Calibri"/>
+              </a:rPr>
+              <a:t>4   </a:t>
+            </a:r>
+            <a:r>
+              <a:rPr sz="2000" b="0" i="0">
+                <a:solidFill>
+                  <a:srgbClr val="222B22"/>
+                </a:solidFill>
+                <a:latin typeface="Calibri"/>
+              </a:rPr>
+              <a:t>The one practice — committed aloud, or modified to one you will actually keep</a:t>
+            </a:r>
+          </a:p>
+          <a:p>
+            <a:pPr marL="685800" indent="-274320">
+              <a:spcAft>
+                <a:spcPts val="700"/>
+              </a:spcAft>
+            </a:pPr>
+            <a:r>
+              <a:rPr sz="2000" b="1" i="0">
+                <a:solidFill>
+                  <a:srgbClr val="97BC62"/>
+                </a:solidFill>
+                <a:latin typeface="Calibri"/>
+              </a:rPr>
+              <a:t>5   </a:t>
+            </a:r>
+            <a:r>
+              <a:rPr sz="2000" b="0" i="0">
+                <a:solidFill>
+                  <a:srgbClr val="222B22"/>
+                </a:solidFill>
+                <a:latin typeface="Calibri"/>
+              </a:rPr>
+              <a:t>Blessings — specific, witnessed, short</a:t>
+            </a:r>
+          </a:p>
+          <a:p>
+            <a:pPr marL="685800" indent="-274320">
+              <a:spcAft>
+                <a:spcPts val="700"/>
+              </a:spcAft>
+            </a:pPr>
+            <a:r>
+              <a:rPr sz="2000" b="1" i="0">
+                <a:solidFill>
+                  <a:srgbClr val="97BC62"/>
+                </a:solidFill>
+                <a:latin typeface="Calibri"/>
+              </a:rPr>
+              <a:t>6   </a:t>
+            </a:r>
+            <a:r>
+              <a:rPr sz="2000" b="0" i="0">
+                <a:solidFill>
+                  <a:srgbClr val="222B22"/>
+                </a:solidFill>
+                <a:latin typeface="Calibri"/>
+              </a:rPr>
+              <a:t>Closing prayer — and the Aaronic blessing, spoken over each other, face to face</a:t>
+            </a:r>
+          </a:p>
+        </p:txBody>
+      </p:sp>
+      <p:sp>
+        <p:nvSpPr>
+          <p:cNvPr id="6" name="TextBox 6"/>
+          <p:cNvSpPr txBox="1"/>
+          <p:nvPr/>
+        </p:nvSpPr>
+        <p:spPr>
+          <a:xfrm>
+            <a:off x="6766560" y="1737360"/>
+            <a:ext cx="4663440" cy="2926080"/>
+          </a:xfrm>
+          <a:prstGeom prst="rect">
+            <a:avLst/>
+          </a:prstGeom>
+          <a:solidFill>
+            <a:srgbClr val="F1F6EC"/>
+          </a:solidFill>
+        </p:spPr>
+        <p:txBody>
+          <a:bodyPr wrap="square" lIns="91440" tIns="91440" rIns="91440" bIns="91440" anchor="ctr"/>
+          <a:lstStyle/>
+          <a:p>
+            <a:pPr>
+              <a:spcAft>
+                <a:spcPts val="900"/>
+              </a:spcAft>
+            </a:pPr>
+            <a:r>
+              <a:rPr sz="1200" b="1" i="0">
+                <a:solidFill>
+                  <a:srgbClr val="97BC62"/>
+                </a:solidFill>
+                <a:latin typeface="Calibri"/>
+              </a:rPr>
+              <a:t>THE AARONIC BLESSING — NUMBERS 6:24–26</a:t>
+            </a:r>
+          </a:p>
+          <a:p>
+            <a:pPr>
+              <a:spcAft>
+                <a:spcPts val="600"/>
+              </a:spcAft>
+            </a:pPr>
+            <a:r>
+              <a:rPr sz="2400" b="0" i="1">
+                <a:solidFill>
+                  <a:srgbClr val="222B22"/>
+                </a:solidFill>
+                <a:latin typeface="Cambria"/>
+              </a:rPr>
+              <a:t>“The Lord bless you and keep you;</a:t>
+            </a:r>
+          </a:p>
+          <a:p>
+            <a:pPr>
+              <a:spcAft>
+                <a:spcPts val="600"/>
+              </a:spcAft>
+            </a:pPr>
+            <a:r>
+              <a:rPr sz="2400" b="0" i="1">
+                <a:solidFill>
+                  <a:srgbClr val="222B22"/>
+                </a:solidFill>
+                <a:latin typeface="Cambria"/>
+              </a:rPr>
+              <a:t>the Lord make his face to shine upon you, and be gracious to you;</a:t>
+            </a:r>
+          </a:p>
+          <a:p>
+            <a:pPr>
+              <a:spcAft>
+                <a:spcPts val="600"/>
+              </a:spcAft>
+            </a:pPr>
+            <a:r>
+              <a:rPr sz="2400" b="0" i="1">
+                <a:solidFill>
+                  <a:srgbClr val="222B22"/>
+                </a:solidFill>
+                <a:latin typeface="Cambria"/>
+              </a:rPr>
+              <a:t>the Lord lift up his countenance upon you, and give you peace.”</a:t>
+            </a:r>
+          </a:p>
+        </p:txBody>
+      </p:sp>
+      <p:sp>
+        <p:nvSpPr>
+          <p:cNvPr id="90" name="SlideNum"/>
+          <p:cNvSpPr txBox="1"/>
+          <p:nvPr/>
+        </p:nvSpPr>
+        <p:spPr>
+          <a:xfrm>
+            <a:off x="11384280" y="6446520"/>
+            <a:ext cx="640080" cy="292608"/>
+          </a:xfrm>
+          <a:prstGeom prst="rect">
+            <a:avLst/>
+          </a:prstGeom>
+          <a:noFill/>
+        </p:spPr>
+        <p:txBody>
+          <a:bodyPr wrap="none" lIns="0" tIns="0" rIns="45720" bIns="0" anchor="ctr"/>
+          <a:lstStyle/>
+          <a:p>
+            <a:pPr algn="r"/>
+            <a:r>
+              <a:t>242</a:t>
+            </a:r>
+            <a:endParaRPr sz="1000" b="1">
+              <a:solidFill>
+                <a:srgbClr val="7A8A6E"/>
+              </a:solidFill>
+              <a:latin typeface="Calibri"/>
+            </a:endParaRPr>
+          </a:p>
+        </p:txBody>
+      </p:sp>
+    </p:spTree>
+  </p:cSld>
+  <p:clrMapOvr>
+    <a:masterClrMapping/>
+  </p:clrMapOvr>
+</p:sld>
+</file>
+
+<file path=ppt/slides/slide14.xml><?xml version="1.0" encoding="utf-8"?>
+<p:sld xmlns:a="http://schemas.openxmlformats.org/drawingml/2006/main" xmlns:r="http://schemas.openxmlformats.org/officeDocument/2006/relationships" xmlns:p="http://schemas.openxmlformats.org/presentationml/2006/main">
+  <p:cSld>
+    <p:spTree>
+      <p:nvGrpSpPr>
+        <p:cNvPr id="1" name=""/>
+        <p:cNvGrpSpPr/>
+        <p:nvPr/>
+      </p:nvGrpSpPr>
+      <p:grpSpPr>
+        <a:xfrm>
+          <a:off x="0" y="0"/>
+          <a:ext cx="0" cy="0"/>
+          <a:chOff x="0" y="0"/>
+          <a:chExt cx="0" cy="0"/>
+        </a:xfrm>
+      </p:grpSpPr>
+      <p:sp>
+        <p:nvSpPr>
+          <p:cNvPr id="2" name="Rectangle 1"/>
+          <p:cNvSpPr/>
+          <p:nvPr/>
+        </p:nvSpPr>
+        <p:spPr>
+          <a:xfrm>
+            <a:off x="0" y="0"/>
+            <a:ext cx="12191695" cy="6858000"/>
+          </a:xfrm>
+          <a:prstGeom prst="rect">
+            <a:avLst/>
+          </a:prstGeom>
+          <a:solidFill>
+            <a:srgbClr val="FFFFFF"/>
+          </a:solidFill>
+          <a:ln>
+            <a:noFill/>
+          </a:ln>
+        </p:spPr>
+        <p:txBody>
+          <a:bodyPr/>
+          <a:lstStyle/>
+          <a:p>
+            <a:endParaRPr/>
+          </a:p>
+        </p:txBody>
+      </p:sp>
+      <p:sp>
+        <p:nvSpPr>
+          <p:cNvPr id="3" name="TextBox 2"/>
+          <p:cNvSpPr txBox="1"/>
+          <p:nvPr/>
+        </p:nvSpPr>
+        <p:spPr>
+          <a:xfrm>
+            <a:off x="822960" y="502920"/>
+            <a:ext cx="10515600" cy="822960"/>
+          </a:xfrm>
+          <a:prstGeom prst="rect">
+            <a:avLst/>
+          </a:prstGeom>
+          <a:noFill/>
+        </p:spPr>
+        <p:txBody>
+          <a:bodyPr wrap="square">
+            <a:spAutoFit/>
+          </a:bodyPr>
+          <a:lstStyle/>
+          <a:p>
+            <a:pPr algn="l">
+              <a:spcAft>
+                <a:spcPts val="600"/>
+              </a:spcAft>
+            </a:pPr>
+            <a:r>
+              <a:rPr sz="2800" b="1" i="0">
+                <a:solidFill>
+                  <a:srgbClr val="2C5F2D"/>
+                </a:solidFill>
+                <a:latin typeface="Cambria"/>
+              </a:rPr>
+              <a:t>The Leader Feedback Round</a:t>
+            </a:r>
+          </a:p>
+        </p:txBody>
+      </p:sp>
+      <p:sp>
+        <p:nvSpPr>
+          <p:cNvPr id="4" name="TextBox 4"/>
+          <p:cNvSpPr txBox="1"/>
+          <p:nvPr/>
+        </p:nvSpPr>
+        <p:spPr>
+          <a:xfrm>
+            <a:off x="822960" y="1554480"/>
+            <a:ext cx="6675120" cy="4892040"/>
+          </a:xfrm>
+          <a:prstGeom prst="rect">
+            <a:avLst/>
+          </a:prstGeom>
+          <a:noFill/>
+        </p:spPr>
+        <p:txBody>
+          <a:bodyPr wrap="square" lIns="91440" tIns="91440" rIns="91440" bIns="91440"/>
+          <a:lstStyle/>
+          <a:p>
+            <a:pPr marL="274320" indent="-274320">
+              <a:spcAft>
+                <a:spcPts val="900"/>
+              </a:spcAft>
+            </a:pPr>
+            <a:r>
+              <a:rPr sz="2800" b="1" i="0">
+                <a:solidFill>
+                  <a:srgbClr val="97BC62"/>
+                </a:solidFill>
+                <a:latin typeface="Calibri"/>
+              </a:rPr>
+              <a:t>•  </a:t>
+            </a:r>
+            <a:r>
+              <a:rPr sz="2800" b="0" i="0">
+                <a:solidFill>
+                  <a:srgbClr val="222B22"/>
+                </a:solidFill>
+                <a:latin typeface="Calibri"/>
+              </a:rPr>
+              <a:t>Two rounds, same as every session — the container holder first, then the content presenter: three things each</a:t>
+            </a:r>
+          </a:p>
+          <a:p>
+            <a:pPr marL="685800" indent="-274320">
+              <a:spcAft>
+                <a:spcPts val="700"/>
+              </a:spcAft>
+            </a:pPr>
+            <a:r>
+              <a:rPr sz="2000" b="1" i="0">
+                <a:solidFill>
+                  <a:srgbClr val="97BC62"/>
+                </a:solidFill>
+                <a:latin typeface="Calibri"/>
+              </a:rPr>
+              <a:t>–  </a:t>
+            </a:r>
+            <a:r>
+              <a:rPr sz="2000" b="0" i="1">
+                <a:solidFill>
+                  <a:srgbClr val="222B22"/>
+                </a:solidFill>
+                <a:latin typeface="Calibri"/>
+              </a:rPr>
+              <a:t>“What I think went well tonight: ______”</a:t>
+            </a:r>
+          </a:p>
+          <a:p>
+            <a:pPr marL="685800" indent="-274320">
+              <a:spcAft>
+                <a:spcPts val="700"/>
+              </a:spcAft>
+            </a:pPr>
+            <a:r>
+              <a:rPr sz="2000" b="1" i="0">
+                <a:solidFill>
+                  <a:srgbClr val="97BC62"/>
+                </a:solidFill>
+                <a:latin typeface="Calibri"/>
+              </a:rPr>
+              <a:t>–  </a:t>
+            </a:r>
+            <a:r>
+              <a:rPr sz="2000" b="0" i="1">
+                <a:solidFill>
+                  <a:srgbClr val="222B22"/>
+                </a:solidFill>
+                <a:latin typeface="Calibri"/>
+              </a:rPr>
+              <a:t>“What I’d do differently next time: ______”</a:t>
+            </a:r>
+          </a:p>
+          <a:p>
+            <a:pPr marL="685800" indent="-274320">
+              <a:spcAft>
+                <a:spcPts val="700"/>
+              </a:spcAft>
+            </a:pPr>
+            <a:r>
+              <a:rPr sz="2000" b="1" i="0">
+                <a:solidFill>
+                  <a:srgbClr val="97BC62"/>
+                </a:solidFill>
+                <a:latin typeface="Calibri"/>
+              </a:rPr>
+              <a:t>–  </a:t>
+            </a:r>
+            <a:r>
+              <a:rPr sz="2000" b="0" i="1">
+                <a:solidFill>
+                  <a:srgbClr val="222B22"/>
+                </a:solidFill>
+                <a:latin typeface="Calibri"/>
+              </a:rPr>
+              <a:t>“If I were to teach tonight’s process to someone, I would tell them: ______”</a:t>
+            </a:r>
+          </a:p>
+          <a:p>
+            <a:pPr marL="274320" indent="-274320">
+              <a:spcAft>
+                <a:spcPts val="900"/>
+              </a:spcAft>
+            </a:pPr>
+            <a:r>
+              <a:rPr sz="2800" b="1" i="0">
+                <a:solidFill>
+                  <a:srgbClr val="97BC62"/>
+                </a:solidFill>
+                <a:latin typeface="Calibri"/>
+              </a:rPr>
+              <a:t>•  </a:t>
+            </a:r>
+            <a:r>
+              <a:rPr sz="2800" b="0" i="0">
+                <a:solidFill>
+                  <a:srgbClr val="222B22"/>
+                </a:solidFill>
+                <a:latin typeface="Calibri"/>
+              </a:rPr>
+              <a:t>Then the room — the same two questions about tonight</a:t>
+            </a:r>
+          </a:p>
+          <a:p>
+            <a:pPr marL="274320" indent="-274320">
+              <a:spcAft>
+                <a:spcPts val="900"/>
+              </a:spcAft>
+            </a:pPr>
+            <a:r>
+              <a:rPr sz="2800" b="1" i="0">
+                <a:solidFill>
+                  <a:srgbClr val="97BC62"/>
+                </a:solidFill>
+                <a:latin typeface="Calibri"/>
+              </a:rPr>
+              <a:t>•  </a:t>
+            </a:r>
+            <a:r>
+              <a:rPr sz="2800" b="0" i="0">
+                <a:solidFill>
+                  <a:srgbClr val="222B22"/>
+                </a:solidFill>
+                <a:latin typeface="Calibri"/>
+              </a:rPr>
+              <a:t>The leaders receive without defending — “thank you” is the whole response</a:t>
+            </a:r>
+          </a:p>
+        </p:txBody>
+      </p:sp>
+      <p:sp>
+        <p:nvSpPr>
+          <p:cNvPr id="90" name="SlideNum"/>
+          <p:cNvSpPr txBox="1"/>
+          <p:nvPr/>
+        </p:nvSpPr>
+        <p:spPr>
+          <a:xfrm>
+            <a:off x="11384280" y="6446520"/>
+            <a:ext cx="640080" cy="292608"/>
+          </a:xfrm>
+          <a:prstGeom prst="rect">
+            <a:avLst/>
+          </a:prstGeom>
+          <a:noFill/>
+        </p:spPr>
+        <p:txBody>
+          <a:bodyPr wrap="none" lIns="0" tIns="0" rIns="45720" bIns="0" anchor="ctr"/>
+          <a:lstStyle/>
+          <a:p>
+            <a:pPr algn="r"/>
+            <a:r>
+              <a:t>243</a:t>
+            </a:r>
+            <a:endParaRPr sz="1000" b="1">
+              <a:solidFill>
+                <a:srgbClr val="7A8A6E"/>
+              </a:solidFill>
+              <a:latin typeface="Calibri"/>
+            </a:endParaRPr>
+          </a:p>
+        </p:txBody>
+      </p:sp>
+      <p:pic>
+        <p:nvPicPr>
+          <p:cNvPr id="33" name="Picture 33" descr="compass on the trail - the weekly bearing check"/>
+          <p:cNvPicPr>
+            <a:picLocks noChangeAspect="1"/>
+          </p:cNvPicPr>
+          <p:nvPr/>
+        </p:nvPicPr>
+        <p:blipFill>
+          <a:blip r:embed="rId3"/>
+          <a:stretch>
+            <a:fillRect/>
+          </a:stretch>
+        </p:blipFill>
+        <p:spPr>
+          <a:xfrm>
+            <a:off x="8106160" y="1463040"/>
+            <a:ext cx="3259831" cy="4892040"/>
+          </a:xfrm>
+          <a:prstGeom prst="rect">
+            <a:avLst/>
+          </a:prstGeom>
+          <a:ln w="76200">
+            <a:solidFill>
+              <a:srgbClr val="FFFFFF"/>
+            </a:solidFill>
+          </a:ln>
+          <a:effectLst>
+            <a:outerShdw blurRad="63500" dist="25400" dir="5400000" rotWithShape="0">
+              <a:srgbClr val="000000">
+                <a:alpha val="35000"/>
+              </a:srgbClr>
+            </a:outerShdw>
+          </a:effectLst>
+        </p:spPr>
+      </p:pic>
+    </p:spTree>
+  </p:cSld>
+  <p:clrMapOvr>
+    <a:masterClrMapping/>
+  </p:clrMapOvr>
+</p:sld>
+</file>
+
+<file path=ppt/slides/slide15.xml><?xml version="1.0" encoding="utf-8"?>
+<p:sld xmlns:a="http://schemas.openxmlformats.org/drawingml/2006/main" xmlns:p="http://schemas.openxmlformats.org/presentationml/2006/main" xmlns:r="http://schemas.openxmlformats.org/officeDocument/2006/relationships">
+  <p:cSld>
+    <p:spTree>
+      <p:nvGrpSpPr>
+        <p:cNvPr id="1" name=""/>
+        <p:cNvGrpSpPr/>
+        <p:nvPr/>
+      </p:nvGrpSpPr>
+      <p:grpSpPr/>
+      <p:sp>
+        <p:nvSpPr>
+          <p:cNvPr id="2" name="Rectangle 1"/>
+          <p:cNvSpPr/>
+          <p:nvPr/>
+        </p:nvSpPr>
+        <p:spPr>
+          <a:xfrm>
+            <a:off x="0" y="0"/>
+            <a:ext cx="12192000" cy="6858000"/>
+          </a:xfrm>
+          <a:prstGeom prst="rect">
+            <a:avLst/>
+          </a:prstGeom>
+          <a:solidFill>
+            <a:srgbClr val="FFFFFF"/>
+          </a:solidFill>
+          <a:ln>
+            <a:noFill/>
+          </a:ln>
+          <a:effectLst/>
+        </p:spPr>
+        <p:style>
+          <a:lnRef idx="1">
+            <a:schemeClr val="accent1"/>
+          </a:lnRef>
+          <a:fillRef idx="3">
+            <a:schemeClr val="accent1"/>
+          </a:fillRef>
+          <a:effectRef idx="2">
+            <a:schemeClr val="accent1"/>
+          </a:effectRef>
+          <a:fontRef idx="minor">
+            <a:schemeClr val="lt1"/>
+          </a:fontRef>
+        </p:style>
+        <p:txBody>
+          <a:bodyPr rtlCol="0" anchor="ctr"/>
+          <a:lstStyle/>
+          <a:p>
+            <a:pPr algn="ctr"/>
+          </a:p>
+        </p:txBody>
+      </p:sp>
+      <p:sp>
+        <p:nvSpPr>
+          <p:cNvPr id="3" name="TextBox 2"/>
+          <p:cNvSpPr txBox="1"/>
+          <p:nvPr/>
+        </p:nvSpPr>
+        <p:spPr>
+          <a:xfrm>
+            <a:off x="822960" y="502920"/>
+            <a:ext cx="10515600" cy="822960"/>
+          </a:xfrm>
+          <a:prstGeom prst="rect">
+            <a:avLst/>
+          </a:prstGeom>
+          <a:noFill/>
+        </p:spPr>
+        <p:txBody>
+          <a:bodyPr wrap="square">
+            <a:spAutoFit/>
+          </a:bodyPr>
+          <a:lstStyle/>
+          <a:p>
+            <a:r>
+              <a:rPr sz="2800" b="1">
+                <a:solidFill>
+                  <a:srgbClr val="2C5F2D"/>
+                </a:solidFill>
+                <a:latin typeface="Cambria"/>
+              </a:rPr>
+              <a:t>Where We Are — the Four Connects</a:t>
+            </a:r>
+          </a:p>
+        </p:txBody>
+      </p:sp>
+      <p:pic>
+        <p:nvPicPr>
+          <p:cNvPr id="4" name="Picture 3" descr="four-connects.png"/>
+          <p:cNvPicPr>
+            <a:picLocks noChangeAspect="1"/>
+          </p:cNvPicPr>
+          <p:nvPr/>
+        </p:nvPicPr>
+        <p:blipFill>
+          <a:blip r:embed="rId2"/>
+          <a:stretch>
+            <a:fillRect/>
+          </a:stretch>
+        </p:blipFill>
+        <p:spPr>
+          <a:xfrm>
+            <a:off x="932688" y="1645920"/>
+            <a:ext cx="10332720" cy="3708663"/>
+          </a:xfrm>
+          <a:prstGeom prst="rect">
+            <a:avLst/>
+          </a:prstGeom>
+        </p:spPr>
+      </p:pic>
+      <p:sp>
+        <p:nvSpPr>
+          <p:cNvPr id="5" name="TextBox 4"/>
+          <p:cNvSpPr txBox="1"/>
+          <p:nvPr/>
+        </p:nvSpPr>
+        <p:spPr>
+          <a:xfrm>
+            <a:off x="822960" y="5623560"/>
+            <a:ext cx="10515600" cy="914400"/>
+          </a:xfrm>
+          <a:prstGeom prst="rect">
+            <a:avLst/>
+          </a:prstGeom>
+          <a:noFill/>
+        </p:spPr>
+        <p:txBody>
+          <a:bodyPr wrap="square">
+            <a:spAutoFit/>
+          </a:bodyPr>
+          <a:lstStyle/>
+          <a:p>
+            <a:r>
+              <a:rPr sz="1800" b="0">
+                <a:solidFill>
+                  <a:srgbClr val="222B22"/>
+                </a:solidFill>
+                <a:latin typeface="Calibri"/>
+              </a:rPr>
+              <a:t>Session 19 rehearses across the whole map — </a:t>
+            </a:r>
+            <a:r>
+              <a:rPr sz="1800" b="1">
+                <a:solidFill>
+                  <a:srgbClr val="2C5F2D"/>
+                </a:solidFill>
+                <a:latin typeface="Calibri"/>
+              </a:rPr>
+              <a:t>all four Connects</a:t>
+            </a:r>
+            <a:r>
+              <a:rPr sz="1800" b="0">
+                <a:solidFill>
+                  <a:srgbClr val="222B22"/>
+                </a:solidFill>
+                <a:latin typeface="Calibri"/>
+              </a:rPr>
+              <a:t>, in the Companions' hands. Each connection makes the next one real (Matt. 22:37–40).</a:t>
+            </a:r>
+          </a:p>
+        </p:txBody>
+      </p:sp>
+      <p:sp>
+        <p:nvSpPr>
+          <p:cNvPr id="90" name="SlideNum"/>
+          <p:cNvSpPr txBox="1"/>
+          <p:nvPr/>
+        </p:nvSpPr>
+        <p:spPr>
+          <a:xfrm>
+            <a:off x="11384280" y="6446520"/>
+            <a:ext cx="640080" cy="292608"/>
+          </a:xfrm>
+          <a:prstGeom prst="rect">
+            <a:avLst/>
+          </a:prstGeom>
+          <a:noFill/>
+        </p:spPr>
+        <p:txBody>
+          <a:bodyPr wrap="none" lIns="0" tIns="0" rIns="45720" bIns="0" anchor="ctr"/>
+          <a:lstStyle/>
+          <a:p>
+            <a:pPr algn="r"/>
+            <a:r>
+              <a:t>231a</a:t>
+            </a:r>
+            <a:endParaRPr sz="1000" b="1">
+              <a:solidFill>
+                <a:srgbClr val="7A8A6E"/>
+              </a:solidFill>
+              <a:latin typeface="Calibri"/>
+            </a:endParaRPr>
+          </a:p>
+        </p:txBody>
+      </p:sp>
+    </p:spTree>
+  </p:cSld>
+  <p:clrMapOvr>
+    <a:masterClrMapping/>
+  </p:clrMapOvr>
+</p:sld>
+</file>
+
+<file path=ppt/slides/slide16.xml><?xml version="1.0" encoding="utf-8"?>
+<p:sld xmlns:a="http://schemas.openxmlformats.org/drawingml/2006/main" xmlns:p="http://schemas.openxmlformats.org/presentationml/2006/main" xmlns:r="http://schemas.openxmlformats.org/officeDocument/2006/relationships">
+  <p:cSld>
+    <p:spTree>
+      <p:nvGrpSpPr>
+        <p:cNvPr id="1" name=""/>
+        <p:cNvGrpSpPr/>
+        <p:nvPr/>
+      </p:nvGrpSpPr>
+      <p:grpSpPr/>
+      <p:sp>
+        <p:nvSpPr>
+          <p:cNvPr id="2" name="Rectangle 1"/>
+          <p:cNvSpPr/>
+          <p:nvPr/>
+        </p:nvSpPr>
+        <p:spPr>
+          <a:xfrm>
+            <a:off x="0" y="0"/>
+            <a:ext cx="12192000" cy="6858000"/>
+          </a:xfrm>
+          <a:prstGeom prst="rect">
+            <a:avLst/>
+          </a:prstGeom>
+          <a:solidFill>
+            <a:srgbClr val="FFFFFF"/>
+          </a:solidFill>
+          <a:ln>
+            <a:noFill/>
+          </a:ln>
+          <a:effectLst/>
+        </p:spPr>
+        <p:style>
+          <a:lnRef idx="1">
+            <a:schemeClr val="accent1"/>
+          </a:lnRef>
+          <a:fillRef idx="3">
+            <a:schemeClr val="accent1"/>
+          </a:fillRef>
+          <a:effectRef idx="2">
+            <a:schemeClr val="accent1"/>
+          </a:effectRef>
+          <a:fontRef idx="minor">
+            <a:schemeClr val="lt1"/>
+          </a:fontRef>
+        </p:style>
+        <p:txBody>
+          <a:bodyPr rtlCol="0" anchor="ctr"/>
+          <a:lstStyle/>
+          <a:p>
+            <a:pPr algn="ctr"/>
+          </a:p>
+        </p:txBody>
+      </p:sp>
+      <p:sp>
+        <p:nvSpPr>
+          <p:cNvPr id="3" name="TextBox 2"/>
+          <p:cNvSpPr txBox="1"/>
+          <p:nvPr/>
+        </p:nvSpPr>
+        <p:spPr>
+          <a:xfrm>
+            <a:off x="822960" y="502920"/>
+            <a:ext cx="10515600" cy="822960"/>
+          </a:xfrm>
+          <a:prstGeom prst="rect">
+            <a:avLst/>
+          </a:prstGeom>
+          <a:noFill/>
+        </p:spPr>
+        <p:txBody>
+          <a:bodyPr wrap="square">
+            <a:spAutoFit/>
+          </a:bodyPr>
+          <a:lstStyle/>
+          <a:p>
+            <a:r>
+              <a:rPr sz="2800" b="1">
+                <a:solidFill>
+                  <a:srgbClr val="2C5F2D"/>
+                </a:solidFill>
+                <a:latin typeface="Cambria"/>
+              </a:rPr>
+              <a:t>The Take-Home Sheet — the Daily Rhythm</a:t>
+            </a:r>
+          </a:p>
+        </p:txBody>
+      </p:sp>
+      <p:pic>
+        <p:nvPicPr>
+          <p:cNvPr id="4" name="Picture 3" descr="s19_part1.png"/>
+          <p:cNvPicPr>
+            <a:picLocks noChangeAspect="1"/>
+          </p:cNvPicPr>
+          <p:nvPr/>
+        </p:nvPicPr>
+        <p:blipFill>
+          <a:blip r:embed="rId2"/>
+          <a:stretch>
+            <a:fillRect/>
+          </a:stretch>
+        </p:blipFill>
+        <p:spPr>
+          <a:xfrm>
+            <a:off x="1798167" y="1463040"/>
+            <a:ext cx="8595360" cy="4457308"/>
+          </a:xfrm>
+          <a:prstGeom prst="rect">
+            <a:avLst/>
+          </a:prstGeom>
+          <a:ln w="12700">
+            <a:solidFill>
+              <a:srgbClr val="C8C8C8"/>
+            </a:solidFill>
+          </a:ln>
+        </p:spPr>
+      </p:pic>
+      <p:sp>
+        <p:nvSpPr>
+          <p:cNvPr id="5" name="TextBox 4"/>
+          <p:cNvSpPr txBox="1"/>
+          <p:nvPr/>
+        </p:nvSpPr>
+        <p:spPr>
+          <a:xfrm>
+            <a:off x="822960" y="6355080"/>
+            <a:ext cx="10515600" cy="411480"/>
+          </a:xfrm>
+          <a:prstGeom prst="rect">
+            <a:avLst/>
+          </a:prstGeom>
+          <a:noFill/>
+        </p:spPr>
+        <p:txBody>
+          <a:bodyPr wrap="square">
+            <a:spAutoFit/>
+          </a:bodyPr>
+          <a:lstStyle/>
+          <a:p>
+            <a:r>
+              <a:rPr sz="1400" i="1">
+                <a:solidFill>
+                  <a:srgbClr val="595959"/>
+                </a:solidFill>
+                <a:latin typeface="Calibri"/>
+              </a:rPr>
+              <a:t>Handed out now — this is the sheet in your hands.</a:t>
+            </a:r>
+          </a:p>
+        </p:txBody>
+      </p:sp>
+      <p:sp>
+        <p:nvSpPr>
+          <p:cNvPr id="90" name="SlideNum"/>
+          <p:cNvSpPr txBox="1"/>
+          <p:nvPr/>
+        </p:nvSpPr>
+        <p:spPr>
+          <a:xfrm>
+            <a:off x="11384280" y="6446520"/>
+            <a:ext cx="640080" cy="292608"/>
+          </a:xfrm>
+          <a:prstGeom prst="rect">
+            <a:avLst/>
+          </a:prstGeom>
+          <a:noFill/>
+        </p:spPr>
+        <p:txBody>
+          <a:bodyPr wrap="none" lIns="0" tIns="0" rIns="45720" bIns="0" anchor="ctr"/>
+          <a:lstStyle/>
+          <a:p>
+            <a:pPr algn="r"/>
+            <a:r>
+              <a:t>241</a:t>
+            </a:r>
+            <a:endParaRPr sz="1000" b="1">
+              <a:solidFill>
+                <a:srgbClr val="7A8A6E"/>
+              </a:solidFill>
+              <a:latin typeface="Calibri"/>
+            </a:endParaRPr>
+          </a:p>
+        </p:txBody>
+      </p:sp>
+    </p:spTree>
+  </p:cSld>
+  <p:clrMapOvr>
+    <a:masterClrMapping/>
+  </p:clrMapOvr>
+</p:sld>
+</file>
+
+<file path=ppt/slides/slide17.xml><?xml version="1.0" encoding="utf-8"?>
+<p:sld xmlns:a="http://schemas.openxmlformats.org/drawingml/2006/main" xmlns:p="http://schemas.openxmlformats.org/presentationml/2006/main" xmlns:r="http://schemas.openxmlformats.org/officeDocument/2006/relationships">
+  <p:cSld>
+    <p:spTree>
+      <p:nvGrpSpPr>
+        <p:cNvPr id="1" name=""/>
+        <p:cNvGrpSpPr/>
+        <p:nvPr/>
+      </p:nvGrpSpPr>
+      <p:grpSpPr/>
+      <p:sp>
+        <p:nvSpPr>
+          <p:cNvPr id="2" name="Rectangle 1"/>
+          <p:cNvSpPr/>
+          <p:nvPr/>
+        </p:nvSpPr>
+        <p:spPr>
+          <a:xfrm>
+            <a:off x="0" y="0"/>
+            <a:ext cx="12192000" cy="6858000"/>
+          </a:xfrm>
+          <a:prstGeom prst="rect">
+            <a:avLst/>
+          </a:prstGeom>
+          <a:solidFill>
+            <a:srgbClr val="FFFFFF"/>
+          </a:solidFill>
+          <a:ln>
+            <a:noFill/>
+          </a:ln>
+          <a:effectLst/>
+        </p:spPr>
+        <p:style>
+          <a:lnRef idx="1">
+            <a:schemeClr val="accent1"/>
+          </a:lnRef>
+          <a:fillRef idx="3">
+            <a:schemeClr val="accent1"/>
+          </a:fillRef>
+          <a:effectRef idx="2">
+            <a:schemeClr val="accent1"/>
+          </a:effectRef>
+          <a:fontRef idx="minor">
+            <a:schemeClr val="lt1"/>
+          </a:fontRef>
+        </p:style>
+        <p:txBody>
+          <a:bodyPr rtlCol="0" anchor="ctr"/>
+          <a:lstStyle/>
+          <a:p>
+            <a:pPr algn="ctr"/>
+          </a:p>
+        </p:txBody>
+      </p:sp>
+      <p:sp>
+        <p:nvSpPr>
+          <p:cNvPr id="3" name="TextBox 2"/>
+          <p:cNvSpPr txBox="1"/>
+          <p:nvPr/>
+        </p:nvSpPr>
+        <p:spPr>
+          <a:xfrm>
+            <a:off x="822960" y="502920"/>
+            <a:ext cx="10515600" cy="822960"/>
+          </a:xfrm>
+          <a:prstGeom prst="rect">
+            <a:avLst/>
+          </a:prstGeom>
+          <a:noFill/>
+        </p:spPr>
+        <p:txBody>
+          <a:bodyPr wrap="square">
+            <a:spAutoFit/>
+          </a:bodyPr>
+          <a:lstStyle/>
+          <a:p>
+            <a:r>
+              <a:rPr sz="2800" b="1">
+                <a:solidFill>
+                  <a:srgbClr val="2C5F2D"/>
+                </a:solidFill>
+                <a:latin typeface="Cambria"/>
+              </a:rPr>
+              <a:t>The Take-Home Sheet — the Four Parts</a:t>
+            </a:r>
+          </a:p>
+        </p:txBody>
+      </p:sp>
+      <p:pic>
+        <p:nvPicPr>
+          <p:cNvPr id="4" name="Picture 3" descr="s19_part2.png"/>
+          <p:cNvPicPr>
+            <a:picLocks noChangeAspect="1"/>
+          </p:cNvPicPr>
+          <p:nvPr/>
+        </p:nvPicPr>
+        <p:blipFill>
+          <a:blip r:embed="rId2"/>
+          <a:stretch>
+            <a:fillRect/>
+          </a:stretch>
+        </p:blipFill>
+        <p:spPr>
+          <a:xfrm>
+            <a:off x="2592753" y="1463040"/>
+            <a:ext cx="7006189" cy="4709160"/>
+          </a:xfrm>
+          <a:prstGeom prst="rect">
+            <a:avLst/>
+          </a:prstGeom>
+          <a:ln w="12700">
+            <a:solidFill>
+              <a:srgbClr val="C8C8C8"/>
+            </a:solidFill>
+          </a:ln>
+        </p:spPr>
+      </p:pic>
+      <p:sp>
+        <p:nvSpPr>
+          <p:cNvPr id="5" name="TextBox 4"/>
+          <p:cNvSpPr txBox="1"/>
+          <p:nvPr/>
+        </p:nvSpPr>
+        <p:spPr>
+          <a:xfrm>
+            <a:off x="822960" y="6355080"/>
+            <a:ext cx="10515600" cy="411480"/>
+          </a:xfrm>
+          <a:prstGeom prst="rect">
+            <a:avLst/>
+          </a:prstGeom>
+          <a:noFill/>
+        </p:spPr>
+        <p:txBody>
+          <a:bodyPr wrap="square">
+            <a:spAutoFit/>
+          </a:bodyPr>
+          <a:lstStyle/>
+          <a:p>
+            <a:r>
+              <a:rPr sz="1400" i="1">
+                <a:solidFill>
+                  <a:srgbClr val="595959"/>
+                </a:solidFill>
+                <a:latin typeface="Calibri"/>
+              </a:rPr>
+              <a:t>One practice at a time — and a partner expecting you at the end of week one.</a:t>
+            </a:r>
+          </a:p>
+        </p:txBody>
+      </p:sp>
+      <p:sp>
+        <p:nvSpPr>
+          <p:cNvPr id="90" name="SlideNum"/>
+          <p:cNvSpPr txBox="1"/>
+          <p:nvPr/>
+        </p:nvSpPr>
+        <p:spPr>
+          <a:xfrm>
+            <a:off x="11384280" y="6446520"/>
+            <a:ext cx="640080" cy="292608"/>
+          </a:xfrm>
+          <a:prstGeom prst="rect">
+            <a:avLst/>
+          </a:prstGeom>
+          <a:noFill/>
+        </p:spPr>
+        <p:txBody>
+          <a:bodyPr wrap="none" lIns="0" tIns="0" rIns="45720" bIns="0" anchor="ctr"/>
+          <a:lstStyle/>
+          <a:p>
+            <a:pPr algn="r"/>
+            <a:r>
+              <a:t>241a</a:t>
+            </a:r>
+            <a:endParaRPr sz="1000" b="1">
+              <a:solidFill>
+                <a:srgbClr val="7A8A6E"/>
+              </a:solidFill>
+              <a:latin typeface="Calibri"/>
+            </a:endParaRPr>
+          </a:p>
+        </p:txBody>
+      </p:sp>
+    </p:spTree>
+  </p:cSld>
+  <p:clrMapOvr>
+    <a:masterClrMapping/>
+  </p:clrMapOvr>
+</p:sld>
+</file>
+
+<file path=ppt/slides/slide2.xml><?xml version="1.0" encoding="utf-8"?>
 <p:sld xmlns:a="http://schemas.openxmlformats.org/drawingml/2006/main" xmlns:r="http://schemas.openxmlformats.org/officeDocument/2006/relationships" xmlns:p="http://schemas.openxmlformats.org/presentationml/2006/main">
   <p:cSld>
     <p:spTree>
@@ -5158,7 +7096,7 @@
 </p:sld>
 </file>
 
-<file path=ppt/slides/slide232.xml><?xml version="1.0" encoding="utf-8"?>
+<file path=ppt/slides/slide3.xml><?xml version="1.0" encoding="utf-8"?>
 <p:sld xmlns:a="http://schemas.openxmlformats.org/drawingml/2006/main" xmlns:r="http://schemas.openxmlformats.org/officeDocument/2006/relationships" xmlns:p="http://schemas.openxmlformats.org/presentationml/2006/main">
   <p:cSld>
     <p:spTree>
@@ -5477,7 +7415,7 @@
                 </a:solidFill>
                 <a:latin typeface="Calibri"/>
               </a:rPr>
-              <a:t>Merge and between-session</a:t>
+              <a:t>Merge and homework</a:t>
             </a:r>
           </a:p>
           <a:p>
@@ -5634,7 +7572,7 @@
 </p:sld>
 </file>
 
-<file path=ppt/slides/slide233.xml><?xml version="1.0" encoding="utf-8"?>
+<file path=ppt/slides/slide4.xml><?xml version="1.0" encoding="utf-8"?>
 <p:sld xmlns:a="http://schemas.openxmlformats.org/drawingml/2006/main" xmlns:r="http://schemas.openxmlformats.org/officeDocument/2006/relationships" xmlns:p="http://schemas.openxmlformats.org/presentationml/2006/main">
   <p:cSld>
     <p:spTree>
@@ -5981,7 +7919,7 @@
 </p:sld>
 </file>
 
-<file path=ppt/slides/slide234.xml><?xml version="1.0" encoding="utf-8"?>
+<file path=ppt/slides/slide5.xml><?xml version="1.0" encoding="utf-8"?>
 <p:sld xmlns:a="http://schemas.openxmlformats.org/drawingml/2006/main" xmlns:r="http://schemas.openxmlformats.org/officeDocument/2006/relationships" xmlns:p="http://schemas.openxmlformats.org/presentationml/2006/main">
   <p:cSld>
     <p:spTree>
@@ -6349,7 +8287,7 @@
 </p:sld>
 </file>
 
-<file path=ppt/slides/slide235.xml><?xml version="1.0" encoding="utf-8"?>
+<file path=ppt/slides/slide6.xml><?xml version="1.0" encoding="utf-8"?>
 <p:sld xmlns:a="http://schemas.openxmlformats.org/drawingml/2006/main" xmlns:r="http://schemas.openxmlformats.org/officeDocument/2006/relationships" xmlns:p="http://schemas.openxmlformats.org/presentationml/2006/main">
   <p:cSld>
     <p:spTree>
@@ -6571,7 +8509,7 @@
 </p:sld>
 </file>
 
-<file path=ppt/slides/slide236.xml><?xml version="1.0" encoding="utf-8"?>
+<file path=ppt/slides/slide7.xml><?xml version="1.0" encoding="utf-8"?>
 <p:sld xmlns:a="http://schemas.openxmlformats.org/drawingml/2006/main" xmlns:r="http://schemas.openxmlformats.org/officeDocument/2006/relationships" xmlns:p="http://schemas.openxmlformats.org/presentationml/2006/main">
   <p:cSld>
     <p:spTree>
@@ -6923,7 +8861,7 @@
 </p:sld>
 </file>
 
-<file path=ppt/slides/slide237.xml><?xml version="1.0" encoding="utf-8"?>
+<file path=ppt/slides/slide8.xml><?xml version="1.0" encoding="utf-8"?>
 <p:sld xmlns:a="http://schemas.openxmlformats.org/drawingml/2006/main" xmlns:r="http://schemas.openxmlformats.org/officeDocument/2006/relationships" xmlns:p="http://schemas.openxmlformats.org/presentationml/2006/main">
   <p:cSld>
     <p:spTree>
@@ -7195,7 +9133,7 @@
 </p:sld>
 </file>
 
-<file path=ppt/slides/slide238.xml><?xml version="1.0" encoding="utf-8"?>
+<file path=ppt/slides/slide9.xml><?xml version="1.0" encoding="utf-8"?>
 <p:sld xmlns:a="http://schemas.openxmlformats.org/drawingml/2006/main" xmlns:r="http://schemas.openxmlformats.org/officeDocument/2006/relationships" xmlns:p="http://schemas.openxmlformats.org/presentationml/2006/main">
   <p:cSld>
     <p:spTree>
@@ -7459,1412 +9397,6 @@
           </a:p>
         </p:txBody>
       </p:sp>
-    </p:spTree>
-  </p:cSld>
-  <p:clrMapOvr>
-    <a:masterClrMapping/>
-  </p:clrMapOvr>
-</p:sld>
-</file>
-
-<file path=ppt/slides/slide239.xml><?xml version="1.0" encoding="utf-8"?>
-<p:sld xmlns:a="http://schemas.openxmlformats.org/drawingml/2006/main" xmlns:r="http://schemas.openxmlformats.org/officeDocument/2006/relationships" xmlns:p="http://schemas.openxmlformats.org/presentationml/2006/main">
-  <p:cSld>
-    <p:spTree>
-      <p:nvGrpSpPr>
-        <p:cNvPr id="1" name=""/>
-        <p:cNvGrpSpPr/>
-        <p:nvPr/>
-      </p:nvGrpSpPr>
-      <p:grpSpPr>
-        <a:xfrm>
-          <a:off x="0" y="0"/>
-          <a:ext cx="0" cy="0"/>
-          <a:chOff x="0" y="0"/>
-          <a:chExt cx="0" cy="0"/>
-        </a:xfrm>
-      </p:grpSpPr>
-      <p:sp>
-        <p:nvSpPr>
-          <p:cNvPr id="2" name="Rectangle 1"/>
-          <p:cNvSpPr/>
-          <p:nvPr/>
-        </p:nvSpPr>
-        <p:spPr>
-          <a:xfrm>
-            <a:off x="0" y="0"/>
-            <a:ext cx="12191695" cy="6858000"/>
-          </a:xfrm>
-          <a:prstGeom prst="rect">
-            <a:avLst/>
-          </a:prstGeom>
-          <a:solidFill>
-            <a:srgbClr val="FFFFFF"/>
-          </a:solidFill>
-          <a:ln>
-            <a:noFill/>
-          </a:ln>
-        </p:spPr>
-        <p:txBody>
-          <a:bodyPr/>
-          <a:lstStyle/>
-          <a:p>
-            <a:endParaRPr/>
-          </a:p>
-        </p:txBody>
-      </p:sp>
-      <p:sp>
-        <p:nvSpPr>
-          <p:cNvPr id="3" name="TextBox 2"/>
-          <p:cNvSpPr txBox="1"/>
-          <p:nvPr/>
-        </p:nvSpPr>
-        <p:spPr>
-          <a:xfrm>
-            <a:off x="822960" y="502920"/>
-            <a:ext cx="10515600" cy="822960"/>
-          </a:xfrm>
-          <a:prstGeom prst="rect">
-            <a:avLst/>
-          </a:prstGeom>
-          <a:noFill/>
-        </p:spPr>
-        <p:txBody>
-          <a:bodyPr wrap="square">
-            <a:spAutoFit/>
-          </a:bodyPr>
-          <a:lstStyle/>
-          <a:p>
-            <a:pPr algn="l">
-              <a:spcAft>
-                <a:spcPts val="600"/>
-              </a:spcAft>
-            </a:pPr>
-            <a:r>
-              <a:rPr sz="2800" b="1" i="0">
-                <a:solidFill>
-                  <a:srgbClr val="2C5F2D"/>
-                </a:solidFill>
-                <a:latin typeface="Cambria"/>
-              </a:rPr>
-              <a:t>Second pair Feedback</a:t>
-            </a:r>
-          </a:p>
-        </p:txBody>
-      </p:sp>
-      <p:sp>
-        <p:nvSpPr>
-          <p:cNvPr id="4" name="TextBox 4"/>
-          <p:cNvSpPr txBox="1"/>
-          <p:nvPr/>
-        </p:nvSpPr>
-        <p:spPr>
-          <a:xfrm>
-            <a:off x="822960" y="1554480"/>
-            <a:ext cx="10515600" cy="4892040"/>
-          </a:xfrm>
-          <a:prstGeom prst="rect">
-            <a:avLst/>
-          </a:prstGeom>
-          <a:noFill/>
-        </p:spPr>
-        <p:txBody>
-          <a:bodyPr wrap="square" lIns="91440" tIns="91440" rIns="91440" bIns="91440"/>
-          <a:lstStyle/>
-          <a:p>
-            <a:pPr marL="274320" indent="-274320">
-              <a:spcAft>
-                <a:spcPts val="900"/>
-              </a:spcAft>
-            </a:pPr>
-            <a:r>
-              <a:rPr sz="2800" b="1" i="0">
-                <a:solidFill>
-                  <a:srgbClr val="97BC62"/>
-                </a:solidFill>
-                <a:latin typeface="Calibri"/>
-              </a:rPr>
-              <a:t>•  </a:t>
-            </a:r>
-            <a:r>
-              <a:rPr sz="2800" b="0" i="0">
-                <a:solidFill>
-                  <a:srgbClr val="222B22"/>
-                </a:solidFill>
-                <a:latin typeface="Calibri"/>
-              </a:rPr>
-              <a:t>Same shape, briefer — the adult’s keep and adjust, then one pair voice</a:t>
-            </a:r>
-          </a:p>
-          <a:p>
-            <a:pPr marL="274320" indent="-274320">
-              <a:spcAft>
-                <a:spcPts val="900"/>
-              </a:spcAft>
-            </a:pPr>
-            <a:r>
-              <a:rPr sz="2800" b="1" i="0">
-                <a:solidFill>
-                  <a:srgbClr val="97BC62"/>
-                </a:solidFill>
-                <a:latin typeface="Calibri"/>
-              </a:rPr>
-              <a:t>•  </a:t>
-            </a:r>
-            <a:r>
-              <a:rPr sz="2800" b="0" i="0">
-                <a:solidFill>
-                  <a:srgbClr val="222B22"/>
-                </a:solidFill>
-                <a:latin typeface="Calibri"/>
-              </a:rPr>
-              <a:t>The keep, wherever honest, names the adjust that got tried</a:t>
-            </a:r>
-          </a:p>
-          <a:p>
-            <a:pPr marL="274320" indent="-274320">
-              <a:spcAft>
-                <a:spcPts val="900"/>
-              </a:spcAft>
-            </a:pPr>
-            <a:r>
-              <a:rPr sz="2800" b="1" i="0">
-                <a:solidFill>
-                  <a:srgbClr val="97BC62"/>
-                </a:solidFill>
-                <a:latin typeface="Calibri"/>
-              </a:rPr>
-              <a:t>•  </a:t>
-            </a:r>
-            <a:r>
-              <a:rPr sz="2800" b="0" i="0">
-                <a:solidFill>
-                  <a:srgbClr val="222B22"/>
-                </a:solidFill>
-                <a:latin typeface="Calibri"/>
-              </a:rPr>
-              <a:t>Both recorded per teacher — these notes are next week’s prep meeting</a:t>
-            </a:r>
-          </a:p>
-        </p:txBody>
-      </p:sp>
-      <p:sp>
-        <p:nvSpPr>
-          <p:cNvPr id="90" name="SlideNum"/>
-          <p:cNvSpPr txBox="1"/>
-          <p:nvPr/>
-        </p:nvSpPr>
-        <p:spPr>
-          <a:xfrm>
-            <a:off x="11384280" y="6446520"/>
-            <a:ext cx="640080" cy="292608"/>
-          </a:xfrm>
-          <a:prstGeom prst="rect">
-            <a:avLst/>
-          </a:prstGeom>
-          <a:noFill/>
-        </p:spPr>
-        <p:txBody>
-          <a:bodyPr wrap="none" lIns="0" tIns="0" rIns="45720" bIns="0" anchor="ctr"/>
-          <a:lstStyle/>
-          <a:p>
-            <a:pPr algn="r"/>
-            <a:r>
-              <a:t>239</a:t>
-            </a:r>
-            <a:endParaRPr sz="1000" b="1">
-              <a:solidFill>
-                <a:srgbClr val="7A8A6E"/>
-              </a:solidFill>
-              <a:latin typeface="Calibri"/>
-            </a:endParaRPr>
-          </a:p>
-        </p:txBody>
-      </p:sp>
-    </p:spTree>
-  </p:cSld>
-  <p:clrMapOvr>
-    <a:masterClrMapping/>
-  </p:clrMapOvr>
-</p:sld>
-</file>
-
-<file path=ppt/slides/slide240.xml><?xml version="1.0" encoding="utf-8"?>
-<p:sld xmlns:a="http://schemas.openxmlformats.org/drawingml/2006/main" xmlns:r="http://schemas.openxmlformats.org/officeDocument/2006/relationships" xmlns:p="http://schemas.openxmlformats.org/presentationml/2006/main">
-  <p:cSld>
-    <p:spTree>
-      <p:nvGrpSpPr>
-        <p:cNvPr id="1" name=""/>
-        <p:cNvGrpSpPr/>
-        <p:nvPr/>
-      </p:nvGrpSpPr>
-      <p:grpSpPr>
-        <a:xfrm>
-          <a:off x="0" y="0"/>
-          <a:ext cx="0" cy="0"/>
-          <a:chOff x="0" y="0"/>
-          <a:chExt cx="0" cy="0"/>
-        </a:xfrm>
-      </p:grpSpPr>
-      <p:sp>
-        <p:nvSpPr>
-          <p:cNvPr id="2" name="Rectangle 1"/>
-          <p:cNvSpPr/>
-          <p:nvPr/>
-        </p:nvSpPr>
-        <p:spPr>
-          <a:xfrm>
-            <a:off x="0" y="0"/>
-            <a:ext cx="12191695" cy="6858000"/>
-          </a:xfrm>
-          <a:prstGeom prst="rect">
-            <a:avLst/>
-          </a:prstGeom>
-          <a:solidFill>
-            <a:srgbClr val="FFFFFF"/>
-          </a:solidFill>
-          <a:ln>
-            <a:noFill/>
-          </a:ln>
-        </p:spPr>
-        <p:txBody>
-          <a:bodyPr/>
-          <a:lstStyle/>
-          <a:p>
-            <a:endParaRPr/>
-          </a:p>
-        </p:txBody>
-      </p:sp>
-      <p:sp>
-        <p:nvSpPr>
-          <p:cNvPr id="3" name="TextBox 2"/>
-          <p:cNvSpPr txBox="1"/>
-          <p:nvPr/>
-        </p:nvSpPr>
-        <p:spPr>
-          <a:xfrm>
-            <a:off x="822960" y="502920"/>
-            <a:ext cx="10515600" cy="822960"/>
-          </a:xfrm>
-          <a:prstGeom prst="rect">
-            <a:avLst/>
-          </a:prstGeom>
-          <a:noFill/>
-        </p:spPr>
-        <p:txBody>
-          <a:bodyPr wrap="square">
-            <a:spAutoFit/>
-          </a:bodyPr>
-          <a:lstStyle/>
-          <a:p>
-            <a:pPr algn="l">
-              <a:spcAft>
-                <a:spcPts val="600"/>
-              </a:spcAft>
-            </a:pPr>
-            <a:r>
-              <a:rPr sz="2800" b="1" i="0">
-                <a:solidFill>
-                  <a:srgbClr val="2C5F2D"/>
-                </a:solidFill>
-                <a:latin typeface="Cambria"/>
-              </a:rPr>
-              <a:t>Merge and Between-Session</a:t>
-            </a:r>
-          </a:p>
-        </p:txBody>
-      </p:sp>
-      <p:sp>
-        <p:nvSpPr>
-          <p:cNvPr id="4" name="TextBox 4"/>
-          <p:cNvSpPr txBox="1"/>
-          <p:nvPr/>
-        </p:nvSpPr>
-        <p:spPr>
-          <a:xfrm>
-            <a:off x="822960" y="1554480"/>
-            <a:ext cx="10515600" cy="4892040"/>
-          </a:xfrm>
-          <a:prstGeom prst="rect">
-            <a:avLst/>
-          </a:prstGeom>
-          <a:noFill/>
-        </p:spPr>
-        <p:txBody>
-          <a:bodyPr wrap="square" lIns="91440" tIns="91440" rIns="91440" bIns="91440"/>
-          <a:lstStyle/>
-          <a:p>
-            <a:pPr marL="274320" indent="-274320">
-              <a:spcAft>
-                <a:spcPts val="900"/>
-              </a:spcAft>
-            </a:pPr>
-            <a:r>
-              <a:rPr sz="2800" b="1" i="0">
-                <a:solidFill>
-                  <a:srgbClr val="97BC62"/>
-                </a:solidFill>
-                <a:latin typeface="Calibri"/>
-              </a:rPr>
-              <a:t>•  </a:t>
-            </a:r>
-            <a:r>
-              <a:rPr sz="2800" b="0" i="0">
-                <a:solidFill>
-                  <a:srgbClr val="222B22"/>
-                </a:solidFill>
-                <a:latin typeface="Calibri"/>
-              </a:rPr>
-              <a:t>One practice this week — the easiest assignment of the year: the two cards go home and get a spot</a:t>
-            </a:r>
-          </a:p>
-          <a:p>
-            <a:pPr marL="274320" indent="-274320">
-              <a:spcAft>
-                <a:spcPts val="900"/>
-              </a:spcAft>
-            </a:pPr>
-            <a:r>
-              <a:rPr sz="2800" b="1" i="0">
-                <a:solidFill>
-                  <a:srgbClr val="97BC62"/>
-                </a:solidFill>
-                <a:latin typeface="Calibri"/>
-              </a:rPr>
-              <a:t>•  </a:t>
-            </a:r>
-            <a:r>
-              <a:rPr sz="2800" b="0" i="0">
-                <a:solidFill>
-                  <a:srgbClr val="222B22"/>
-                </a:solidFill>
-                <a:latin typeface="Calibri"/>
-              </a:rPr>
-              <a:t>Somewhere findable — a drawer everyone knows about, the kitchen cabinet door, inside the family Bible. Decide the spot together.</a:t>
-            </a:r>
-          </a:p>
-          <a:p>
-            <a:pPr marL="274320" indent="-274320">
-              <a:spcAft>
-                <a:spcPts val="900"/>
-              </a:spcAft>
-            </a:pPr>
-            <a:r>
-              <a:rPr sz="2800" b="1" i="0">
-                <a:solidFill>
-                  <a:srgbClr val="97BC62"/>
-                </a:solidFill>
-                <a:latin typeface="Calibri"/>
-              </a:rPr>
-              <a:t>•  </a:t>
-            </a:r>
-            <a:r>
-              <a:rPr sz="2800" b="0" i="0">
-                <a:solidFill>
-                  <a:srgbClr val="222B22"/>
-                </a:solidFill>
-                <a:latin typeface="Calibri"/>
-              </a:rPr>
-              <a:t>If all goes well, they will sit there gathering dust for years. That is the job — the cards wait.</a:t>
-            </a:r>
-          </a:p>
-          <a:p>
-            <a:pPr marL="274320" indent="-274320">
-              <a:spcAft>
-                <a:spcPts val="900"/>
-              </a:spcAft>
-            </a:pPr>
-            <a:r>
-              <a:rPr sz="2800" b="1" i="0">
-                <a:solidFill>
-                  <a:srgbClr val="97BC62"/>
-                </a:solidFill>
-                <a:latin typeface="Calibri"/>
-              </a:rPr>
-              <a:t>•  </a:t>
-            </a:r>
-            <a:r>
-              <a:rPr sz="2800" b="0" i="0">
-                <a:solidFill>
-                  <a:srgbClr val="222B22"/>
-                </a:solidFill>
-                <a:latin typeface="Calibri"/>
-              </a:rPr>
-              <a:t>Next Wednesday is The Long Walk — the whole room, the whole teaching, these same teachers. Come ready to receive them again.</a:t>
-            </a:r>
-          </a:p>
-        </p:txBody>
-      </p:sp>
-      <p:sp>
-        <p:nvSpPr>
-          <p:cNvPr id="90" name="SlideNum"/>
-          <p:cNvSpPr txBox="1"/>
-          <p:nvPr/>
-        </p:nvSpPr>
-        <p:spPr>
-          <a:xfrm>
-            <a:off x="11384280" y="6446520"/>
-            <a:ext cx="640080" cy="292608"/>
-          </a:xfrm>
-          <a:prstGeom prst="rect">
-            <a:avLst/>
-          </a:prstGeom>
-          <a:noFill/>
-        </p:spPr>
-        <p:txBody>
-          <a:bodyPr wrap="none" lIns="0" tIns="0" rIns="45720" bIns="0" anchor="ctr"/>
-          <a:lstStyle/>
-          <a:p>
-            <a:pPr algn="r"/>
-            <a:r>
-              <a:t>240</a:t>
-            </a:r>
-            <a:endParaRPr sz="1000" b="1">
-              <a:solidFill>
-                <a:srgbClr val="7A8A6E"/>
-              </a:solidFill>
-              <a:latin typeface="Calibri"/>
-            </a:endParaRPr>
-          </a:p>
-        </p:txBody>
-      </p:sp>
-    </p:spTree>
-  </p:cSld>
-  <p:clrMapOvr>
-    <a:masterClrMapping/>
-  </p:clrMapOvr>
-</p:sld>
-</file>
-
-<file path=ppt/slides/slide241.xml><?xml version="1.0" encoding="utf-8"?>
-<p:sld xmlns:a="http://schemas.openxmlformats.org/drawingml/2006/main" xmlns:r="http://schemas.openxmlformats.org/officeDocument/2006/relationships" xmlns:p="http://schemas.openxmlformats.org/presentationml/2006/main">
-  <p:cSld>
-    <p:spTree>
-      <p:nvGrpSpPr>
-        <p:cNvPr id="1" name=""/>
-        <p:cNvGrpSpPr/>
-        <p:nvPr/>
-      </p:nvGrpSpPr>
-      <p:grpSpPr>
-        <a:xfrm>
-          <a:off x="0" y="0"/>
-          <a:ext cx="0" cy="0"/>
-          <a:chOff x="0" y="0"/>
-          <a:chExt cx="0" cy="0"/>
-        </a:xfrm>
-      </p:grpSpPr>
-      <p:sp>
-        <p:nvSpPr>
-          <p:cNvPr id="2" name="Rectangle 1"/>
-          <p:cNvSpPr/>
-          <p:nvPr/>
-        </p:nvSpPr>
-        <p:spPr>
-          <a:xfrm>
-            <a:off x="0" y="0"/>
-            <a:ext cx="12191695" cy="6858000"/>
-          </a:xfrm>
-          <a:prstGeom prst="rect">
-            <a:avLst/>
-          </a:prstGeom>
-          <a:solidFill>
-            <a:srgbClr val="FFFFFF"/>
-          </a:solidFill>
-          <a:ln>
-            <a:noFill/>
-          </a:ln>
-        </p:spPr>
-        <p:txBody>
-          <a:bodyPr/>
-          <a:lstStyle/>
-          <a:p>
-            <a:endParaRPr/>
-          </a:p>
-        </p:txBody>
-      </p:sp>
-      <p:sp>
-        <p:nvSpPr>
-          <p:cNvPr id="3" name="TextBox 2"/>
-          <p:cNvSpPr txBox="1"/>
-          <p:nvPr/>
-        </p:nvSpPr>
-        <p:spPr>
-          <a:xfrm>
-            <a:off x="822960" y="502920"/>
-            <a:ext cx="10515600" cy="822960"/>
-          </a:xfrm>
-          <a:prstGeom prst="rect">
-            <a:avLst/>
-          </a:prstGeom>
-          <a:noFill/>
-        </p:spPr>
-        <p:txBody>
-          <a:bodyPr wrap="square">
-            <a:spAutoFit/>
-          </a:bodyPr>
-          <a:lstStyle/>
-          <a:p>
-            <a:pPr algn="l">
-              <a:spcAft>
-                <a:spcPts val="600"/>
-              </a:spcAft>
-            </a:pPr>
-            <a:r>
-              <a:rPr sz="2800" b="1" i="0">
-                <a:solidFill>
-                  <a:srgbClr val="2C5F2D"/>
-                </a:solidFill>
-                <a:latin typeface="Cambria"/>
-              </a:rPr>
-              <a:t>Your Take-Home Card — This Session’s Practice</a:t>
-            </a:r>
-          </a:p>
-        </p:txBody>
-      </p:sp>
-      <p:sp>
-        <p:nvSpPr>
-          <p:cNvPr id="90" name="SlideNum"/>
-          <p:cNvSpPr txBox="1"/>
-          <p:nvPr/>
-        </p:nvSpPr>
-        <p:spPr>
-          <a:xfrm>
-            <a:off x="11384280" y="6446520"/>
-            <a:ext cx="640080" cy="292608"/>
-          </a:xfrm>
-          <a:prstGeom prst="rect">
-            <a:avLst/>
-          </a:prstGeom>
-          <a:noFill/>
-        </p:spPr>
-        <p:txBody>
-          <a:bodyPr wrap="none" lIns="0" tIns="0" rIns="45720" bIns="0" anchor="ctr"/>
-          <a:lstStyle/>
-          <a:p>
-            <a:pPr algn="r"/>
-            <a:r>
-              <a:t>241</a:t>
-            </a:r>
-            <a:endParaRPr sz="1000" b="1">
-              <a:solidFill>
-                <a:srgbClr val="7A8A6E"/>
-              </a:solidFill>
-              <a:latin typeface="Calibri"/>
-            </a:endParaRPr>
-          </a:p>
-        </p:txBody>
-      </p:sp>
-      <p:pic>
-        <p:nvPicPr>
-          <p:cNvPr id="270" name="CardImage" descr="the Week 19 check-off card, as handed out"/>
-          <p:cNvPicPr>
-            <a:picLocks noChangeAspect="1"/>
-          </p:cNvPicPr>
-          <p:nvPr/>
-        </p:nvPicPr>
-        <p:blipFill>
-          <a:blip r:embed="rId3"/>
-          <a:stretch>
-            <a:fillRect/>
-          </a:stretch>
-        </p:blipFill>
-        <p:spPr>
-          <a:xfrm>
-            <a:off x="1158087" y="1554480"/>
-            <a:ext cx="9875520" cy="4119131"/>
-          </a:xfrm>
-          <a:prstGeom prst="rect">
-            <a:avLst/>
-          </a:prstGeom>
-          <a:ln w="76200">
-            <a:solidFill>
-              <a:srgbClr val="FFFFFF"/>
-            </a:solidFill>
-          </a:ln>
-          <a:effectLst>
-            <a:outerShdw blurRad="63500" dist="25400" dir="5400000" rotWithShape="0">
-              <a:srgbClr val="000000">
-                <a:alpha val="35000"/>
-              </a:srgbClr>
-            </a:outerShdw>
-          </a:effectLst>
-        </p:spPr>
-      </p:pic>
-      <p:sp>
-        <p:nvSpPr>
-          <p:cNvPr id="271" name="Caption"/>
-          <p:cNvSpPr txBox="1"/>
-          <p:nvPr/>
-        </p:nvSpPr>
-        <p:spPr>
-          <a:xfrm>
-            <a:off x="822960" y="5856491"/>
-            <a:ext cx="10515600" cy="457200"/>
-          </a:xfrm>
-          <a:prstGeom prst="rect">
-            <a:avLst/>
-          </a:prstGeom>
-          <a:noFill/>
-        </p:spPr>
-        <p:txBody>
-          <a:bodyPr wrap="square"/>
-          <a:lstStyle/>
-          <a:p>
-            <a:pPr algn="ctr"/>
-            <a:r>
-              <a:rPr sz="1800" b="0" i="1">
-                <a:solidFill>
-                  <a:srgbClr val="222B22"/>
-                </a:solidFill>
-                <a:latin typeface="Calibri"/>
-              </a:rPr>
-              <a:t>Handed out now — fridge, mirror, journal pocket.</a:t>
-            </a:r>
-          </a:p>
-        </p:txBody>
-      </p:sp>
-    </p:spTree>
-  </p:cSld>
-  <p:clrMapOvr>
-    <a:masterClrMapping/>
-  </p:clrMapOvr>
-</p:sld>
-</file>
-
-<file path=ppt/slides/slide242.xml><?xml version="1.0" encoding="utf-8"?>
-<p:sld xmlns:a="http://schemas.openxmlformats.org/drawingml/2006/main" xmlns:r="http://schemas.openxmlformats.org/officeDocument/2006/relationships" xmlns:p="http://schemas.openxmlformats.org/presentationml/2006/main">
-  <p:cSld>
-    <p:spTree>
-      <p:nvGrpSpPr>
-        <p:cNvPr id="1" name=""/>
-        <p:cNvGrpSpPr/>
-        <p:nvPr/>
-      </p:nvGrpSpPr>
-      <p:grpSpPr>
-        <a:xfrm>
-          <a:off x="0" y="0"/>
-          <a:ext cx="0" cy="0"/>
-          <a:chOff x="0" y="0"/>
-          <a:chExt cx="0" cy="0"/>
-        </a:xfrm>
-      </p:grpSpPr>
-      <p:sp>
-        <p:nvSpPr>
-          <p:cNvPr id="2" name="Rectangle 1"/>
-          <p:cNvSpPr/>
-          <p:nvPr/>
-        </p:nvSpPr>
-        <p:spPr>
-          <a:xfrm>
-            <a:off x="0" y="0"/>
-            <a:ext cx="12191695" cy="6858000"/>
-          </a:xfrm>
-          <a:prstGeom prst="rect">
-            <a:avLst/>
-          </a:prstGeom>
-          <a:solidFill>
-            <a:srgbClr val="FFFFFF"/>
-          </a:solidFill>
-          <a:ln>
-            <a:noFill/>
-          </a:ln>
-        </p:spPr>
-        <p:txBody>
-          <a:bodyPr/>
-          <a:lstStyle/>
-          <a:p>
-            <a:endParaRPr/>
-          </a:p>
-        </p:txBody>
-      </p:sp>
-      <p:sp>
-        <p:nvSpPr>
-          <p:cNvPr id="3" name="TextBox 2"/>
-          <p:cNvSpPr txBox="1"/>
-          <p:nvPr/>
-        </p:nvSpPr>
-        <p:spPr>
-          <a:xfrm>
-            <a:off x="822960" y="502920"/>
-            <a:ext cx="10515600" cy="822960"/>
-          </a:xfrm>
-          <a:prstGeom prst="rect">
-            <a:avLst/>
-          </a:prstGeom>
-          <a:noFill/>
-        </p:spPr>
-        <p:txBody>
-          <a:bodyPr wrap="square">
-            <a:spAutoFit/>
-          </a:bodyPr>
-          <a:lstStyle/>
-          <a:p>
-            <a:pPr algn="l">
-              <a:spcAft>
-                <a:spcPts val="600"/>
-              </a:spcAft>
-            </a:pPr>
-            <a:r>
-              <a:rPr sz="2800" b="1" i="0">
-                <a:solidFill>
-                  <a:srgbClr val="2C5F2D"/>
-                </a:solidFill>
-                <a:latin typeface="Cambria"/>
-              </a:rPr>
-              <a:t>Closing the Container + Aaronic Blessing</a:t>
-            </a:r>
-          </a:p>
-        </p:txBody>
-      </p:sp>
-      <p:sp>
-        <p:nvSpPr>
-          <p:cNvPr id="4" name="TextBox 4"/>
-          <p:cNvSpPr txBox="1"/>
-          <p:nvPr/>
-        </p:nvSpPr>
-        <p:spPr>
-          <a:xfrm>
-            <a:off x="822960" y="1600200"/>
-            <a:ext cx="5669280" cy="4572000"/>
-          </a:xfrm>
-          <a:prstGeom prst="rect">
-            <a:avLst/>
-          </a:prstGeom>
-          <a:noFill/>
-        </p:spPr>
-        <p:txBody>
-          <a:bodyPr wrap="square" lIns="91440" tIns="91440" rIns="91440" bIns="91440"/>
-          <a:lstStyle/>
-          <a:p>
-            <a:pPr marL="274320" indent="-274320">
-              <a:spcAft>
-                <a:spcPts val="900"/>
-              </a:spcAft>
-            </a:pPr>
-            <a:r>
-              <a:rPr sz="2200" b="1" i="0">
-                <a:solidFill>
-                  <a:srgbClr val="97BC62"/>
-                </a:solidFill>
-                <a:latin typeface="Calibri"/>
-              </a:rPr>
-              <a:t>•  </a:t>
-            </a:r>
-            <a:r>
-              <a:rPr sz="2200" b="0" i="0">
-                <a:solidFill>
-                  <a:srgbClr val="222B22"/>
-                </a:solidFill>
-                <a:latin typeface="Calibri"/>
-              </a:rPr>
-              <a:t>We close the way we opened — the container, six steps:</a:t>
-            </a:r>
-          </a:p>
-          <a:p>
-            <a:pPr marL="685800" indent="-274320">
-              <a:spcAft>
-                <a:spcPts val="700"/>
-              </a:spcAft>
-            </a:pPr>
-            <a:r>
-              <a:rPr sz="2000" b="1" i="0">
-                <a:solidFill>
-                  <a:srgbClr val="97BC62"/>
-                </a:solidFill>
-                <a:latin typeface="Calibri"/>
-              </a:rPr>
-              <a:t>1   </a:t>
-            </a:r>
-            <a:r>
-              <a:rPr sz="2000" b="0" i="0">
-                <a:solidFill>
-                  <a:srgbClr val="222B22"/>
-                </a:solidFill>
-                <a:latin typeface="Calibri"/>
-              </a:rPr>
-              <a:t>Stand again — same circle, same posture as the open</a:t>
-            </a:r>
-          </a:p>
-          <a:p>
-            <a:pPr marL="685800" indent="-274320">
-              <a:spcAft>
-                <a:spcPts val="700"/>
-              </a:spcAft>
-            </a:pPr>
-            <a:r>
-              <a:rPr sz="2000" b="1" i="0">
-                <a:solidFill>
-                  <a:srgbClr val="97BC62"/>
-                </a:solidFill>
-                <a:latin typeface="Calibri"/>
-              </a:rPr>
-              <a:t>2   </a:t>
-            </a:r>
-            <a:r>
-              <a:rPr sz="2000" b="0" i="0">
-                <a:solidFill>
-                  <a:srgbClr val="222B22"/>
-                </a:solidFill>
-                <a:latin typeface="Calibri"/>
-              </a:rPr>
-              <a:t>One-word landing — compare it to your opening word</a:t>
-            </a:r>
-          </a:p>
-          <a:p>
-            <a:pPr marL="685800" indent="-274320">
-              <a:spcAft>
-                <a:spcPts val="700"/>
-              </a:spcAft>
-            </a:pPr>
-            <a:r>
-              <a:rPr sz="2000" b="1" i="0">
-                <a:solidFill>
-                  <a:srgbClr val="97BC62"/>
-                </a:solidFill>
-                <a:latin typeface="Calibri"/>
-              </a:rPr>
-              <a:t>3   </a:t>
-            </a:r>
-            <a:r>
-              <a:rPr sz="2000" b="0" i="0">
-                <a:solidFill>
-                  <a:srgbClr val="222B22"/>
-                </a:solidFill>
-                <a:latin typeface="Calibri"/>
-              </a:rPr>
-              <a:t>The one thing you are taking from tonight</a:t>
-            </a:r>
-          </a:p>
-          <a:p>
-            <a:pPr marL="685800" indent="-274320">
-              <a:spcAft>
-                <a:spcPts val="700"/>
-              </a:spcAft>
-            </a:pPr>
-            <a:r>
-              <a:rPr sz="2000" b="1" i="0">
-                <a:solidFill>
-                  <a:srgbClr val="97BC62"/>
-                </a:solidFill>
-                <a:latin typeface="Calibri"/>
-              </a:rPr>
-              <a:t>4   </a:t>
-            </a:r>
-            <a:r>
-              <a:rPr sz="2000" b="0" i="0">
-                <a:solidFill>
-                  <a:srgbClr val="222B22"/>
-                </a:solidFill>
-                <a:latin typeface="Calibri"/>
-              </a:rPr>
-              <a:t>The one practice — committed aloud, or modified to one you will actually keep</a:t>
-            </a:r>
-          </a:p>
-          <a:p>
-            <a:pPr marL="685800" indent="-274320">
-              <a:spcAft>
-                <a:spcPts val="700"/>
-              </a:spcAft>
-            </a:pPr>
-            <a:r>
-              <a:rPr sz="2000" b="1" i="0">
-                <a:solidFill>
-                  <a:srgbClr val="97BC62"/>
-                </a:solidFill>
-                <a:latin typeface="Calibri"/>
-              </a:rPr>
-              <a:t>5   </a:t>
-            </a:r>
-            <a:r>
-              <a:rPr sz="2000" b="0" i="0">
-                <a:solidFill>
-                  <a:srgbClr val="222B22"/>
-                </a:solidFill>
-                <a:latin typeface="Calibri"/>
-              </a:rPr>
-              <a:t>Blessings — specific, witnessed, short</a:t>
-            </a:r>
-          </a:p>
-          <a:p>
-            <a:pPr marL="685800" indent="-274320">
-              <a:spcAft>
-                <a:spcPts val="700"/>
-              </a:spcAft>
-            </a:pPr>
-            <a:r>
-              <a:rPr sz="2000" b="1" i="0">
-                <a:solidFill>
-                  <a:srgbClr val="97BC62"/>
-                </a:solidFill>
-                <a:latin typeface="Calibri"/>
-              </a:rPr>
-              <a:t>6   </a:t>
-            </a:r>
-            <a:r>
-              <a:rPr sz="2000" b="0" i="0">
-                <a:solidFill>
-                  <a:srgbClr val="222B22"/>
-                </a:solidFill>
-                <a:latin typeface="Calibri"/>
-              </a:rPr>
-              <a:t>Closing prayer — and the Aaronic blessing, spoken over each other, face to face</a:t>
-            </a:r>
-          </a:p>
-        </p:txBody>
-      </p:sp>
-      <p:sp>
-        <p:nvSpPr>
-          <p:cNvPr id="6" name="TextBox 6"/>
-          <p:cNvSpPr txBox="1"/>
-          <p:nvPr/>
-        </p:nvSpPr>
-        <p:spPr>
-          <a:xfrm>
-            <a:off x="6766560" y="1737360"/>
-            <a:ext cx="4663440" cy="2926080"/>
-          </a:xfrm>
-          <a:prstGeom prst="rect">
-            <a:avLst/>
-          </a:prstGeom>
-          <a:solidFill>
-            <a:srgbClr val="F1F6EC"/>
-          </a:solidFill>
-        </p:spPr>
-        <p:txBody>
-          <a:bodyPr wrap="square" lIns="91440" tIns="91440" rIns="91440" bIns="91440" anchor="ctr"/>
-          <a:lstStyle/>
-          <a:p>
-            <a:pPr>
-              <a:spcAft>
-                <a:spcPts val="900"/>
-              </a:spcAft>
-            </a:pPr>
-            <a:r>
-              <a:rPr sz="1200" b="1" i="0">
-                <a:solidFill>
-                  <a:srgbClr val="97BC62"/>
-                </a:solidFill>
-                <a:latin typeface="Calibri"/>
-              </a:rPr>
-              <a:t>THE AARONIC BLESSING — NUMBERS 6:24–26</a:t>
-            </a:r>
-          </a:p>
-          <a:p>
-            <a:pPr>
-              <a:spcAft>
-                <a:spcPts val="600"/>
-              </a:spcAft>
-            </a:pPr>
-            <a:r>
-              <a:rPr sz="2400" b="0" i="1">
-                <a:solidFill>
-                  <a:srgbClr val="222B22"/>
-                </a:solidFill>
-                <a:latin typeface="Cambria"/>
-              </a:rPr>
-              <a:t>“The Lord bless you and keep you;</a:t>
-            </a:r>
-          </a:p>
-          <a:p>
-            <a:pPr>
-              <a:spcAft>
-                <a:spcPts val="600"/>
-              </a:spcAft>
-            </a:pPr>
-            <a:r>
-              <a:rPr sz="2400" b="0" i="1">
-                <a:solidFill>
-                  <a:srgbClr val="222B22"/>
-                </a:solidFill>
-                <a:latin typeface="Cambria"/>
-              </a:rPr>
-              <a:t>the Lord make his face to shine upon you, and be gracious to you;</a:t>
-            </a:r>
-          </a:p>
-          <a:p>
-            <a:pPr>
-              <a:spcAft>
-                <a:spcPts val="600"/>
-              </a:spcAft>
-            </a:pPr>
-            <a:r>
-              <a:rPr sz="2400" b="0" i="1">
-                <a:solidFill>
-                  <a:srgbClr val="222B22"/>
-                </a:solidFill>
-                <a:latin typeface="Cambria"/>
-              </a:rPr>
-              <a:t>the Lord lift up his countenance upon you, and give you peace.”</a:t>
-            </a:r>
-          </a:p>
-        </p:txBody>
-      </p:sp>
-      <p:sp>
-        <p:nvSpPr>
-          <p:cNvPr id="90" name="SlideNum"/>
-          <p:cNvSpPr txBox="1"/>
-          <p:nvPr/>
-        </p:nvSpPr>
-        <p:spPr>
-          <a:xfrm>
-            <a:off x="11384280" y="6446520"/>
-            <a:ext cx="640080" cy="292608"/>
-          </a:xfrm>
-          <a:prstGeom prst="rect">
-            <a:avLst/>
-          </a:prstGeom>
-          <a:noFill/>
-        </p:spPr>
-        <p:txBody>
-          <a:bodyPr wrap="none" lIns="0" tIns="0" rIns="45720" bIns="0" anchor="ctr"/>
-          <a:lstStyle/>
-          <a:p>
-            <a:pPr algn="r"/>
-            <a:r>
-              <a:t>242</a:t>
-            </a:r>
-            <a:endParaRPr sz="1000" b="1">
-              <a:solidFill>
-                <a:srgbClr val="7A8A6E"/>
-              </a:solidFill>
-              <a:latin typeface="Calibri"/>
-            </a:endParaRPr>
-          </a:p>
-        </p:txBody>
-      </p:sp>
-    </p:spTree>
-  </p:cSld>
-  <p:clrMapOvr>
-    <a:masterClrMapping/>
-  </p:clrMapOvr>
-</p:sld>
-</file>
-
-<file path=ppt/slides/slide243.xml><?xml version="1.0" encoding="utf-8"?>
-<p:sld xmlns:a="http://schemas.openxmlformats.org/drawingml/2006/main" xmlns:r="http://schemas.openxmlformats.org/officeDocument/2006/relationships" xmlns:p="http://schemas.openxmlformats.org/presentationml/2006/main">
-  <p:cSld>
-    <p:spTree>
-      <p:nvGrpSpPr>
-        <p:cNvPr id="1" name=""/>
-        <p:cNvGrpSpPr/>
-        <p:nvPr/>
-      </p:nvGrpSpPr>
-      <p:grpSpPr>
-        <a:xfrm>
-          <a:off x="0" y="0"/>
-          <a:ext cx="0" cy="0"/>
-          <a:chOff x="0" y="0"/>
-          <a:chExt cx="0" cy="0"/>
-        </a:xfrm>
-      </p:grpSpPr>
-      <p:sp>
-        <p:nvSpPr>
-          <p:cNvPr id="2" name="Rectangle 1"/>
-          <p:cNvSpPr/>
-          <p:nvPr/>
-        </p:nvSpPr>
-        <p:spPr>
-          <a:xfrm>
-            <a:off x="0" y="0"/>
-            <a:ext cx="12191695" cy="6858000"/>
-          </a:xfrm>
-          <a:prstGeom prst="rect">
-            <a:avLst/>
-          </a:prstGeom>
-          <a:solidFill>
-            <a:srgbClr val="FFFFFF"/>
-          </a:solidFill>
-          <a:ln>
-            <a:noFill/>
-          </a:ln>
-        </p:spPr>
-        <p:txBody>
-          <a:bodyPr/>
-          <a:lstStyle/>
-          <a:p>
-            <a:endParaRPr/>
-          </a:p>
-        </p:txBody>
-      </p:sp>
-      <p:sp>
-        <p:nvSpPr>
-          <p:cNvPr id="3" name="TextBox 2"/>
-          <p:cNvSpPr txBox="1"/>
-          <p:nvPr/>
-        </p:nvSpPr>
-        <p:spPr>
-          <a:xfrm>
-            <a:off x="822960" y="502920"/>
-            <a:ext cx="10515600" cy="822960"/>
-          </a:xfrm>
-          <a:prstGeom prst="rect">
-            <a:avLst/>
-          </a:prstGeom>
-          <a:noFill/>
-        </p:spPr>
-        <p:txBody>
-          <a:bodyPr wrap="square">
-            <a:spAutoFit/>
-          </a:bodyPr>
-          <a:lstStyle/>
-          <a:p>
-            <a:pPr algn="l">
-              <a:spcAft>
-                <a:spcPts val="600"/>
-              </a:spcAft>
-            </a:pPr>
-            <a:r>
-              <a:rPr sz="2800" b="1" i="0">
-                <a:solidFill>
-                  <a:srgbClr val="2C5F2D"/>
-                </a:solidFill>
-                <a:latin typeface="Cambria"/>
-              </a:rPr>
-              <a:t>The Leader Feedback Round</a:t>
-            </a:r>
-          </a:p>
-        </p:txBody>
-      </p:sp>
-      <p:sp>
-        <p:nvSpPr>
-          <p:cNvPr id="4" name="TextBox 4"/>
-          <p:cNvSpPr txBox="1"/>
-          <p:nvPr/>
-        </p:nvSpPr>
-        <p:spPr>
-          <a:xfrm>
-            <a:off x="822960" y="1554480"/>
-            <a:ext cx="6675120" cy="4892040"/>
-          </a:xfrm>
-          <a:prstGeom prst="rect">
-            <a:avLst/>
-          </a:prstGeom>
-          <a:noFill/>
-        </p:spPr>
-        <p:txBody>
-          <a:bodyPr wrap="square" lIns="91440" tIns="91440" rIns="91440" bIns="91440"/>
-          <a:lstStyle/>
-          <a:p>
-            <a:pPr marL="274320" indent="-274320">
-              <a:spcAft>
-                <a:spcPts val="900"/>
-              </a:spcAft>
-            </a:pPr>
-            <a:r>
-              <a:rPr sz="2800" b="1" i="0">
-                <a:solidFill>
-                  <a:srgbClr val="97BC62"/>
-                </a:solidFill>
-                <a:latin typeface="Calibri"/>
-              </a:rPr>
-              <a:t>•  </a:t>
-            </a:r>
-            <a:r>
-              <a:rPr sz="2800" b="0" i="0">
-                <a:solidFill>
-                  <a:srgbClr val="222B22"/>
-                </a:solidFill>
-                <a:latin typeface="Calibri"/>
-              </a:rPr>
-              <a:t>Two rounds, same as every session — the container holder first, then the content presenter: three things each</a:t>
-            </a:r>
-          </a:p>
-          <a:p>
-            <a:pPr marL="685800" indent="-274320">
-              <a:spcAft>
-                <a:spcPts val="700"/>
-              </a:spcAft>
-            </a:pPr>
-            <a:r>
-              <a:rPr sz="2000" b="1" i="0">
-                <a:solidFill>
-                  <a:srgbClr val="97BC62"/>
-                </a:solidFill>
-                <a:latin typeface="Calibri"/>
-              </a:rPr>
-              <a:t>–  </a:t>
-            </a:r>
-            <a:r>
-              <a:rPr sz="2000" b="0" i="1">
-                <a:solidFill>
-                  <a:srgbClr val="222B22"/>
-                </a:solidFill>
-                <a:latin typeface="Calibri"/>
-              </a:rPr>
-              <a:t>“What I think went well tonight: ______”</a:t>
-            </a:r>
-          </a:p>
-          <a:p>
-            <a:pPr marL="685800" indent="-274320">
-              <a:spcAft>
-                <a:spcPts val="700"/>
-              </a:spcAft>
-            </a:pPr>
-            <a:r>
-              <a:rPr sz="2000" b="1" i="0">
-                <a:solidFill>
-                  <a:srgbClr val="97BC62"/>
-                </a:solidFill>
-                <a:latin typeface="Calibri"/>
-              </a:rPr>
-              <a:t>–  </a:t>
-            </a:r>
-            <a:r>
-              <a:rPr sz="2000" b="0" i="1">
-                <a:solidFill>
-                  <a:srgbClr val="222B22"/>
-                </a:solidFill>
-                <a:latin typeface="Calibri"/>
-              </a:rPr>
-              <a:t>“What I’d do differently next time: ______”</a:t>
-            </a:r>
-          </a:p>
-          <a:p>
-            <a:pPr marL="685800" indent="-274320">
-              <a:spcAft>
-                <a:spcPts val="700"/>
-              </a:spcAft>
-            </a:pPr>
-            <a:r>
-              <a:rPr sz="2000" b="1" i="0">
-                <a:solidFill>
-                  <a:srgbClr val="97BC62"/>
-                </a:solidFill>
-                <a:latin typeface="Calibri"/>
-              </a:rPr>
-              <a:t>–  </a:t>
-            </a:r>
-            <a:r>
-              <a:rPr sz="2000" b="0" i="1">
-                <a:solidFill>
-                  <a:srgbClr val="222B22"/>
-                </a:solidFill>
-                <a:latin typeface="Calibri"/>
-              </a:rPr>
-              <a:t>“If I were to teach tonight’s process to someone, I would tell them: ______”</a:t>
-            </a:r>
-          </a:p>
-          <a:p>
-            <a:pPr marL="274320" indent="-274320">
-              <a:spcAft>
-                <a:spcPts val="900"/>
-              </a:spcAft>
-            </a:pPr>
-            <a:r>
-              <a:rPr sz="2800" b="1" i="0">
-                <a:solidFill>
-                  <a:srgbClr val="97BC62"/>
-                </a:solidFill>
-                <a:latin typeface="Calibri"/>
-              </a:rPr>
-              <a:t>•  </a:t>
-            </a:r>
-            <a:r>
-              <a:rPr sz="2800" b="0" i="0">
-                <a:solidFill>
-                  <a:srgbClr val="222B22"/>
-                </a:solidFill>
-                <a:latin typeface="Calibri"/>
-              </a:rPr>
-              <a:t>Then the room — the same two questions about tonight</a:t>
-            </a:r>
-          </a:p>
-          <a:p>
-            <a:pPr marL="274320" indent="-274320">
-              <a:spcAft>
-                <a:spcPts val="900"/>
-              </a:spcAft>
-            </a:pPr>
-            <a:r>
-              <a:rPr sz="2800" b="1" i="0">
-                <a:solidFill>
-                  <a:srgbClr val="97BC62"/>
-                </a:solidFill>
-                <a:latin typeface="Calibri"/>
-              </a:rPr>
-              <a:t>•  </a:t>
-            </a:r>
-            <a:r>
-              <a:rPr sz="2800" b="0" i="0">
-                <a:solidFill>
-                  <a:srgbClr val="222B22"/>
-                </a:solidFill>
-                <a:latin typeface="Calibri"/>
-              </a:rPr>
-              <a:t>The leaders receive without defending — “thank you” is the whole response</a:t>
-            </a:r>
-          </a:p>
-        </p:txBody>
-      </p:sp>
-      <p:sp>
-        <p:nvSpPr>
-          <p:cNvPr id="90" name="SlideNum"/>
-          <p:cNvSpPr txBox="1"/>
-          <p:nvPr/>
-        </p:nvSpPr>
-        <p:spPr>
-          <a:xfrm>
-            <a:off x="11384280" y="6446520"/>
-            <a:ext cx="640080" cy="292608"/>
-          </a:xfrm>
-          <a:prstGeom prst="rect">
-            <a:avLst/>
-          </a:prstGeom>
-          <a:noFill/>
-        </p:spPr>
-        <p:txBody>
-          <a:bodyPr wrap="none" lIns="0" tIns="0" rIns="45720" bIns="0" anchor="ctr"/>
-          <a:lstStyle/>
-          <a:p>
-            <a:pPr algn="r"/>
-            <a:r>
-              <a:t>243</a:t>
-            </a:r>
-            <a:endParaRPr sz="1000" b="1">
-              <a:solidFill>
-                <a:srgbClr val="7A8A6E"/>
-              </a:solidFill>
-              <a:latin typeface="Calibri"/>
-            </a:endParaRPr>
-          </a:p>
-        </p:txBody>
-      </p:sp>
-      <p:pic>
-        <p:nvPicPr>
-          <p:cNvPr id="33" name="Picture 33" descr="compass on the trail - the weekly bearing check"/>
-          <p:cNvPicPr>
-            <a:picLocks noChangeAspect="1"/>
-          </p:cNvPicPr>
-          <p:nvPr/>
-        </p:nvPicPr>
-        <p:blipFill>
-          <a:blip r:embed="rId3"/>
-          <a:stretch>
-            <a:fillRect/>
-          </a:stretch>
-        </p:blipFill>
-        <p:spPr>
-          <a:xfrm>
-            <a:off x="8106160" y="1463040"/>
-            <a:ext cx="3259831" cy="4892040"/>
-          </a:xfrm>
-          <a:prstGeom prst="rect">
-            <a:avLst/>
-          </a:prstGeom>
-          <a:ln w="76200">
-            <a:solidFill>
-              <a:srgbClr val="FFFFFF"/>
-            </a:solidFill>
-          </a:ln>
-          <a:effectLst>
-            <a:outerShdw blurRad="63500" dist="25400" dir="5400000" rotWithShape="0">
-              <a:srgbClr val="000000">
-                <a:alpha val="35000"/>
-              </a:srgbClr>
-            </a:outerShdw>
-          </a:effectLst>
-        </p:spPr>
-      </p:pic>
     </p:spTree>
   </p:cSld>
   <p:clrMapOvr>

--- a/_implementation-notes/evening-series/FotH Evening Session 19 Slides DRAFT v1.pptx
+++ b/_implementation-notes/evening-series/FotH Evening Session 19 Slides DRAFT v1.pptx
@@ -5127,7 +5127,7 @@
                 </a:solidFill>
                 <a:latin typeface="Cambria"/>
               </a:rPr>
-              <a:t>Second pair Feedback</a:t>
+              <a:t>Second Teaching Rep — Both Cards, Tightened</a:t>
             </a:r>
           </a:p>
         </p:txBody>
@@ -5173,7 +5173,7 @@
                 </a:solidFill>
                 <a:latin typeface="Calibri"/>
               </a:rPr>
-              <a:t>Same shape, briefer — the adult’s keep and adjust, then one pair voice</a:t>
+              <a:t>“Teachers, travel.” Each teacher moves one pair over, adjust in hand — the new pair is a clean room</a:t>
             </a:r>
           </a:p>
           <a:p>
@@ -5198,7 +5198,7 @@
                 </a:solidFill>
                 <a:latin typeface="Calibri"/>
               </a:rPr>
-              <a:t>The keep, wherever honest, names the adjust that got tried</a:t>
+              <a:t>The same arc, compressed — Signs ~11 min, Path Home ~8, close ~1</a:t>
             </a:r>
           </a:p>
           <a:p>
@@ -5223,7 +5223,57 @@
                 </a:solidFill>
                 <a:latin typeface="Calibri"/>
               </a:rPr>
-              <a:t>Both recorded per teacher — these notes are next week’s prep meeting</a:t>
+              <a:t>The compression is the second rep’s own skill — same spine, fewer words, the load-bearing minutes untouched</a:t>
+            </a:r>
+          </a:p>
+          <a:p>
+            <a:pPr marL="685800" indent="-274320">
+              <a:spcAft>
+                <a:spcPts val="700"/>
+              </a:spcAft>
+            </a:pPr>
+            <a:r>
+              <a:rPr sz="2000" b="1" i="0">
+                <a:solidFill>
+                  <a:srgbClr val="97BC62"/>
+                </a:solidFill>
+                <a:latin typeface="Calibri"/>
+              </a:rPr>
+              <a:t>–  </a:t>
+            </a:r>
+            <a:r>
+              <a:rPr sz="2000" b="0" i="1">
+                <a:solidFill>
+                  <a:srgbClr val="222B22"/>
+                </a:solidFill>
+                <a:latin typeface="Calibri"/>
+              </a:rPr>
+              <a:t>The desire question — resist versus receive — the father runs</a:t>
+            </a:r>
+          </a:p>
+          <a:p>
+            <a:pPr marL="274320" indent="-274320">
+              <a:spcAft>
+                <a:spcPts val="900"/>
+              </a:spcAft>
+            </a:pPr>
+            <a:r>
+              <a:rPr sz="2800" b="1" i="0">
+                <a:solidFill>
+                  <a:srgbClr val="97BC62"/>
+                </a:solidFill>
+                <a:latin typeface="Calibri"/>
+              </a:rPr>
+              <a:t>•  </a:t>
+            </a:r>
+            <a:r>
+              <a:rPr sz="2800" b="0" i="0">
+                <a:solidFill>
+                  <a:srgbClr val="222B22"/>
+                </a:solidFill>
+                <a:latin typeface="Calibri"/>
+              </a:rPr>
+              <a:t>The adjust from Round 1 gets tried here, while it is warm</a:t>
             </a:r>
           </a:p>
         </p:txBody>
@@ -5250,7 +5300,7 @@
           <a:p>
             <a:pPr algn="r"/>
             <a:r>
-              <a:t>239</a:t>
+              <a:t>238</a:t>
             </a:r>
             <a:endParaRPr sz="1000" b="1">
               <a:solidFill>
@@ -5349,7 +5399,7 @@
                 </a:solidFill>
                 <a:latin typeface="Cambria"/>
               </a:rPr>
-              <a:t>Merge and Homework Practice</a:t>
+              <a:t>Second pair Feedback</a:t>
             </a:r>
           </a:p>
         </p:txBody>
@@ -5395,7 +5445,7 @@
                 </a:solidFill>
                 <a:latin typeface="Calibri"/>
               </a:rPr>
-              <a:t>One practice this week — the easiest assignment of the year: the two cards go home and get a spot</a:t>
+              <a:t>Same shape, briefer — the adult’s keep and adjust, then one pair voice</a:t>
             </a:r>
           </a:p>
           <a:p>
@@ -5420,7 +5470,7 @@
                 </a:solidFill>
                 <a:latin typeface="Calibri"/>
               </a:rPr>
-              <a:t>Somewhere findable — a drawer everyone knows about, the kitchen cabinet door, inside the family Bible. Decide the spot together.</a:t>
+              <a:t>The keep, wherever honest, names the adjust that got tried</a:t>
             </a:r>
           </a:p>
           <a:p>
@@ -5445,32 +5495,7 @@
                 </a:solidFill>
                 <a:latin typeface="Calibri"/>
               </a:rPr>
-              <a:t>If all goes well, they will sit there gathering dust for years. That is the job — the cards wait.</a:t>
-            </a:r>
-          </a:p>
-          <a:p>
-            <a:pPr marL="274320" indent="-274320">
-              <a:spcAft>
-                <a:spcPts val="900"/>
-              </a:spcAft>
-            </a:pPr>
-            <a:r>
-              <a:rPr sz="2800" b="1" i="0">
-                <a:solidFill>
-                  <a:srgbClr val="97BC62"/>
-                </a:solidFill>
-                <a:latin typeface="Calibri"/>
-              </a:rPr>
-              <a:t>•  </a:t>
-            </a:r>
-            <a:r>
-              <a:rPr sz="2800" b="0" i="0">
-                <a:solidFill>
-                  <a:srgbClr val="222B22"/>
-                </a:solidFill>
-                <a:latin typeface="Calibri"/>
-              </a:rPr>
-              <a:t>Next Wednesday is The Long Walk — the whole room, the whole teaching, these same teachers. Come ready to receive them again.</a:t>
+              <a:t>Both recorded per teacher — these notes are next week’s prep meeting</a:t>
             </a:r>
           </a:p>
         </p:txBody>
@@ -5497,7 +5522,7 @@
           <a:p>
             <a:pPr algn="r"/>
             <a:r>
-              <a:t>240</a:t>
+              <a:t>239</a:t>
             </a:r>
             <a:endParaRPr sz="1000" b="1">
               <a:solidFill>
@@ -5516,7 +5541,7 @@
 </p:sld>
 </file>
 
-<file path=ppt/slides/slide13.xml><?xml version="1.0" encoding="utf-8"?>
+<file path=ppt/slides/slide12.xml><?xml version="1.0" encoding="utf-8"?>
 <p:sld xmlns:a="http://schemas.openxmlformats.org/drawingml/2006/main" xmlns:r="http://schemas.openxmlformats.org/officeDocument/2006/relationships" xmlns:p="http://schemas.openxmlformats.org/presentationml/2006/main">
   <p:cSld>
     <p:spTree>
@@ -5596,6 +5621,637 @@
                 </a:solidFill>
                 <a:latin typeface="Cambria"/>
               </a:rPr>
+              <a:t>Merge and Homework Practice</a:t>
+            </a:r>
+          </a:p>
+        </p:txBody>
+      </p:sp>
+      <p:sp>
+        <p:nvSpPr>
+          <p:cNvPr id="4" name="TextBox 4"/>
+          <p:cNvSpPr txBox="1"/>
+          <p:nvPr/>
+        </p:nvSpPr>
+        <p:spPr>
+          <a:xfrm>
+            <a:off x="822960" y="1554480"/>
+            <a:ext cx="10515600" cy="4892040"/>
+          </a:xfrm>
+          <a:prstGeom prst="rect">
+            <a:avLst/>
+          </a:prstGeom>
+          <a:noFill/>
+        </p:spPr>
+        <p:txBody>
+          <a:bodyPr wrap="square" lIns="91440" tIns="91440" rIns="91440" bIns="91440"/>
+          <a:lstStyle/>
+          <a:p>
+            <a:pPr marL="274320" indent="-274320">
+              <a:spcAft>
+                <a:spcPts val="900"/>
+              </a:spcAft>
+            </a:pPr>
+            <a:r>
+              <a:rPr sz="2800" b="1" i="0">
+                <a:solidFill>
+                  <a:srgbClr val="97BC62"/>
+                </a:solidFill>
+                <a:latin typeface="Calibri"/>
+              </a:rPr>
+              <a:t>•  </a:t>
+            </a:r>
+            <a:r>
+              <a:rPr sz="2800" b="0" i="0">
+                <a:solidFill>
+                  <a:srgbClr val="222B22"/>
+                </a:solidFill>
+                <a:latin typeface="Calibri"/>
+              </a:rPr>
+              <a:t>One practice this week — the easiest assignment of the year: the two cards go home and get a spot</a:t>
+            </a:r>
+          </a:p>
+          <a:p>
+            <a:pPr marL="274320" indent="-274320">
+              <a:spcAft>
+                <a:spcPts val="900"/>
+              </a:spcAft>
+            </a:pPr>
+            <a:r>
+              <a:rPr sz="2800" b="1" i="0">
+                <a:solidFill>
+                  <a:srgbClr val="97BC62"/>
+                </a:solidFill>
+                <a:latin typeface="Calibri"/>
+              </a:rPr>
+              <a:t>•  </a:t>
+            </a:r>
+            <a:r>
+              <a:rPr sz="2800" b="0" i="0">
+                <a:solidFill>
+                  <a:srgbClr val="222B22"/>
+                </a:solidFill>
+                <a:latin typeface="Calibri"/>
+              </a:rPr>
+              <a:t>Somewhere findable — a drawer everyone knows about, the kitchen cabinet door, inside the family Bible. Decide the spot together.</a:t>
+            </a:r>
+          </a:p>
+          <a:p>
+            <a:pPr marL="274320" indent="-274320">
+              <a:spcAft>
+                <a:spcPts val="900"/>
+              </a:spcAft>
+            </a:pPr>
+            <a:r>
+              <a:rPr sz="2800" b="1" i="0">
+                <a:solidFill>
+                  <a:srgbClr val="97BC62"/>
+                </a:solidFill>
+                <a:latin typeface="Calibri"/>
+              </a:rPr>
+              <a:t>•  </a:t>
+            </a:r>
+            <a:r>
+              <a:rPr sz="2800" b="0" i="0">
+                <a:solidFill>
+                  <a:srgbClr val="222B22"/>
+                </a:solidFill>
+                <a:latin typeface="Calibri"/>
+              </a:rPr>
+              <a:t>If all goes well, they will sit there gathering dust for years. That is the job — the cards wait.</a:t>
+            </a:r>
+          </a:p>
+          <a:p>
+            <a:pPr marL="274320" indent="-274320">
+              <a:spcAft>
+                <a:spcPts val="900"/>
+              </a:spcAft>
+            </a:pPr>
+            <a:r>
+              <a:rPr sz="2800" b="1" i="0">
+                <a:solidFill>
+                  <a:srgbClr val="97BC62"/>
+                </a:solidFill>
+                <a:latin typeface="Calibri"/>
+              </a:rPr>
+              <a:t>•  </a:t>
+            </a:r>
+            <a:r>
+              <a:rPr sz="2800" b="0" i="0">
+                <a:solidFill>
+                  <a:srgbClr val="222B22"/>
+                </a:solidFill>
+                <a:latin typeface="Calibri"/>
+              </a:rPr>
+              <a:t>Next Wednesday is The Long Walk — the whole room, the whole teaching, these same teachers. Come ready to receive them again.</a:t>
+            </a:r>
+          </a:p>
+        </p:txBody>
+      </p:sp>
+      <p:sp>
+        <p:nvSpPr>
+          <p:cNvPr id="90" name="SlideNum"/>
+          <p:cNvSpPr txBox="1"/>
+          <p:nvPr/>
+        </p:nvSpPr>
+        <p:spPr>
+          <a:xfrm>
+            <a:off x="11384280" y="6446520"/>
+            <a:ext cx="640080" cy="292608"/>
+          </a:xfrm>
+          <a:prstGeom prst="rect">
+            <a:avLst/>
+          </a:prstGeom>
+          <a:noFill/>
+        </p:spPr>
+        <p:txBody>
+          <a:bodyPr wrap="none" lIns="0" tIns="0" rIns="45720" bIns="0" anchor="ctr"/>
+          <a:lstStyle/>
+          <a:p>
+            <a:pPr algn="r"/>
+            <a:r>
+              <a:t>240</a:t>
+            </a:r>
+            <a:endParaRPr sz="1000" b="1">
+              <a:solidFill>
+                <a:srgbClr val="7A8A6E"/>
+              </a:solidFill>
+              <a:latin typeface="Calibri"/>
+            </a:endParaRPr>
+          </a:p>
+        </p:txBody>
+      </p:sp>
+    </p:spTree>
+  </p:cSld>
+  <p:clrMapOvr>
+    <a:masterClrMapping/>
+  </p:clrMapOvr>
+</p:sld>
+</file>
+
+<file path=ppt/slides/slide13.xml><?xml version="1.0" encoding="utf-8"?>
+<p:sld xmlns:a="http://schemas.openxmlformats.org/drawingml/2006/main" xmlns:p="http://schemas.openxmlformats.org/presentationml/2006/main" xmlns:r="http://schemas.openxmlformats.org/officeDocument/2006/relationships">
+  <p:cSld>
+    <p:spTree>
+      <p:nvGrpSpPr>
+        <p:cNvPr id="1" name=""/>
+        <p:cNvGrpSpPr/>
+        <p:nvPr/>
+      </p:nvGrpSpPr>
+      <p:grpSpPr/>
+      <p:sp>
+        <p:nvSpPr>
+          <p:cNvPr id="2" name="Rectangle 1"/>
+          <p:cNvSpPr/>
+          <p:nvPr/>
+        </p:nvSpPr>
+        <p:spPr>
+          <a:xfrm>
+            <a:off x="0" y="0"/>
+            <a:ext cx="12192000" cy="6858000"/>
+          </a:xfrm>
+          <a:prstGeom prst="rect">
+            <a:avLst/>
+          </a:prstGeom>
+          <a:solidFill>
+            <a:srgbClr val="FFFFFF"/>
+          </a:solidFill>
+          <a:ln>
+            <a:noFill/>
+          </a:ln>
+          <a:effectLst/>
+        </p:spPr>
+        <p:style>
+          <a:lnRef idx="1">
+            <a:schemeClr val="accent1"/>
+          </a:lnRef>
+          <a:fillRef idx="3">
+            <a:schemeClr val="accent1"/>
+          </a:fillRef>
+          <a:effectRef idx="2">
+            <a:schemeClr val="accent1"/>
+          </a:effectRef>
+          <a:fontRef idx="minor">
+            <a:schemeClr val="lt1"/>
+          </a:fontRef>
+        </p:style>
+        <p:txBody>
+          <a:bodyPr rtlCol="0" anchor="ctr"/>
+          <a:lstStyle/>
+          <a:p>
+            <a:pPr algn="ctr"/>
+          </a:p>
+        </p:txBody>
+      </p:sp>
+      <p:sp>
+        <p:nvSpPr>
+          <p:cNvPr id="3" name="TextBox 2"/>
+          <p:cNvSpPr txBox="1"/>
+          <p:nvPr/>
+        </p:nvSpPr>
+        <p:spPr>
+          <a:xfrm>
+            <a:off x="822960" y="502920"/>
+            <a:ext cx="10515600" cy="822960"/>
+          </a:xfrm>
+          <a:prstGeom prst="rect">
+            <a:avLst/>
+          </a:prstGeom>
+          <a:noFill/>
+        </p:spPr>
+        <p:txBody>
+          <a:bodyPr wrap="square">
+            <a:spAutoFit/>
+          </a:bodyPr>
+          <a:lstStyle/>
+          <a:p>
+            <a:r>
+              <a:rPr sz="2800" b="1">
+                <a:solidFill>
+                  <a:srgbClr val="2C5F2D"/>
+                </a:solidFill>
+                <a:latin typeface="Cambria"/>
+              </a:rPr>
+              <a:t>The Take-Home Sheet — the Daily Rhythm</a:t>
+            </a:r>
+          </a:p>
+        </p:txBody>
+      </p:sp>
+      <p:pic>
+        <p:nvPicPr>
+          <p:cNvPr id="4" name="Picture 3" descr="s19_part1.png"/>
+          <p:cNvPicPr>
+            <a:picLocks noChangeAspect="1"/>
+          </p:cNvPicPr>
+          <p:nvPr/>
+        </p:nvPicPr>
+        <p:blipFill>
+          <a:blip r:embed="rId2"/>
+          <a:stretch>
+            <a:fillRect/>
+          </a:stretch>
+        </p:blipFill>
+        <p:spPr>
+          <a:xfrm>
+            <a:off x="1798167" y="1463040"/>
+            <a:ext cx="8595360" cy="4457308"/>
+          </a:xfrm>
+          <a:prstGeom prst="rect">
+            <a:avLst/>
+          </a:prstGeom>
+          <a:ln w="12700">
+            <a:solidFill>
+              <a:srgbClr val="C8C8C8"/>
+            </a:solidFill>
+          </a:ln>
+        </p:spPr>
+      </p:pic>
+      <p:sp>
+        <p:nvSpPr>
+          <p:cNvPr id="5" name="TextBox 4"/>
+          <p:cNvSpPr txBox="1"/>
+          <p:nvPr/>
+        </p:nvSpPr>
+        <p:spPr>
+          <a:xfrm>
+            <a:off x="822960" y="6355080"/>
+            <a:ext cx="10515600" cy="411480"/>
+          </a:xfrm>
+          <a:prstGeom prst="rect">
+            <a:avLst/>
+          </a:prstGeom>
+          <a:noFill/>
+        </p:spPr>
+        <p:txBody>
+          <a:bodyPr wrap="square">
+            <a:spAutoFit/>
+          </a:bodyPr>
+          <a:lstStyle/>
+          <a:p>
+            <a:r>
+              <a:rPr sz="1400" i="1">
+                <a:solidFill>
+                  <a:srgbClr val="595959"/>
+                </a:solidFill>
+                <a:latin typeface="Calibri"/>
+              </a:rPr>
+              <a:t>Handed out now — this is the sheet in your hands.</a:t>
+            </a:r>
+          </a:p>
+        </p:txBody>
+      </p:sp>
+      <p:sp>
+        <p:nvSpPr>
+          <p:cNvPr id="90" name="SlideNum"/>
+          <p:cNvSpPr txBox="1"/>
+          <p:nvPr/>
+        </p:nvSpPr>
+        <p:spPr>
+          <a:xfrm>
+            <a:off x="11384280" y="6446520"/>
+            <a:ext cx="640080" cy="292608"/>
+          </a:xfrm>
+          <a:prstGeom prst="rect">
+            <a:avLst/>
+          </a:prstGeom>
+          <a:noFill/>
+        </p:spPr>
+        <p:txBody>
+          <a:bodyPr wrap="none" lIns="0" tIns="0" rIns="45720" bIns="0" anchor="ctr"/>
+          <a:lstStyle/>
+          <a:p>
+            <a:pPr algn="r"/>
+            <a:r>
+              <a:t>241</a:t>
+            </a:r>
+            <a:endParaRPr sz="1000" b="1">
+              <a:solidFill>
+                <a:srgbClr val="7A8A6E"/>
+              </a:solidFill>
+              <a:latin typeface="Calibri"/>
+            </a:endParaRPr>
+          </a:p>
+        </p:txBody>
+      </p:sp>
+    </p:spTree>
+  </p:cSld>
+  <p:clrMapOvr>
+    <a:masterClrMapping/>
+  </p:clrMapOvr>
+</p:sld>
+</file>
+
+<file path=ppt/slides/slide14.xml><?xml version="1.0" encoding="utf-8"?>
+<p:sld xmlns:a="http://schemas.openxmlformats.org/drawingml/2006/main" xmlns:p="http://schemas.openxmlformats.org/presentationml/2006/main" xmlns:r="http://schemas.openxmlformats.org/officeDocument/2006/relationships">
+  <p:cSld>
+    <p:spTree>
+      <p:nvGrpSpPr>
+        <p:cNvPr id="1" name=""/>
+        <p:cNvGrpSpPr/>
+        <p:nvPr/>
+      </p:nvGrpSpPr>
+      <p:grpSpPr/>
+      <p:sp>
+        <p:nvSpPr>
+          <p:cNvPr id="2" name="Rectangle 1"/>
+          <p:cNvSpPr/>
+          <p:nvPr/>
+        </p:nvSpPr>
+        <p:spPr>
+          <a:xfrm>
+            <a:off x="0" y="0"/>
+            <a:ext cx="12192000" cy="6858000"/>
+          </a:xfrm>
+          <a:prstGeom prst="rect">
+            <a:avLst/>
+          </a:prstGeom>
+          <a:solidFill>
+            <a:srgbClr val="FFFFFF"/>
+          </a:solidFill>
+          <a:ln>
+            <a:noFill/>
+          </a:ln>
+          <a:effectLst/>
+        </p:spPr>
+        <p:style>
+          <a:lnRef idx="1">
+            <a:schemeClr val="accent1"/>
+          </a:lnRef>
+          <a:fillRef idx="3">
+            <a:schemeClr val="accent1"/>
+          </a:fillRef>
+          <a:effectRef idx="2">
+            <a:schemeClr val="accent1"/>
+          </a:effectRef>
+          <a:fontRef idx="minor">
+            <a:schemeClr val="lt1"/>
+          </a:fontRef>
+        </p:style>
+        <p:txBody>
+          <a:bodyPr rtlCol="0" anchor="ctr"/>
+          <a:lstStyle/>
+          <a:p>
+            <a:pPr algn="ctr"/>
+          </a:p>
+        </p:txBody>
+      </p:sp>
+      <p:sp>
+        <p:nvSpPr>
+          <p:cNvPr id="3" name="TextBox 2"/>
+          <p:cNvSpPr txBox="1"/>
+          <p:nvPr/>
+        </p:nvSpPr>
+        <p:spPr>
+          <a:xfrm>
+            <a:off x="822960" y="502920"/>
+            <a:ext cx="10515600" cy="822960"/>
+          </a:xfrm>
+          <a:prstGeom prst="rect">
+            <a:avLst/>
+          </a:prstGeom>
+          <a:noFill/>
+        </p:spPr>
+        <p:txBody>
+          <a:bodyPr wrap="square">
+            <a:spAutoFit/>
+          </a:bodyPr>
+          <a:lstStyle/>
+          <a:p>
+            <a:r>
+              <a:rPr sz="2800" b="1">
+                <a:solidFill>
+                  <a:srgbClr val="2C5F2D"/>
+                </a:solidFill>
+                <a:latin typeface="Cambria"/>
+              </a:rPr>
+              <a:t>The Take-Home Sheet — the Four Parts</a:t>
+            </a:r>
+          </a:p>
+        </p:txBody>
+      </p:sp>
+      <p:pic>
+        <p:nvPicPr>
+          <p:cNvPr id="4" name="Picture 3" descr="s19_part2.png"/>
+          <p:cNvPicPr>
+            <a:picLocks noChangeAspect="1"/>
+          </p:cNvPicPr>
+          <p:nvPr/>
+        </p:nvPicPr>
+        <p:blipFill>
+          <a:blip r:embed="rId2"/>
+          <a:stretch>
+            <a:fillRect/>
+          </a:stretch>
+        </p:blipFill>
+        <p:spPr>
+          <a:xfrm>
+            <a:off x="2592753" y="1463040"/>
+            <a:ext cx="7006189" cy="4709160"/>
+          </a:xfrm>
+          <a:prstGeom prst="rect">
+            <a:avLst/>
+          </a:prstGeom>
+          <a:ln w="12700">
+            <a:solidFill>
+              <a:srgbClr val="C8C8C8"/>
+            </a:solidFill>
+          </a:ln>
+        </p:spPr>
+      </p:pic>
+      <p:sp>
+        <p:nvSpPr>
+          <p:cNvPr id="5" name="TextBox 4"/>
+          <p:cNvSpPr txBox="1"/>
+          <p:nvPr/>
+        </p:nvSpPr>
+        <p:spPr>
+          <a:xfrm>
+            <a:off x="822960" y="6355080"/>
+            <a:ext cx="10515600" cy="411480"/>
+          </a:xfrm>
+          <a:prstGeom prst="rect">
+            <a:avLst/>
+          </a:prstGeom>
+          <a:noFill/>
+        </p:spPr>
+        <p:txBody>
+          <a:bodyPr wrap="square">
+            <a:spAutoFit/>
+          </a:bodyPr>
+          <a:lstStyle/>
+          <a:p>
+            <a:r>
+              <a:rPr sz="1400" i="1">
+                <a:solidFill>
+                  <a:srgbClr val="595959"/>
+                </a:solidFill>
+                <a:latin typeface="Calibri"/>
+              </a:rPr>
+              <a:t>One practice at a time — and a partner expecting you at the end of week one.</a:t>
+            </a:r>
+          </a:p>
+        </p:txBody>
+      </p:sp>
+      <p:sp>
+        <p:nvSpPr>
+          <p:cNvPr id="90" name="SlideNum"/>
+          <p:cNvSpPr txBox="1"/>
+          <p:nvPr/>
+        </p:nvSpPr>
+        <p:spPr>
+          <a:xfrm>
+            <a:off x="11384280" y="6446520"/>
+            <a:ext cx="640080" cy="292608"/>
+          </a:xfrm>
+          <a:prstGeom prst="rect">
+            <a:avLst/>
+          </a:prstGeom>
+          <a:noFill/>
+        </p:spPr>
+        <p:txBody>
+          <a:bodyPr wrap="none" lIns="0" tIns="0" rIns="45720" bIns="0" anchor="ctr"/>
+          <a:lstStyle/>
+          <a:p>
+            <a:pPr algn="r"/>
+            <a:r>
+              <a:t>241a</a:t>
+            </a:r>
+            <a:endParaRPr sz="1000" b="1">
+              <a:solidFill>
+                <a:srgbClr val="7A8A6E"/>
+              </a:solidFill>
+              <a:latin typeface="Calibri"/>
+            </a:endParaRPr>
+          </a:p>
+        </p:txBody>
+      </p:sp>
+    </p:spTree>
+  </p:cSld>
+  <p:clrMapOvr>
+    <a:masterClrMapping/>
+  </p:clrMapOvr>
+</p:sld>
+</file>
+
+<file path=ppt/slides/slide15.xml><?xml version="1.0" encoding="utf-8"?>
+<p:sld xmlns:a="http://schemas.openxmlformats.org/drawingml/2006/main" xmlns:r="http://schemas.openxmlformats.org/officeDocument/2006/relationships" xmlns:p="http://schemas.openxmlformats.org/presentationml/2006/main">
+  <p:cSld>
+    <p:spTree>
+      <p:nvGrpSpPr>
+        <p:cNvPr id="1" name=""/>
+        <p:cNvGrpSpPr/>
+        <p:nvPr/>
+      </p:nvGrpSpPr>
+      <p:grpSpPr>
+        <a:xfrm>
+          <a:off x="0" y="0"/>
+          <a:ext cx="0" cy="0"/>
+          <a:chOff x="0" y="0"/>
+          <a:chExt cx="0" cy="0"/>
+        </a:xfrm>
+      </p:grpSpPr>
+      <p:sp>
+        <p:nvSpPr>
+          <p:cNvPr id="2" name="Rectangle 1"/>
+          <p:cNvSpPr/>
+          <p:nvPr/>
+        </p:nvSpPr>
+        <p:spPr>
+          <a:xfrm>
+            <a:off x="0" y="0"/>
+            <a:ext cx="12191695" cy="6858000"/>
+          </a:xfrm>
+          <a:prstGeom prst="rect">
+            <a:avLst/>
+          </a:prstGeom>
+          <a:solidFill>
+            <a:srgbClr val="FFFFFF"/>
+          </a:solidFill>
+          <a:ln>
+            <a:noFill/>
+          </a:ln>
+        </p:spPr>
+        <p:txBody>
+          <a:bodyPr/>
+          <a:lstStyle/>
+          <a:p>
+            <a:endParaRPr/>
+          </a:p>
+        </p:txBody>
+      </p:sp>
+      <p:sp>
+        <p:nvSpPr>
+          <p:cNvPr id="3" name="TextBox 2"/>
+          <p:cNvSpPr txBox="1"/>
+          <p:nvPr/>
+        </p:nvSpPr>
+        <p:spPr>
+          <a:xfrm>
+            <a:off x="822960" y="502920"/>
+            <a:ext cx="10515600" cy="822960"/>
+          </a:xfrm>
+          <a:prstGeom prst="rect">
+            <a:avLst/>
+          </a:prstGeom>
+          <a:noFill/>
+        </p:spPr>
+        <p:txBody>
+          <a:bodyPr wrap="square">
+            <a:spAutoFit/>
+          </a:bodyPr>
+          <a:lstStyle/>
+          <a:p>
+            <a:pPr algn="l">
+              <a:spcAft>
+                <a:spcPts val="600"/>
+              </a:spcAft>
+            </a:pPr>
+            <a:r>
+              <a:rPr sz="2800" b="1" i="0">
+                <a:solidFill>
+                  <a:srgbClr val="2C5F2D"/>
+                </a:solidFill>
+                <a:latin typeface="Cambria"/>
+              </a:rPr>
               <a:t>Closing the Container + Aaronic Blessing</a:t>
             </a:r>
           </a:p>
@@ -5925,7 +6581,7 @@
 </p:sld>
 </file>
 
-<file path=ppt/slides/slide14.xml><?xml version="1.0" encoding="utf-8"?>
+<file path=ppt/slides/slide16.xml><?xml version="1.0" encoding="utf-8"?>
 <p:sld xmlns:a="http://schemas.openxmlformats.org/drawingml/2006/main" xmlns:r="http://schemas.openxmlformats.org/officeDocument/2006/relationships" xmlns:p="http://schemas.openxmlformats.org/presentationml/2006/main">
   <p:cSld>
     <p:spTree>
@@ -6250,595 +6906,6 @@
           </a:effectLst>
         </p:spPr>
       </p:pic>
-    </p:spTree>
-  </p:cSld>
-  <p:clrMapOvr>
-    <a:masterClrMapping/>
-  </p:clrMapOvr>
-</p:sld>
-</file>
-
-<file path=ppt/slides/slide15.xml><?xml version="1.0" encoding="utf-8"?>
-<p:sld xmlns:a="http://schemas.openxmlformats.org/drawingml/2006/main" xmlns:p="http://schemas.openxmlformats.org/presentationml/2006/main" xmlns:r="http://schemas.openxmlformats.org/officeDocument/2006/relationships">
-  <p:cSld>
-    <p:spTree>
-      <p:nvGrpSpPr>
-        <p:cNvPr id="1" name=""/>
-        <p:cNvGrpSpPr/>
-        <p:nvPr/>
-      </p:nvGrpSpPr>
-      <p:grpSpPr/>
-      <p:sp>
-        <p:nvSpPr>
-          <p:cNvPr id="2" name="Rectangle 1"/>
-          <p:cNvSpPr/>
-          <p:nvPr/>
-        </p:nvSpPr>
-        <p:spPr>
-          <a:xfrm>
-            <a:off x="0" y="0"/>
-            <a:ext cx="12192000" cy="6858000"/>
-          </a:xfrm>
-          <a:prstGeom prst="rect">
-            <a:avLst/>
-          </a:prstGeom>
-          <a:solidFill>
-            <a:srgbClr val="FFFFFF"/>
-          </a:solidFill>
-          <a:ln>
-            <a:noFill/>
-          </a:ln>
-          <a:effectLst/>
-        </p:spPr>
-        <p:style>
-          <a:lnRef idx="1">
-            <a:schemeClr val="accent1"/>
-          </a:lnRef>
-          <a:fillRef idx="3">
-            <a:schemeClr val="accent1"/>
-          </a:fillRef>
-          <a:effectRef idx="2">
-            <a:schemeClr val="accent1"/>
-          </a:effectRef>
-          <a:fontRef idx="minor">
-            <a:schemeClr val="lt1"/>
-          </a:fontRef>
-        </p:style>
-        <p:txBody>
-          <a:bodyPr rtlCol="0" anchor="ctr"/>
-          <a:lstStyle/>
-          <a:p>
-            <a:pPr algn="ctr"/>
-          </a:p>
-        </p:txBody>
-      </p:sp>
-      <p:sp>
-        <p:nvSpPr>
-          <p:cNvPr id="3" name="TextBox 2"/>
-          <p:cNvSpPr txBox="1"/>
-          <p:nvPr/>
-        </p:nvSpPr>
-        <p:spPr>
-          <a:xfrm>
-            <a:off x="822960" y="502920"/>
-            <a:ext cx="10515600" cy="822960"/>
-          </a:xfrm>
-          <a:prstGeom prst="rect">
-            <a:avLst/>
-          </a:prstGeom>
-          <a:noFill/>
-        </p:spPr>
-        <p:txBody>
-          <a:bodyPr wrap="square">
-            <a:spAutoFit/>
-          </a:bodyPr>
-          <a:lstStyle/>
-          <a:p>
-            <a:r>
-              <a:rPr sz="2800" b="1">
-                <a:solidFill>
-                  <a:srgbClr val="2C5F2D"/>
-                </a:solidFill>
-                <a:latin typeface="Cambria"/>
-              </a:rPr>
-              <a:t>Where We Are — the Four Connects</a:t>
-            </a:r>
-          </a:p>
-        </p:txBody>
-      </p:sp>
-      <p:pic>
-        <p:nvPicPr>
-          <p:cNvPr id="4" name="Picture 3" descr="four-connects.png"/>
-          <p:cNvPicPr>
-            <a:picLocks noChangeAspect="1"/>
-          </p:cNvPicPr>
-          <p:nvPr/>
-        </p:nvPicPr>
-        <p:blipFill>
-          <a:blip r:embed="rId2"/>
-          <a:stretch>
-            <a:fillRect/>
-          </a:stretch>
-        </p:blipFill>
-        <p:spPr>
-          <a:xfrm>
-            <a:off x="932688" y="1645920"/>
-            <a:ext cx="10332720" cy="3708663"/>
-          </a:xfrm>
-          <a:prstGeom prst="rect">
-            <a:avLst/>
-          </a:prstGeom>
-        </p:spPr>
-      </p:pic>
-      <p:sp>
-        <p:nvSpPr>
-          <p:cNvPr id="5" name="TextBox 4"/>
-          <p:cNvSpPr txBox="1"/>
-          <p:nvPr/>
-        </p:nvSpPr>
-        <p:spPr>
-          <a:xfrm>
-            <a:off x="822960" y="5623560"/>
-            <a:ext cx="10515600" cy="914400"/>
-          </a:xfrm>
-          <a:prstGeom prst="rect">
-            <a:avLst/>
-          </a:prstGeom>
-          <a:noFill/>
-        </p:spPr>
-        <p:txBody>
-          <a:bodyPr wrap="square">
-            <a:spAutoFit/>
-          </a:bodyPr>
-          <a:lstStyle/>
-          <a:p>
-            <a:r>
-              <a:rPr sz="1800" b="0">
-                <a:solidFill>
-                  <a:srgbClr val="222B22"/>
-                </a:solidFill>
-                <a:latin typeface="Calibri"/>
-              </a:rPr>
-              <a:t>Session 19 rehearses across the whole map — </a:t>
-            </a:r>
-            <a:r>
-              <a:rPr sz="1800" b="1">
-                <a:solidFill>
-                  <a:srgbClr val="2C5F2D"/>
-                </a:solidFill>
-                <a:latin typeface="Calibri"/>
-              </a:rPr>
-              <a:t>all four Connects</a:t>
-            </a:r>
-            <a:r>
-              <a:rPr sz="1800" b="0">
-                <a:solidFill>
-                  <a:srgbClr val="222B22"/>
-                </a:solidFill>
-                <a:latin typeface="Calibri"/>
-              </a:rPr>
-              <a:t>, in the Companions' hands. Each connection makes the next one real (Matt. 22:37–40).</a:t>
-            </a:r>
-          </a:p>
-        </p:txBody>
-      </p:sp>
-      <p:sp>
-        <p:nvSpPr>
-          <p:cNvPr id="90" name="SlideNum"/>
-          <p:cNvSpPr txBox="1"/>
-          <p:nvPr/>
-        </p:nvSpPr>
-        <p:spPr>
-          <a:xfrm>
-            <a:off x="11384280" y="6446520"/>
-            <a:ext cx="640080" cy="292608"/>
-          </a:xfrm>
-          <a:prstGeom prst="rect">
-            <a:avLst/>
-          </a:prstGeom>
-          <a:noFill/>
-        </p:spPr>
-        <p:txBody>
-          <a:bodyPr wrap="none" lIns="0" tIns="0" rIns="45720" bIns="0" anchor="ctr"/>
-          <a:lstStyle/>
-          <a:p>
-            <a:pPr algn="r"/>
-            <a:r>
-              <a:t>231a</a:t>
-            </a:r>
-            <a:endParaRPr sz="1000" b="1">
-              <a:solidFill>
-                <a:srgbClr val="7A8A6E"/>
-              </a:solidFill>
-              <a:latin typeface="Calibri"/>
-            </a:endParaRPr>
-          </a:p>
-        </p:txBody>
-      </p:sp>
-    </p:spTree>
-  </p:cSld>
-  <p:clrMapOvr>
-    <a:masterClrMapping/>
-  </p:clrMapOvr>
-</p:sld>
-</file>
-
-<file path=ppt/slides/slide16.xml><?xml version="1.0" encoding="utf-8"?>
-<p:sld xmlns:a="http://schemas.openxmlformats.org/drawingml/2006/main" xmlns:p="http://schemas.openxmlformats.org/presentationml/2006/main" xmlns:r="http://schemas.openxmlformats.org/officeDocument/2006/relationships">
-  <p:cSld>
-    <p:spTree>
-      <p:nvGrpSpPr>
-        <p:cNvPr id="1" name=""/>
-        <p:cNvGrpSpPr/>
-        <p:nvPr/>
-      </p:nvGrpSpPr>
-      <p:grpSpPr/>
-      <p:sp>
-        <p:nvSpPr>
-          <p:cNvPr id="2" name="Rectangle 1"/>
-          <p:cNvSpPr/>
-          <p:nvPr/>
-        </p:nvSpPr>
-        <p:spPr>
-          <a:xfrm>
-            <a:off x="0" y="0"/>
-            <a:ext cx="12192000" cy="6858000"/>
-          </a:xfrm>
-          <a:prstGeom prst="rect">
-            <a:avLst/>
-          </a:prstGeom>
-          <a:solidFill>
-            <a:srgbClr val="FFFFFF"/>
-          </a:solidFill>
-          <a:ln>
-            <a:noFill/>
-          </a:ln>
-          <a:effectLst/>
-        </p:spPr>
-        <p:style>
-          <a:lnRef idx="1">
-            <a:schemeClr val="accent1"/>
-          </a:lnRef>
-          <a:fillRef idx="3">
-            <a:schemeClr val="accent1"/>
-          </a:fillRef>
-          <a:effectRef idx="2">
-            <a:schemeClr val="accent1"/>
-          </a:effectRef>
-          <a:fontRef idx="minor">
-            <a:schemeClr val="lt1"/>
-          </a:fontRef>
-        </p:style>
-        <p:txBody>
-          <a:bodyPr rtlCol="0" anchor="ctr"/>
-          <a:lstStyle/>
-          <a:p>
-            <a:pPr algn="ctr"/>
-          </a:p>
-        </p:txBody>
-      </p:sp>
-      <p:sp>
-        <p:nvSpPr>
-          <p:cNvPr id="3" name="TextBox 2"/>
-          <p:cNvSpPr txBox="1"/>
-          <p:nvPr/>
-        </p:nvSpPr>
-        <p:spPr>
-          <a:xfrm>
-            <a:off x="822960" y="502920"/>
-            <a:ext cx="10515600" cy="822960"/>
-          </a:xfrm>
-          <a:prstGeom prst="rect">
-            <a:avLst/>
-          </a:prstGeom>
-          <a:noFill/>
-        </p:spPr>
-        <p:txBody>
-          <a:bodyPr wrap="square">
-            <a:spAutoFit/>
-          </a:bodyPr>
-          <a:lstStyle/>
-          <a:p>
-            <a:r>
-              <a:rPr sz="2800" b="1">
-                <a:solidFill>
-                  <a:srgbClr val="2C5F2D"/>
-                </a:solidFill>
-                <a:latin typeface="Cambria"/>
-              </a:rPr>
-              <a:t>The Take-Home Sheet — the Daily Rhythm</a:t>
-            </a:r>
-          </a:p>
-        </p:txBody>
-      </p:sp>
-      <p:pic>
-        <p:nvPicPr>
-          <p:cNvPr id="4" name="Picture 3" descr="s19_part1.png"/>
-          <p:cNvPicPr>
-            <a:picLocks noChangeAspect="1"/>
-          </p:cNvPicPr>
-          <p:nvPr/>
-        </p:nvPicPr>
-        <p:blipFill>
-          <a:blip r:embed="rId2"/>
-          <a:stretch>
-            <a:fillRect/>
-          </a:stretch>
-        </p:blipFill>
-        <p:spPr>
-          <a:xfrm>
-            <a:off x="1798167" y="1463040"/>
-            <a:ext cx="8595360" cy="4457308"/>
-          </a:xfrm>
-          <a:prstGeom prst="rect">
-            <a:avLst/>
-          </a:prstGeom>
-          <a:ln w="12700">
-            <a:solidFill>
-              <a:srgbClr val="C8C8C8"/>
-            </a:solidFill>
-          </a:ln>
-        </p:spPr>
-      </p:pic>
-      <p:sp>
-        <p:nvSpPr>
-          <p:cNvPr id="5" name="TextBox 4"/>
-          <p:cNvSpPr txBox="1"/>
-          <p:nvPr/>
-        </p:nvSpPr>
-        <p:spPr>
-          <a:xfrm>
-            <a:off x="822960" y="6355080"/>
-            <a:ext cx="10515600" cy="411480"/>
-          </a:xfrm>
-          <a:prstGeom prst="rect">
-            <a:avLst/>
-          </a:prstGeom>
-          <a:noFill/>
-        </p:spPr>
-        <p:txBody>
-          <a:bodyPr wrap="square">
-            <a:spAutoFit/>
-          </a:bodyPr>
-          <a:lstStyle/>
-          <a:p>
-            <a:r>
-              <a:rPr sz="1400" i="1">
-                <a:solidFill>
-                  <a:srgbClr val="595959"/>
-                </a:solidFill>
-                <a:latin typeface="Calibri"/>
-              </a:rPr>
-              <a:t>Handed out now — this is the sheet in your hands.</a:t>
-            </a:r>
-          </a:p>
-        </p:txBody>
-      </p:sp>
-      <p:sp>
-        <p:nvSpPr>
-          <p:cNvPr id="90" name="SlideNum"/>
-          <p:cNvSpPr txBox="1"/>
-          <p:nvPr/>
-        </p:nvSpPr>
-        <p:spPr>
-          <a:xfrm>
-            <a:off x="11384280" y="6446520"/>
-            <a:ext cx="640080" cy="292608"/>
-          </a:xfrm>
-          <a:prstGeom prst="rect">
-            <a:avLst/>
-          </a:prstGeom>
-          <a:noFill/>
-        </p:spPr>
-        <p:txBody>
-          <a:bodyPr wrap="none" lIns="0" tIns="0" rIns="45720" bIns="0" anchor="ctr"/>
-          <a:lstStyle/>
-          <a:p>
-            <a:pPr algn="r"/>
-            <a:r>
-              <a:t>241</a:t>
-            </a:r>
-            <a:endParaRPr sz="1000" b="1">
-              <a:solidFill>
-                <a:srgbClr val="7A8A6E"/>
-              </a:solidFill>
-              <a:latin typeface="Calibri"/>
-            </a:endParaRPr>
-          </a:p>
-        </p:txBody>
-      </p:sp>
-    </p:spTree>
-  </p:cSld>
-  <p:clrMapOvr>
-    <a:masterClrMapping/>
-  </p:clrMapOvr>
-</p:sld>
-</file>
-
-<file path=ppt/slides/slide17.xml><?xml version="1.0" encoding="utf-8"?>
-<p:sld xmlns:a="http://schemas.openxmlformats.org/drawingml/2006/main" xmlns:p="http://schemas.openxmlformats.org/presentationml/2006/main" xmlns:r="http://schemas.openxmlformats.org/officeDocument/2006/relationships">
-  <p:cSld>
-    <p:spTree>
-      <p:nvGrpSpPr>
-        <p:cNvPr id="1" name=""/>
-        <p:cNvGrpSpPr/>
-        <p:nvPr/>
-      </p:nvGrpSpPr>
-      <p:grpSpPr/>
-      <p:sp>
-        <p:nvSpPr>
-          <p:cNvPr id="2" name="Rectangle 1"/>
-          <p:cNvSpPr/>
-          <p:nvPr/>
-        </p:nvSpPr>
-        <p:spPr>
-          <a:xfrm>
-            <a:off x="0" y="0"/>
-            <a:ext cx="12192000" cy="6858000"/>
-          </a:xfrm>
-          <a:prstGeom prst="rect">
-            <a:avLst/>
-          </a:prstGeom>
-          <a:solidFill>
-            <a:srgbClr val="FFFFFF"/>
-          </a:solidFill>
-          <a:ln>
-            <a:noFill/>
-          </a:ln>
-          <a:effectLst/>
-        </p:spPr>
-        <p:style>
-          <a:lnRef idx="1">
-            <a:schemeClr val="accent1"/>
-          </a:lnRef>
-          <a:fillRef idx="3">
-            <a:schemeClr val="accent1"/>
-          </a:fillRef>
-          <a:effectRef idx="2">
-            <a:schemeClr val="accent1"/>
-          </a:effectRef>
-          <a:fontRef idx="minor">
-            <a:schemeClr val="lt1"/>
-          </a:fontRef>
-        </p:style>
-        <p:txBody>
-          <a:bodyPr rtlCol="0" anchor="ctr"/>
-          <a:lstStyle/>
-          <a:p>
-            <a:pPr algn="ctr"/>
-          </a:p>
-        </p:txBody>
-      </p:sp>
-      <p:sp>
-        <p:nvSpPr>
-          <p:cNvPr id="3" name="TextBox 2"/>
-          <p:cNvSpPr txBox="1"/>
-          <p:nvPr/>
-        </p:nvSpPr>
-        <p:spPr>
-          <a:xfrm>
-            <a:off x="822960" y="502920"/>
-            <a:ext cx="10515600" cy="822960"/>
-          </a:xfrm>
-          <a:prstGeom prst="rect">
-            <a:avLst/>
-          </a:prstGeom>
-          <a:noFill/>
-        </p:spPr>
-        <p:txBody>
-          <a:bodyPr wrap="square">
-            <a:spAutoFit/>
-          </a:bodyPr>
-          <a:lstStyle/>
-          <a:p>
-            <a:r>
-              <a:rPr sz="2800" b="1">
-                <a:solidFill>
-                  <a:srgbClr val="2C5F2D"/>
-                </a:solidFill>
-                <a:latin typeface="Cambria"/>
-              </a:rPr>
-              <a:t>The Take-Home Sheet — the Four Parts</a:t>
-            </a:r>
-          </a:p>
-        </p:txBody>
-      </p:sp>
-      <p:pic>
-        <p:nvPicPr>
-          <p:cNvPr id="4" name="Picture 3" descr="s19_part2.png"/>
-          <p:cNvPicPr>
-            <a:picLocks noChangeAspect="1"/>
-          </p:cNvPicPr>
-          <p:nvPr/>
-        </p:nvPicPr>
-        <p:blipFill>
-          <a:blip r:embed="rId2"/>
-          <a:stretch>
-            <a:fillRect/>
-          </a:stretch>
-        </p:blipFill>
-        <p:spPr>
-          <a:xfrm>
-            <a:off x="2592753" y="1463040"/>
-            <a:ext cx="7006189" cy="4709160"/>
-          </a:xfrm>
-          <a:prstGeom prst="rect">
-            <a:avLst/>
-          </a:prstGeom>
-          <a:ln w="12700">
-            <a:solidFill>
-              <a:srgbClr val="C8C8C8"/>
-            </a:solidFill>
-          </a:ln>
-        </p:spPr>
-      </p:pic>
-      <p:sp>
-        <p:nvSpPr>
-          <p:cNvPr id="5" name="TextBox 4"/>
-          <p:cNvSpPr txBox="1"/>
-          <p:nvPr/>
-        </p:nvSpPr>
-        <p:spPr>
-          <a:xfrm>
-            <a:off x="822960" y="6355080"/>
-            <a:ext cx="10515600" cy="411480"/>
-          </a:xfrm>
-          <a:prstGeom prst="rect">
-            <a:avLst/>
-          </a:prstGeom>
-          <a:noFill/>
-        </p:spPr>
-        <p:txBody>
-          <a:bodyPr wrap="square">
-            <a:spAutoFit/>
-          </a:bodyPr>
-          <a:lstStyle/>
-          <a:p>
-            <a:r>
-              <a:rPr sz="1400" i="1">
-                <a:solidFill>
-                  <a:srgbClr val="595959"/>
-                </a:solidFill>
-                <a:latin typeface="Calibri"/>
-              </a:rPr>
-              <a:t>One practice at a time — and a partner expecting you at the end of week one.</a:t>
-            </a:r>
-          </a:p>
-        </p:txBody>
-      </p:sp>
-      <p:sp>
-        <p:nvSpPr>
-          <p:cNvPr id="90" name="SlideNum"/>
-          <p:cNvSpPr txBox="1"/>
-          <p:nvPr/>
-        </p:nvSpPr>
-        <p:spPr>
-          <a:xfrm>
-            <a:off x="11384280" y="6446520"/>
-            <a:ext cx="640080" cy="292608"/>
-          </a:xfrm>
-          <a:prstGeom prst="rect">
-            <a:avLst/>
-          </a:prstGeom>
-          <a:noFill/>
-        </p:spPr>
-        <p:txBody>
-          <a:bodyPr wrap="none" lIns="0" tIns="0" rIns="45720" bIns="0" anchor="ctr"/>
-          <a:lstStyle/>
-          <a:p>
-            <a:pPr algn="r"/>
-            <a:r>
-              <a:t>241a</a:t>
-            </a:r>
-            <a:endParaRPr sz="1000" b="1">
-              <a:solidFill>
-                <a:srgbClr val="7A8A6E"/>
-              </a:solidFill>
-              <a:latin typeface="Calibri"/>
-            </a:endParaRPr>
-          </a:p>
-        </p:txBody>
-      </p:sp>
     </p:spTree>
   </p:cSld>
   <p:clrMapOvr>
@@ -7097,6 +7164,211 @@
 </file>
 
 <file path=ppt/slides/slide3.xml><?xml version="1.0" encoding="utf-8"?>
+<p:sld xmlns:a="http://schemas.openxmlformats.org/drawingml/2006/main" xmlns:p="http://schemas.openxmlformats.org/presentationml/2006/main" xmlns:r="http://schemas.openxmlformats.org/officeDocument/2006/relationships">
+  <p:cSld>
+    <p:spTree>
+      <p:nvGrpSpPr>
+        <p:cNvPr id="1" name=""/>
+        <p:cNvGrpSpPr/>
+        <p:nvPr/>
+      </p:nvGrpSpPr>
+      <p:grpSpPr/>
+      <p:sp>
+        <p:nvSpPr>
+          <p:cNvPr id="2" name="Rectangle 1"/>
+          <p:cNvSpPr/>
+          <p:nvPr/>
+        </p:nvSpPr>
+        <p:spPr>
+          <a:xfrm>
+            <a:off x="0" y="0"/>
+            <a:ext cx="12192000" cy="6858000"/>
+          </a:xfrm>
+          <a:prstGeom prst="rect">
+            <a:avLst/>
+          </a:prstGeom>
+          <a:solidFill>
+            <a:srgbClr val="FFFFFF"/>
+          </a:solidFill>
+          <a:ln>
+            <a:noFill/>
+          </a:ln>
+          <a:effectLst/>
+        </p:spPr>
+        <p:style>
+          <a:lnRef idx="1">
+            <a:schemeClr val="accent1"/>
+          </a:lnRef>
+          <a:fillRef idx="3">
+            <a:schemeClr val="accent1"/>
+          </a:fillRef>
+          <a:effectRef idx="2">
+            <a:schemeClr val="accent1"/>
+          </a:effectRef>
+          <a:fontRef idx="minor">
+            <a:schemeClr val="lt1"/>
+          </a:fontRef>
+        </p:style>
+        <p:txBody>
+          <a:bodyPr rtlCol="0" anchor="ctr"/>
+          <a:lstStyle/>
+          <a:p>
+            <a:pPr algn="ctr"/>
+          </a:p>
+        </p:txBody>
+      </p:sp>
+      <p:sp>
+        <p:nvSpPr>
+          <p:cNvPr id="3" name="TextBox 2"/>
+          <p:cNvSpPr txBox="1"/>
+          <p:nvPr/>
+        </p:nvSpPr>
+        <p:spPr>
+          <a:xfrm>
+            <a:off x="822960" y="502920"/>
+            <a:ext cx="10515600" cy="822960"/>
+          </a:xfrm>
+          <a:prstGeom prst="rect">
+            <a:avLst/>
+          </a:prstGeom>
+          <a:noFill/>
+        </p:spPr>
+        <p:txBody>
+          <a:bodyPr wrap="square">
+            <a:spAutoFit/>
+          </a:bodyPr>
+          <a:lstStyle/>
+          <a:p>
+            <a:r>
+              <a:rPr sz="2800" b="1">
+                <a:solidFill>
+                  <a:srgbClr val="2C5F2D"/>
+                </a:solidFill>
+                <a:latin typeface="Cambria"/>
+              </a:rPr>
+              <a:t>Where We Are — the Four Connects</a:t>
+            </a:r>
+          </a:p>
+        </p:txBody>
+      </p:sp>
+      <p:sp>
+        <p:nvSpPr>
+          <p:cNvPr id="5" name="TextBox 4"/>
+          <p:cNvSpPr txBox="1"/>
+          <p:nvPr/>
+        </p:nvSpPr>
+        <p:spPr>
+          <a:xfrm>
+            <a:off x="822960" y="5623560"/>
+            <a:ext cx="10515600" cy="914400"/>
+          </a:xfrm>
+          <a:prstGeom prst="rect">
+            <a:avLst/>
+          </a:prstGeom>
+          <a:noFill/>
+        </p:spPr>
+        <p:txBody>
+          <a:bodyPr wrap="square">
+            <a:spAutoFit/>
+          </a:bodyPr>
+          <a:lstStyle/>
+          <a:p>
+            <a:r>
+              <a:rPr sz="1800" b="0">
+                <a:solidFill>
+                  <a:srgbClr val="222B22"/>
+                </a:solidFill>
+                <a:latin typeface="Calibri"/>
+              </a:rPr>
+              <a:t>Session 19 rehearses across the whole map — </a:t>
+            </a:r>
+            <a:r>
+              <a:rPr sz="1800" b="1">
+                <a:solidFill>
+                  <a:srgbClr val="2C5F2D"/>
+                </a:solidFill>
+                <a:latin typeface="Calibri"/>
+              </a:rPr>
+              <a:t>all four Connects</a:t>
+            </a:r>
+            <a:r>
+              <a:rPr sz="1800" b="0">
+                <a:solidFill>
+                  <a:srgbClr val="222B22"/>
+                </a:solidFill>
+                <a:latin typeface="Calibri"/>
+              </a:rPr>
+              <a:t>, in the Companions' hands. Each connection makes the next one real (Matt. 22:37–40).</a:t>
+            </a:r>
+          </a:p>
+        </p:txBody>
+      </p:sp>
+      <p:sp>
+        <p:nvSpPr>
+          <p:cNvPr id="90" name="SlideNum"/>
+          <p:cNvSpPr txBox="1"/>
+          <p:nvPr/>
+        </p:nvSpPr>
+        <p:spPr>
+          <a:xfrm>
+            <a:off x="11384280" y="6446520"/>
+            <a:ext cx="640080" cy="292608"/>
+          </a:xfrm>
+          <a:prstGeom prst="rect">
+            <a:avLst/>
+          </a:prstGeom>
+          <a:noFill/>
+        </p:spPr>
+        <p:txBody>
+          <a:bodyPr wrap="none" lIns="0" tIns="0" rIns="45720" bIns="0" anchor="ctr"/>
+          <a:lstStyle/>
+          <a:p>
+            <a:pPr algn="r"/>
+            <a:r>
+              <a:t>231a</a:t>
+            </a:r>
+            <a:endParaRPr sz="1000" b="1">
+              <a:solidFill>
+                <a:srgbClr val="7A8A6E"/>
+              </a:solidFill>
+              <a:latin typeface="Calibri"/>
+            </a:endParaRPr>
+          </a:p>
+        </p:txBody>
+      </p:sp>
+      <p:pic>
+        <p:nvPicPr>
+          <p:cNvPr id="91" name="Picture 90" descr="four-connects.png"/>
+          <p:cNvPicPr>
+            <a:picLocks noChangeAspect="1"/>
+          </p:cNvPicPr>
+          <p:nvPr/>
+        </p:nvPicPr>
+        <p:blipFill>
+          <a:blip r:embed="rId4"/>
+          <a:stretch>
+            <a:fillRect/>
+          </a:stretch>
+        </p:blipFill>
+        <p:spPr>
+          <a:xfrm>
+            <a:off x="932688" y="1645920"/>
+            <a:ext cx="10332720" cy="3708663"/>
+          </a:xfrm>
+          <a:prstGeom prst="rect">
+            <a:avLst/>
+          </a:prstGeom>
+        </p:spPr>
+      </p:pic>
+    </p:spTree>
+  </p:cSld>
+  <p:clrMapOvr>
+    <a:masterClrMapping/>
+  </p:clrMapOvr>
+</p:sld>
+</file>
+
+<file path=ppt/slides/slide4.xml><?xml version="1.0" encoding="utf-8"?>
 <p:sld xmlns:a="http://schemas.openxmlformats.org/drawingml/2006/main" xmlns:r="http://schemas.openxmlformats.org/officeDocument/2006/relationships" xmlns:p="http://schemas.openxmlformats.org/presentationml/2006/main">
   <p:cSld>
     <p:spTree>
@@ -7572,353 +7844,6 @@
 </p:sld>
 </file>
 
-<file path=ppt/slides/slide4.xml><?xml version="1.0" encoding="utf-8"?>
-<p:sld xmlns:a="http://schemas.openxmlformats.org/drawingml/2006/main" xmlns:r="http://schemas.openxmlformats.org/officeDocument/2006/relationships" xmlns:p="http://schemas.openxmlformats.org/presentationml/2006/main">
-  <p:cSld>
-    <p:spTree>
-      <p:nvGrpSpPr>
-        <p:cNvPr id="1" name=""/>
-        <p:cNvGrpSpPr/>
-        <p:nvPr/>
-      </p:nvGrpSpPr>
-      <p:grpSpPr>
-        <a:xfrm>
-          <a:off x="0" y="0"/>
-          <a:ext cx="0" cy="0"/>
-          <a:chOff x="0" y="0"/>
-          <a:chExt cx="0" cy="0"/>
-        </a:xfrm>
-      </p:grpSpPr>
-      <p:sp>
-        <p:nvSpPr>
-          <p:cNvPr id="2" name="Rectangle 1"/>
-          <p:cNvSpPr/>
-          <p:nvPr/>
-        </p:nvSpPr>
-        <p:spPr>
-          <a:xfrm>
-            <a:off x="0" y="0"/>
-            <a:ext cx="12191695" cy="6858000"/>
-          </a:xfrm>
-          <a:prstGeom prst="rect">
-            <a:avLst/>
-          </a:prstGeom>
-          <a:solidFill>
-            <a:srgbClr val="FFFFFF"/>
-          </a:solidFill>
-          <a:ln>
-            <a:noFill/>
-          </a:ln>
-        </p:spPr>
-        <p:txBody>
-          <a:bodyPr/>
-          <a:lstStyle/>
-          <a:p>
-            <a:endParaRPr/>
-          </a:p>
-        </p:txBody>
-      </p:sp>
-      <p:sp>
-        <p:nvSpPr>
-          <p:cNvPr id="3" name="TextBox 2"/>
-          <p:cNvSpPr txBox="1"/>
-          <p:nvPr/>
-        </p:nvSpPr>
-        <p:spPr>
-          <a:xfrm>
-            <a:off x="822960" y="502920"/>
-            <a:ext cx="10515600" cy="822960"/>
-          </a:xfrm>
-          <a:prstGeom prst="rect">
-            <a:avLst/>
-          </a:prstGeom>
-          <a:noFill/>
-        </p:spPr>
-        <p:txBody>
-          <a:bodyPr wrap="square">
-            <a:spAutoFit/>
-          </a:bodyPr>
-          <a:lstStyle/>
-          <a:p>
-            <a:pPr algn="l">
-              <a:spcAft>
-                <a:spcPts val="600"/>
-              </a:spcAft>
-            </a:pPr>
-            <a:r>
-              <a:rPr sz="2800" b="1" i="0">
-                <a:solidFill>
-                  <a:srgbClr val="2C5F2D"/>
-                </a:solidFill>
-                <a:latin typeface="Cambria"/>
-              </a:rPr>
-              <a:t>Opening Container — the Eight Steps</a:t>
-            </a:r>
-          </a:p>
-        </p:txBody>
-      </p:sp>
-      <p:sp>
-        <p:nvSpPr>
-          <p:cNvPr id="4" name="TextBox 4"/>
-          <p:cNvSpPr txBox="1"/>
-          <p:nvPr/>
-        </p:nvSpPr>
-        <p:spPr>
-          <a:xfrm>
-            <a:off x="822960" y="1554480"/>
-            <a:ext cx="10515600" cy="4892040"/>
-          </a:xfrm>
-          <a:prstGeom prst="rect">
-            <a:avLst/>
-          </a:prstGeom>
-          <a:noFill/>
-        </p:spPr>
-        <p:txBody>
-          <a:bodyPr wrap="square" lIns="91440" tIns="91440" rIns="91440" bIns="91440"/>
-          <a:lstStyle/>
-          <a:p>
-            <a:pPr marL="342900" indent="-342900">
-              <a:spcAft>
-                <a:spcPts val="650"/>
-              </a:spcAft>
-            </a:pPr>
-            <a:r>
-              <a:rPr sz="2400" b="1" i="0">
-                <a:solidFill>
-                  <a:srgbClr val="97BC62"/>
-                </a:solidFill>
-                <a:latin typeface="Calibri"/>
-              </a:rPr>
-              <a:t>1   </a:t>
-            </a:r>
-            <a:r>
-              <a:rPr sz="2400" b="0" i="0">
-                <a:solidFill>
-                  <a:srgbClr val="222B22"/>
-                </a:solidFill>
-                <a:latin typeface="Calibri"/>
-              </a:rPr>
-              <a:t>Welcome — five minutes to open the container</a:t>
-            </a:r>
-          </a:p>
-          <a:p>
-            <a:pPr marL="342900" indent="-342900">
-              <a:spcAft>
-                <a:spcPts val="650"/>
-              </a:spcAft>
-            </a:pPr>
-            <a:r>
-              <a:rPr sz="2400" b="1" i="0">
-                <a:solidFill>
-                  <a:srgbClr val="97BC62"/>
-                </a:solidFill>
-                <a:latin typeface="Calibri"/>
-              </a:rPr>
-              <a:t>2   </a:t>
-            </a:r>
-            <a:r>
-              <a:rPr sz="2400" b="0" i="0">
-                <a:solidFill>
-                  <a:srgbClr val="222B22"/>
-                </a:solidFill>
-                <a:latin typeface="Calibri"/>
-              </a:rPr>
-              <a:t>Phones silenced and put away</a:t>
-            </a:r>
-          </a:p>
-          <a:p>
-            <a:pPr marL="342900" indent="-342900">
-              <a:spcAft>
-                <a:spcPts val="650"/>
-              </a:spcAft>
-            </a:pPr>
-            <a:r>
-              <a:rPr sz="2400" b="1" i="0">
-                <a:solidFill>
-                  <a:srgbClr val="97BC62"/>
-                </a:solidFill>
-                <a:latin typeface="Calibri"/>
-              </a:rPr>
-              <a:t>3   </a:t>
-            </a:r>
-            <a:r>
-              <a:rPr sz="2400" b="0" i="0">
-                <a:solidFill>
-                  <a:srgbClr val="222B22"/>
-                </a:solidFill>
-                <a:latin typeface="Calibri"/>
-              </a:rPr>
-              <a:t>Stand in a circle</a:t>
-            </a:r>
-          </a:p>
-          <a:p>
-            <a:pPr marL="342900" indent="-342900">
-              <a:spcAft>
-                <a:spcPts val="650"/>
-              </a:spcAft>
-            </a:pPr>
-            <a:r>
-              <a:rPr sz="2400" b="1" i="0">
-                <a:solidFill>
-                  <a:srgbClr val="97BC62"/>
-                </a:solidFill>
-                <a:latin typeface="Calibri"/>
-              </a:rPr>
-              <a:t>4   </a:t>
-            </a:r>
-            <a:r>
-              <a:rPr sz="2400" b="0" i="0">
-                <a:solidFill>
-                  <a:srgbClr val="222B22"/>
-                </a:solidFill>
-                <a:latin typeface="Calibri"/>
-              </a:rPr>
-              <a:t>One-word check-in — how you actually are, right now</a:t>
-            </a:r>
-          </a:p>
-          <a:p>
-            <a:pPr marL="342900" indent="-342900">
-              <a:spcAft>
-                <a:spcPts val="650"/>
-              </a:spcAft>
-            </a:pPr>
-            <a:r>
-              <a:rPr sz="2400" b="1" i="0">
-                <a:solidFill>
-                  <a:srgbClr val="97BC62"/>
-                </a:solidFill>
-                <a:latin typeface="Calibri"/>
-              </a:rPr>
-              <a:t>5   </a:t>
-            </a:r>
-            <a:r>
-              <a:rPr sz="2400" b="0" i="0">
-                <a:solidFill>
-                  <a:srgbClr val="222B22"/>
-                </a:solidFill>
-                <a:latin typeface="Calibri"/>
-              </a:rPr>
-              <a:t>Put out / bring in — set something down; bring a blessing in</a:t>
-            </a:r>
-          </a:p>
-          <a:p>
-            <a:pPr marL="342900" indent="-342900">
-              <a:spcAft>
-                <a:spcPts val="650"/>
-              </a:spcAft>
-            </a:pPr>
-            <a:r>
-              <a:rPr sz="2400" b="1" i="0">
-                <a:solidFill>
-                  <a:srgbClr val="97BC62"/>
-                </a:solidFill>
-                <a:latin typeface="Calibri"/>
-              </a:rPr>
-              <a:t>6   </a:t>
-            </a:r>
-            <a:r>
-              <a:rPr sz="2400" b="0" i="0">
-                <a:solidFill>
-                  <a:srgbClr val="222B22"/>
-                </a:solidFill>
-                <a:latin typeface="Calibri"/>
-              </a:rPr>
-              <a:t>Spoken commitment: “I am here. I am paying attention. I am willing to be moved.”</a:t>
-            </a:r>
-          </a:p>
-          <a:p>
-            <a:pPr marL="342900" indent="-342900">
-              <a:spcAft>
-                <a:spcPts val="650"/>
-              </a:spcAft>
-            </a:pPr>
-            <a:r>
-              <a:rPr sz="2400" b="1" i="0">
-                <a:solidFill>
-                  <a:srgbClr val="97BC62"/>
-                </a:solidFill>
-                <a:latin typeface="Calibri"/>
-              </a:rPr>
-              <a:t>7   </a:t>
-            </a:r>
-            <a:r>
-              <a:rPr sz="2400" b="0" i="0">
-                <a:solidFill>
-                  <a:srgbClr val="222B22"/>
-                </a:solidFill>
-                <a:latin typeface="Calibri"/>
-              </a:rPr>
-              <a:t>Opening prayer — “Holy Spirit, you are welcome here. Speak. We are listening.”</a:t>
-            </a:r>
-          </a:p>
-          <a:p>
-            <a:pPr marL="342900" indent="-342900">
-              <a:spcAft>
-                <a:spcPts val="650"/>
-              </a:spcAft>
-            </a:pPr>
-            <a:r>
-              <a:rPr sz="2400" b="1" i="0">
-                <a:solidFill>
-                  <a:srgbClr val="97BC62"/>
-                </a:solidFill>
-                <a:latin typeface="Calibri"/>
-              </a:rPr>
-              <a:t>8   </a:t>
-            </a:r>
-            <a:r>
-              <a:rPr sz="2400" b="0" i="0">
-                <a:solidFill>
-                  <a:srgbClr val="222B22"/>
-                </a:solidFill>
-                <a:latin typeface="Calibri"/>
-              </a:rPr>
-              <a:t>Sit. Begin.</a:t>
-            </a:r>
-          </a:p>
-        </p:txBody>
-      </p:sp>
-      <p:sp>
-        <p:nvSpPr>
-          <p:cNvPr id="90" name="SlideNum"/>
-          <p:cNvSpPr txBox="1"/>
-          <p:nvPr/>
-        </p:nvSpPr>
-        <p:spPr>
-          <a:xfrm>
-            <a:off x="11384280" y="6446520"/>
-            <a:ext cx="640080" cy="292608"/>
-          </a:xfrm>
-          <a:prstGeom prst="rect">
-            <a:avLst/>
-          </a:prstGeom>
-          <a:noFill/>
-        </p:spPr>
-        <p:txBody>
-          <a:bodyPr wrap="none" lIns="0" tIns="0" rIns="45720" bIns="0" anchor="ctr"/>
-          <a:lstStyle/>
-          <a:p>
-            <a:pPr algn="r"/>
-            <a:r>
-              <a:t>233</a:t>
-            </a:r>
-            <a:endParaRPr sz="1000" b="1">
-              <a:solidFill>
-                <a:srgbClr val="7A8A6E"/>
-              </a:solidFill>
-              <a:latin typeface="Calibri"/>
-            </a:endParaRPr>
-          </a:p>
-        </p:txBody>
-      </p:sp>
-    </p:spTree>
-  </p:cSld>
-  <p:clrMapOvr>
-    <a:masterClrMapping/>
-  </p:clrMapOvr>
-</p:sld>
-</file>
-
 <file path=ppt/slides/slide5.xml><?xml version="1.0" encoding="utf-8"?>
 <p:sld xmlns:a="http://schemas.openxmlformats.org/drawingml/2006/main" xmlns:r="http://schemas.openxmlformats.org/officeDocument/2006/relationships" xmlns:p="http://schemas.openxmlformats.org/presentationml/2006/main">
   <p:cSld>
@@ -7999,7 +7924,7 @@
                 </a:solidFill>
                 <a:latin typeface="Cambria"/>
               </a:rPr>
-              <a:t>The Frame — Why These Two Cards</a:t>
+              <a:t>Opening Container — the Eight Steps</a:t>
             </a:r>
           </a:p>
         </p:txBody>
@@ -8012,8 +7937,8 @@
         </p:nvSpPr>
         <p:spPr>
           <a:xfrm>
-            <a:off x="822960" y="1600200"/>
-            <a:ext cx="5669280" cy="4572000"/>
+            <a:off x="822960" y="1554480"/>
+            <a:ext cx="10515600" cy="4892040"/>
           </a:xfrm>
           <a:prstGeom prst="rect">
             <a:avLst/>
@@ -8024,224 +7949,203 @@
           <a:bodyPr wrap="square" lIns="91440" tIns="91440" rIns="91440" bIns="91440"/>
           <a:lstStyle/>
           <a:p>
-            <a:pPr marL="274320" indent="-274320">
+            <a:pPr marL="342900" indent="-342900">
               <a:spcAft>
                 <a:spcPts val="650"/>
               </a:spcAft>
             </a:pPr>
             <a:r>
-              <a:rPr sz="1800" b="1" i="0">
+              <a:rPr sz="2400" b="1" i="0">
                 <a:solidFill>
                   <a:srgbClr val="97BC62"/>
                 </a:solidFill>
                 <a:latin typeface="Calibri"/>
               </a:rPr>
-              <a:t>•  </a:t>
-            </a:r>
-            <a:r>
-              <a:rPr sz="1800" b="0" i="0">
+              <a:t>1   </a:t>
+            </a:r>
+            <a:r>
+              <a:rPr sz="2400" b="0" i="0">
                 <a:solidFill>
                   <a:srgbClr val="222B22"/>
                 </a:solidFill>
                 <a:latin typeface="Calibri"/>
               </a:rPr>
-              <a:t>Sooner or later, everyone who walks with God hits a dry season — and the dangerous thing is not the dryness, it is the wrong diagnosis</a:t>
-            </a:r>
-          </a:p>
-          <a:p>
-            <a:pPr marL="274320" indent="-274320">
+              <a:t>Welcome — five minutes to open the container</a:t>
+            </a:r>
+          </a:p>
+          <a:p>
+            <a:pPr marL="342900" indent="-342900">
               <a:spcAft>
                 <a:spcPts val="650"/>
               </a:spcAft>
             </a:pPr>
             <a:r>
-              <a:rPr sz="1800" b="1" i="0">
+              <a:rPr sz="2400" b="1" i="0">
                 <a:solidFill>
                   <a:srgbClr val="97BC62"/>
                 </a:solidFill>
                 <a:latin typeface="Calibri"/>
               </a:rPr>
-              <a:t>•  </a:t>
-            </a:r>
-            <a:r>
-              <a:rPr sz="1800" b="0" i="0">
+              <a:t>2   </a:t>
+            </a:r>
+            <a:r>
+              <a:rPr sz="2400" b="0" i="0">
                 <a:solidFill>
                   <a:srgbClr val="222B22"/>
                 </a:solidFill>
                 <a:latin typeface="Calibri"/>
               </a:rPr>
-              <a:t>The Signs Card — so a misread dry season never ends a journey in this room</a:t>
-            </a:r>
-          </a:p>
-          <a:p>
-            <a:pPr marL="274320" indent="-274320">
+              <a:t>Phones silenced and put away</a:t>
+            </a:r>
+          </a:p>
+          <a:p>
+            <a:pPr marL="342900" indent="-342900">
               <a:spcAft>
                 <a:spcPts val="650"/>
               </a:spcAft>
             </a:pPr>
             <a:r>
-              <a:rPr sz="1800" b="1" i="0">
+              <a:rPr sz="2400" b="1" i="0">
                 <a:solidFill>
                   <a:srgbClr val="97BC62"/>
                 </a:solidFill>
                 <a:latin typeface="Calibri"/>
               </a:rPr>
-              <a:t>•  </a:t>
-            </a:r>
-            <a:r>
-              <a:rPr sz="1800" b="0" i="0">
+              <a:t>3   </a:t>
+            </a:r>
+            <a:r>
+              <a:rPr sz="2400" b="0" i="0">
                 <a:solidFill>
                   <a:srgbClr val="222B22"/>
                 </a:solidFill>
                 <a:latin typeface="Calibri"/>
               </a:rPr>
-              <a:t>The Path Home Card — the written door back, and it ends the way Luke 15 ends: the father runs</a:t>
-            </a:r>
-          </a:p>
-          <a:p>
-            <a:pPr marL="274320" indent="-274320">
+              <a:t>Stand in a circle</a:t>
+            </a:r>
+          </a:p>
+          <a:p>
+            <a:pPr marL="342900" indent="-342900">
               <a:spcAft>
                 <a:spcPts val="650"/>
               </a:spcAft>
             </a:pPr>
             <a:r>
-              <a:rPr sz="1800" b="1" i="0">
+              <a:rPr sz="2400" b="1" i="0">
                 <a:solidFill>
                   <a:srgbClr val="97BC62"/>
                 </a:solidFill>
                 <a:latin typeface="Calibri"/>
               </a:rPr>
-              <a:t>•  </a:t>
-            </a:r>
-            <a:r>
-              <a:rPr sz="1800" b="0" i="0">
+              <a:t>4   </a:t>
+            </a:r>
+            <a:r>
+              <a:rPr sz="2400" b="0" i="0">
                 <a:solidFill>
                   <a:srgbClr val="222B22"/>
                 </a:solidFill>
                 <a:latin typeface="Calibri"/>
               </a:rPr>
-              <a:t>Tonight is a rehearsal — the small room before the large one. Your pair is their first congregation.</a:t>
-            </a:r>
-          </a:p>
-          <a:p>
-            <a:pPr marL="274320" indent="-274320">
+              <a:t>One-word check-in — how you actually are, right now</a:t>
+            </a:r>
+          </a:p>
+          <a:p>
+            <a:pPr marL="342900" indent="-342900">
               <a:spcAft>
                 <a:spcPts val="650"/>
               </a:spcAft>
             </a:pPr>
             <a:r>
-              <a:rPr sz="1800" b="1" i="0">
+              <a:rPr sz="2400" b="1" i="0">
                 <a:solidFill>
                   <a:srgbClr val="97BC62"/>
                 </a:solidFill>
                 <a:latin typeface="Calibri"/>
               </a:rPr>
-              <a:t>•  </a:t>
-            </a:r>
-            <a:r>
-              <a:rPr sz="1800" b="0" i="0">
+              <a:t>5   </a:t>
+            </a:r>
+            <a:r>
+              <a:rPr sz="2400" b="0" i="0">
                 <a:solidFill>
                   <a:srgbClr val="222B22"/>
                 </a:solidFill>
                 <a:latin typeface="Calibri"/>
               </a:rPr>
-              <a:t>At the end, your pair gives its teacher two gifts: one thing to keep, and one thing to adjust</a:t>
-            </a:r>
-          </a:p>
-          <a:p>
-            <a:pPr marL="274320" indent="-274320">
+              <a:t>Put out / bring in — set something down; bring a blessing in</a:t>
+            </a:r>
+          </a:p>
+          <a:p>
+            <a:pPr marL="342900" indent="-342900">
               <a:spcAft>
                 <a:spcPts val="650"/>
               </a:spcAft>
             </a:pPr>
             <a:r>
-              <a:rPr sz="1800" b="1" i="0">
+              <a:rPr sz="2400" b="1" i="0">
                 <a:solidFill>
                   <a:srgbClr val="97BC62"/>
                 </a:solidFill>
                 <a:latin typeface="Calibri"/>
               </a:rPr>
-              <a:t>•  </a:t>
-            </a:r>
-            <a:r>
-              <a:rPr sz="1800" b="0" i="0">
+              <a:t>6   </a:t>
+            </a:r>
+            <a:r>
+              <a:rPr sz="2400" b="0" i="0">
                 <a:solidFill>
                   <a:srgbClr val="222B22"/>
                 </a:solidFill>
                 <a:latin typeface="Calibri"/>
               </a:rPr>
-              <a:t>Tonight is about the cards, not anyone’s current season — nobody will be asked where they are</a:t>
-            </a:r>
-          </a:p>
-        </p:txBody>
-      </p:sp>
-      <p:sp>
-        <p:nvSpPr>
-          <p:cNvPr id="6" name="TextBox 6"/>
-          <p:cNvSpPr txBox="1"/>
-          <p:nvPr/>
-        </p:nvSpPr>
-        <p:spPr>
-          <a:xfrm>
-            <a:off x="6766560" y="1737360"/>
-            <a:ext cx="4663440" cy="3310128"/>
-          </a:xfrm>
-          <a:prstGeom prst="rect">
-            <a:avLst/>
-          </a:prstGeom>
-          <a:solidFill>
-            <a:srgbClr val="F1F6EC"/>
-          </a:solidFill>
-        </p:spPr>
-        <p:txBody>
-          <a:bodyPr wrap="square" lIns="91440" tIns="91440" rIns="91440" bIns="91440" anchor="ctr"/>
-          <a:lstStyle/>
-          <a:p>
-            <a:pPr>
+              <a:t>Spoken commitment: “I am here. I am paying attention. I am willing to be moved.”</a:t>
+            </a:r>
+          </a:p>
+          <a:p>
+            <a:pPr marL="342900" indent="-342900">
               <a:spcAft>
-                <a:spcPts val="900"/>
+                <a:spcPts val="650"/>
               </a:spcAft>
             </a:pPr>
             <a:r>
-              <a:rPr sz="1200" b="1" i="0">
+              <a:rPr sz="2400" b="1" i="0">
                 <a:solidFill>
                   <a:srgbClr val="97BC62"/>
                 </a:solidFill>
                 <a:latin typeface="Calibri"/>
               </a:rPr>
-              <a:t>2 TIMOTHY 2:2</a:t>
-            </a:r>
-          </a:p>
-          <a:p>
-            <a:pPr>
+              <a:t>7   </a:t>
+            </a:r>
+            <a:r>
+              <a:rPr sz="2400" b="0" i="0">
+                <a:solidFill>
+                  <a:srgbClr val="222B22"/>
+                </a:solidFill>
+                <a:latin typeface="Calibri"/>
+              </a:rPr>
+              <a:t>Opening prayer — “Holy Spirit, you are welcome here. Speak. We are listening.”</a:t>
+            </a:r>
+          </a:p>
+          <a:p>
+            <a:pPr marL="342900" indent="-342900">
               <a:spcAft>
-                <a:spcPts val="600"/>
+                <a:spcPts val="650"/>
               </a:spcAft>
             </a:pPr>
             <a:r>
-              <a:rPr sz="2000" b="0" i="1">
+              <a:rPr sz="2400" b="1" i="0">
+                <a:solidFill>
+                  <a:srgbClr val="97BC62"/>
+                </a:solidFill>
+                <a:latin typeface="Calibri"/>
+              </a:rPr>
+              <a:t>8   </a:t>
+            </a:r>
+            <a:r>
+              <a:rPr sz="2400" b="0" i="0">
                 <a:solidFill>
                   <a:srgbClr val="222B22"/>
                 </a:solidFill>
-                <a:latin typeface="Cambria"/>
-              </a:rPr>
-              <a:t>“and what you have heard from me in the presence of many witnesses entrust to faithful men, who will be able to teach others also.”</a:t>
-            </a:r>
-          </a:p>
-          <a:p>
-            <a:pPr>
-              <a:spcAft>
-                <a:spcPts val="600"/>
-              </a:spcAft>
-            </a:pPr>
-            <a:r>
-              <a:rPr sz="2000" b="0" i="1">
-                <a:solidFill>
-                  <a:srgbClr val="222B22"/>
-                </a:solidFill>
-                <a:latin typeface="Cambria"/>
-              </a:rPr>
-              <a:t>Four generations in one sentence — Paul, Timothy, the faithful, and the others also. Tonight you are watching the third handoff happen.</a:t>
+                <a:latin typeface="Calibri"/>
+              </a:rPr>
+              <a:t>Sit. Begin.</a:t>
             </a:r>
           </a:p>
         </p:txBody>
@@ -8268,7 +8172,7 @@
           <a:p>
             <a:pPr algn="r"/>
             <a:r>
-              <a:t>234</a:t>
+              <a:t>233</a:t>
             </a:r>
             <a:endParaRPr sz="1000" b="1">
               <a:solidFill>
@@ -8367,7 +8271,7 @@
                 </a:solidFill>
                 <a:latin typeface="Cambria"/>
               </a:rPr>
-              <a:t>Bridge and Split</a:t>
+              <a:t>The Frame — Why These Two Cards</a:t>
             </a:r>
           </a:p>
         </p:txBody>
@@ -8380,8 +8284,8 @@
         </p:nvSpPr>
         <p:spPr>
           <a:xfrm>
-            <a:off x="822960" y="1554480"/>
-            <a:ext cx="10515600" cy="4892040"/>
+            <a:off x="822960" y="1600200"/>
+            <a:ext cx="5669280" cy="4572000"/>
           </a:xfrm>
           <a:prstGeom prst="rect">
             <a:avLst/>
@@ -8394,11 +8298,11 @@
           <a:p>
             <a:pPr marL="274320" indent="-274320">
               <a:spcAft>
-                <a:spcPts val="900"/>
+                <a:spcPts val="650"/>
               </a:spcAft>
             </a:pPr>
             <a:r>
-              <a:rPr sz="2800" b="1" i="0">
+              <a:rPr sz="1800" b="1" i="0">
                 <a:solidFill>
                   <a:srgbClr val="97BC62"/>
                 </a:solidFill>
@@ -8407,63 +8311,209 @@
               <a:t>•  </a:t>
             </a:r>
             <a:r>
-              <a:rPr sz="2800" b="0" i="0">
+              <a:rPr sz="1800" b="0" i="0">
                 <a:solidFill>
                   <a:srgbClr val="222B22"/>
                 </a:solidFill>
                 <a:latin typeface="Calibri"/>
               </a:rPr>
-              <a:t>Each pair named — its families, its adult, its first-round Companion-in-Formation</a:t>
+              <a:t>Sooner or later, everyone who walks with God hits a dry season — and the dangerous thing is not the dryness, it is the wrong diagnosis</a:t>
             </a:r>
           </a:p>
           <a:p>
             <a:pPr marL="274320" indent="-274320">
+              <a:spcAft>
+                <a:spcPts val="650"/>
+              </a:spcAft>
+            </a:pPr>
+            <a:r>
+              <a:rPr sz="1800" b="1" i="0">
+                <a:solidFill>
+                  <a:srgbClr val="97BC62"/>
+                </a:solidFill>
+                <a:latin typeface="Calibri"/>
+              </a:rPr>
+              <a:t>•  </a:t>
+            </a:r>
+            <a:r>
+              <a:rPr sz="1800" b="0" i="0">
+                <a:solidFill>
+                  <a:srgbClr val="222B22"/>
+                </a:solidFill>
+                <a:latin typeface="Calibri"/>
+              </a:rPr>
+              <a:t>The Signs Card — so a misread dry season never ends a journey in this room</a:t>
+            </a:r>
+          </a:p>
+          <a:p>
+            <a:pPr marL="274320" indent="-274320">
+              <a:spcAft>
+                <a:spcPts val="650"/>
+              </a:spcAft>
+            </a:pPr>
+            <a:r>
+              <a:rPr sz="1800" b="1" i="0">
+                <a:solidFill>
+                  <a:srgbClr val="97BC62"/>
+                </a:solidFill>
+                <a:latin typeface="Calibri"/>
+              </a:rPr>
+              <a:t>•  </a:t>
+            </a:r>
+            <a:r>
+              <a:rPr sz="1800" b="0" i="0">
+                <a:solidFill>
+                  <a:srgbClr val="222B22"/>
+                </a:solidFill>
+                <a:latin typeface="Calibri"/>
+              </a:rPr>
+              <a:t>The Path Home Card — the written door back, and it ends the way Luke 15 ends: the father runs</a:t>
+            </a:r>
+          </a:p>
+          <a:p>
+            <a:pPr marL="274320" indent="-274320">
+              <a:spcAft>
+                <a:spcPts val="650"/>
+              </a:spcAft>
+            </a:pPr>
+            <a:r>
+              <a:rPr sz="1800" b="1" i="0">
+                <a:solidFill>
+                  <a:srgbClr val="97BC62"/>
+                </a:solidFill>
+                <a:latin typeface="Calibri"/>
+              </a:rPr>
+              <a:t>•  </a:t>
+            </a:r>
+            <a:r>
+              <a:rPr sz="1800" b="0" i="0">
+                <a:solidFill>
+                  <a:srgbClr val="222B22"/>
+                </a:solidFill>
+                <a:latin typeface="Calibri"/>
+              </a:rPr>
+              <a:t>Tonight is a rehearsal — the small room before the large one. Your pair is their first congregation.</a:t>
+            </a:r>
+          </a:p>
+          <a:p>
+            <a:pPr marL="274320" indent="-274320">
+              <a:spcAft>
+                <a:spcPts val="650"/>
+              </a:spcAft>
+            </a:pPr>
+            <a:r>
+              <a:rPr sz="1800" b="1" i="0">
+                <a:solidFill>
+                  <a:srgbClr val="97BC62"/>
+                </a:solidFill>
+                <a:latin typeface="Calibri"/>
+              </a:rPr>
+              <a:t>•  </a:t>
+            </a:r>
+            <a:r>
+              <a:rPr sz="1800" b="0" i="0">
+                <a:solidFill>
+                  <a:srgbClr val="222B22"/>
+                </a:solidFill>
+                <a:latin typeface="Calibri"/>
+              </a:rPr>
+              <a:t>At the end, your pair gives its teacher two gifts: one thing to keep, and one thing to adjust</a:t>
+            </a:r>
+          </a:p>
+          <a:p>
+            <a:pPr marL="274320" indent="-274320">
+              <a:spcAft>
+                <a:spcPts val="650"/>
+              </a:spcAft>
+            </a:pPr>
+            <a:r>
+              <a:rPr sz="1800" b="1" i="0">
+                <a:solidFill>
+                  <a:srgbClr val="97BC62"/>
+                </a:solidFill>
+                <a:latin typeface="Calibri"/>
+              </a:rPr>
+              <a:t>•  </a:t>
+            </a:r>
+            <a:r>
+              <a:rPr sz="1800" b="0" i="0">
+                <a:solidFill>
+                  <a:srgbClr val="222B22"/>
+                </a:solidFill>
+                <a:latin typeface="Calibri"/>
+              </a:rPr>
+              <a:t>Tonight is about the cards, not anyone’s current season — nobody will be asked where they are</a:t>
+            </a:r>
+          </a:p>
+        </p:txBody>
+      </p:sp>
+      <p:sp>
+        <p:nvSpPr>
+          <p:cNvPr id="6" name="TextBox 6"/>
+          <p:cNvSpPr txBox="1"/>
+          <p:nvPr/>
+        </p:nvSpPr>
+        <p:spPr>
+          <a:xfrm>
+            <a:off x="6766560" y="1737360"/>
+            <a:ext cx="4663440" cy="3310128"/>
+          </a:xfrm>
+          <a:prstGeom prst="rect">
+            <a:avLst/>
+          </a:prstGeom>
+          <a:solidFill>
+            <a:srgbClr val="F1F6EC"/>
+          </a:solidFill>
+        </p:spPr>
+        <p:txBody>
+          <a:bodyPr wrap="square" lIns="91440" tIns="91440" rIns="91440" bIns="91440" anchor="ctr"/>
+          <a:lstStyle/>
+          <a:p>
+            <a:pPr>
               <a:spcAft>
                 <a:spcPts val="900"/>
               </a:spcAft>
             </a:pPr>
             <a:r>
-              <a:rPr sz="2800" b="1" i="0">
+              <a:rPr sz="1200" b="1" i="0">
                 <a:solidFill>
                   <a:srgbClr val="97BC62"/>
                 </a:solidFill>
                 <a:latin typeface="Calibri"/>
               </a:rPr>
-              <a:t>•  </a:t>
-            </a:r>
-            <a:r>
-              <a:rPr sz="2800" b="0" i="0">
-                <a:solidFill>
-                  <a:srgbClr val="222B22"/>
-                </a:solidFill>
-                <a:latin typeface="Calibri"/>
-              </a:rPr>
-              <a:t>Pray — for the teachers by name, and for any dry ground in the room, unnamed</a:t>
-            </a:r>
-          </a:p>
-          <a:p>
-            <a:pPr marL="274320" indent="-274320">
+              <a:t>2 TIMOTHY 2:2</a:t>
+            </a:r>
+          </a:p>
+          <a:p>
+            <a:pPr>
               <a:spcAft>
-                <a:spcPts val="900"/>
+                <a:spcPts val="600"/>
               </a:spcAft>
             </a:pPr>
             <a:r>
-              <a:rPr sz="2800" b="1" i="0">
-                <a:solidFill>
-                  <a:srgbClr val="97BC62"/>
-                </a:solidFill>
-                <a:latin typeface="Calibri"/>
-              </a:rPr>
-              <a:t>•  </a:t>
-            </a:r>
-            <a:r>
-              <a:rPr sz="2800" b="0" i="0">
+              <a:rPr sz="2000" b="0" i="1">
                 <a:solidFill>
                   <a:srgbClr val="222B22"/>
                 </a:solidFill>
-                <a:latin typeface="Calibri"/>
-              </a:rPr>
-              <a:t>Then split — receive your teacher, and work the cards with them</a:t>
+                <a:latin typeface="Cambria"/>
+              </a:rPr>
+              <a:t>“and what you have heard from me in the presence of many witnesses entrust to faithful men, who will be able to teach others also.”</a:t>
+            </a:r>
+          </a:p>
+          <a:p>
+            <a:pPr>
+              <a:spcAft>
+                <a:spcPts val="600"/>
+              </a:spcAft>
+            </a:pPr>
+            <a:r>
+              <a:rPr sz="2000" b="0" i="1">
+                <a:solidFill>
+                  <a:srgbClr val="222B22"/>
+                </a:solidFill>
+                <a:latin typeface="Cambria"/>
+              </a:rPr>
+              <a:t>Four generations in one sentence — Paul, Timothy, the faithful, and the others also. Tonight you are watching the third handoff happen.</a:t>
             </a:r>
           </a:p>
         </p:txBody>
@@ -8490,7 +8540,7 @@
           <a:p>
             <a:pPr algn="r"/>
             <a:r>
-              <a:t>235</a:t>
+              <a:t>234</a:t>
             </a:r>
             <a:endParaRPr sz="1000" b="1">
               <a:solidFill>
@@ -8589,7 +8639,7 @@
                 </a:solidFill>
                 <a:latin typeface="Cambria"/>
               </a:rPr>
-              <a:t>First Teaching Rep — Both Cards</a:t>
+              <a:t>Bridge and Split</a:t>
             </a:r>
           </a:p>
         </p:txBody>
@@ -8602,8 +8652,8 @@
         </p:nvSpPr>
         <p:spPr>
           <a:xfrm>
-            <a:off x="822960" y="1600200"/>
-            <a:ext cx="5669280" cy="4572000"/>
+            <a:off x="822960" y="1554480"/>
+            <a:ext cx="10515600" cy="4892040"/>
           </a:xfrm>
           <a:prstGeom prst="rect">
             <a:avLst/>
@@ -8614,208 +8664,78 @@
           <a:bodyPr wrap="square" lIns="91440" tIns="91440" rIns="91440" bIns="91440"/>
           <a:lstStyle/>
           <a:p>
-            <a:pPr marL="342900" indent="-342900">
-              <a:spcAft>
-                <a:spcPts val="650"/>
-              </a:spcAft>
-            </a:pPr>
-            <a:r>
-              <a:rPr sz="1800" b="1" i="0">
-                <a:solidFill>
-                  <a:srgbClr val="97BC62"/>
-                </a:solidFill>
-                <a:latin typeface="Calibri"/>
-              </a:rPr>
-              <a:t>1   </a:t>
-            </a:r>
-            <a:r>
-              <a:rPr sz="1800" b="0" i="0">
-                <a:solidFill>
-                  <a:srgbClr val="222B22"/>
-                </a:solidFill>
-                <a:latin typeface="Calibri"/>
-              </a:rPr>
-              <a:t>The Signs Card (~13 min) — the one question: “Which way does the desire point?” Then the four kinds of dry, from the card’s own table</a:t>
-            </a:r>
-          </a:p>
-          <a:p>
-            <a:pPr marL="685800" indent="-274320">
-              <a:spcAft>
-                <a:spcPts val="500"/>
-              </a:spcAft>
-            </a:pPr>
-            <a:r>
-              <a:rPr sz="1800" b="1" i="0">
-                <a:solidFill>
-                  <a:srgbClr val="97BC62"/>
-                </a:solidFill>
-                <a:latin typeface="Calibri"/>
-              </a:rPr>
-              <a:t>–  </a:t>
-            </a:r>
-            <a:r>
-              <a:rPr sz="1800" b="0" i="1">
-                <a:solidFill>
-                  <a:srgbClr val="222B22"/>
-                </a:solidFill>
-                <a:latin typeface="Calibri"/>
-              </a:rPr>
-              <a:t>Cases 3 and 4 — one says resist, the other says receive; opposite motions. When you cannot tell which you are in, do not decide alone.</a:t>
-            </a:r>
-          </a:p>
-          <a:p>
-            <a:pPr marL="342900" indent="-342900">
-              <a:spcAft>
-                <a:spcPts val="650"/>
-              </a:spcAft>
-            </a:pPr>
-            <a:r>
-              <a:rPr sz="1800" b="1" i="0">
-                <a:solidFill>
-                  <a:srgbClr val="97BC62"/>
-                </a:solidFill>
-                <a:latin typeface="Calibri"/>
-              </a:rPr>
-              <a:t>2   </a:t>
-            </a:r>
-            <a:r>
-              <a:rPr sz="1800" b="0" i="0">
-                <a:solidFill>
-                  <a:srgbClr val="222B22"/>
-                </a:solidFill>
-                <a:latin typeface="Calibri"/>
-              </a:rPr>
-              <a:t>The Path Home Card (~10 min) — the five steps, and the reception: it ends with a feast, not a hearing</a:t>
-            </a:r>
-          </a:p>
-          <a:p>
-            <a:pPr marL="685800" indent="-274320">
-              <a:spcAft>
-                <a:spcPts val="500"/>
-              </a:spcAft>
-            </a:pPr>
-            <a:r>
-              <a:rPr sz="1800" b="1" i="0">
-                <a:solidFill>
-                  <a:srgbClr val="97BC62"/>
-                </a:solidFill>
-                <a:latin typeface="Calibri"/>
-              </a:rPr>
-              <a:t>–  </a:t>
-            </a:r>
-            <a:r>
-              <a:rPr sz="1800" b="0" i="1">
-                <a:solidFill>
-                  <a:srgbClr val="222B22"/>
-                </a:solidFill>
-                <a:latin typeface="Calibri"/>
-              </a:rPr>
-              <a:t>“The door is not locked. The light is on.”</a:t>
-            </a:r>
-          </a:p>
-          <a:p>
-            <a:pPr marL="342900" indent="-342900">
-              <a:spcAft>
-                <a:spcPts val="650"/>
-              </a:spcAft>
-            </a:pPr>
-            <a:r>
-              <a:rPr sz="1800" b="1" i="0">
-                <a:solidFill>
-                  <a:srgbClr val="97BC62"/>
-                </a:solidFill>
-                <a:latin typeface="Calibri"/>
-              </a:rPr>
-              <a:t>3   </a:t>
-            </a:r>
-            <a:r>
-              <a:rPr sz="1800" b="0" i="0">
-                <a:solidFill>
-                  <a:srgbClr val="222B22"/>
-                </a:solidFill>
-                <a:latin typeface="Calibri"/>
-              </a:rPr>
-              <a:t>Close (~2 min) — both cards go home tonight; this week your family gives them a findable spot</a:t>
-            </a:r>
-          </a:p>
-          <a:p>
             <a:pPr marL="274320" indent="-274320">
-              <a:spcAft>
-                <a:spcPts val="650"/>
-              </a:spcAft>
-            </a:pPr>
-            <a:r>
-              <a:rPr sz="1800" b="1" i="0">
-                <a:solidFill>
-                  <a:srgbClr val="97BC62"/>
-                </a:solidFill>
-                <a:latin typeface="Calibri"/>
-              </a:rPr>
-              <a:t>•  </a:t>
-            </a:r>
-            <a:r>
-              <a:rPr sz="1800" b="0" i="0">
-                <a:solidFill>
-                  <a:srgbClr val="222B22"/>
-                </a:solidFill>
-                <a:latin typeface="Calibri"/>
-              </a:rPr>
-              <a:t>Questions of information are welcome — the teacher answers them. The adults hold every door that opens.</a:t>
-            </a:r>
-          </a:p>
-        </p:txBody>
-      </p:sp>
-      <p:sp>
-        <p:nvSpPr>
-          <p:cNvPr id="6" name="TextBox 6"/>
-          <p:cNvSpPr txBox="1"/>
-          <p:nvPr/>
-        </p:nvSpPr>
-        <p:spPr>
-          <a:xfrm>
-            <a:off x="6766560" y="1737360"/>
-            <a:ext cx="4663440" cy="2194560"/>
-          </a:xfrm>
-          <a:prstGeom prst="rect">
-            <a:avLst/>
-          </a:prstGeom>
-          <a:solidFill>
-            <a:srgbClr val="F1F6EC"/>
-          </a:solidFill>
-        </p:spPr>
-        <p:txBody>
-          <a:bodyPr wrap="square" lIns="91440" tIns="91440" rIns="91440" bIns="91440" anchor="ctr"/>
-          <a:lstStyle/>
-          <a:p>
-            <a:pPr>
               <a:spcAft>
                 <a:spcPts val="900"/>
               </a:spcAft>
             </a:pPr>
             <a:r>
-              <a:rPr sz="1200" b="1" i="0">
+              <a:rPr sz="2800" b="1" i="0">
                 <a:solidFill>
                   <a:srgbClr val="97BC62"/>
                 </a:solidFill>
                 <a:latin typeface="Calibri"/>
               </a:rPr>
-              <a:t>LUKE 15:20</a:t>
-            </a:r>
-          </a:p>
-          <a:p>
-            <a:pPr>
+              <a:t>•  </a:t>
+            </a:r>
+            <a:r>
+              <a:rPr sz="2800" b="0" i="0">
+                <a:solidFill>
+                  <a:srgbClr val="222B22"/>
+                </a:solidFill>
+                <a:latin typeface="Calibri"/>
+              </a:rPr>
+              <a:t>Each pair named — its families, its adult, its first-round Companion-in-Formation</a:t>
+            </a:r>
+          </a:p>
+          <a:p>
+            <a:pPr marL="274320" indent="-274320">
               <a:spcAft>
-                <a:spcPts val="600"/>
+                <a:spcPts val="900"/>
               </a:spcAft>
             </a:pPr>
             <a:r>
-              <a:rPr sz="2400" b="0" i="1">
+              <a:rPr sz="2800" b="1" i="0">
+                <a:solidFill>
+                  <a:srgbClr val="97BC62"/>
+                </a:solidFill>
+                <a:latin typeface="Calibri"/>
+              </a:rPr>
+              <a:t>•  </a:t>
+            </a:r>
+            <a:r>
+              <a:rPr sz="2800" b="0" i="0">
                 <a:solidFill>
                   <a:srgbClr val="222B22"/>
                 </a:solidFill>
-                <a:latin typeface="Cambria"/>
-              </a:rPr>
-              <a:t>“while he was still a long way off, his father saw him and felt compassion, and ran”</a:t>
+                <a:latin typeface="Calibri"/>
+              </a:rPr>
+              <a:t>Pray — for the teachers by name, and for any dry ground in the room, unnamed</a:t>
+            </a:r>
+          </a:p>
+          <a:p>
+            <a:pPr marL="274320" indent="-274320">
+              <a:spcAft>
+                <a:spcPts val="900"/>
+              </a:spcAft>
+            </a:pPr>
+            <a:r>
+              <a:rPr sz="2800" b="1" i="0">
+                <a:solidFill>
+                  <a:srgbClr val="97BC62"/>
+                </a:solidFill>
+                <a:latin typeface="Calibri"/>
+              </a:rPr>
+              <a:t>•  </a:t>
+            </a:r>
+            <a:r>
+              <a:rPr sz="2800" b="0" i="0">
+                <a:solidFill>
+                  <a:srgbClr val="222B22"/>
+                </a:solidFill>
+                <a:latin typeface="Calibri"/>
+              </a:rPr>
+              <a:t>Then split — receive your teacher, and work the cards with them</a:t>
             </a:r>
           </a:p>
         </p:txBody>
@@ -8842,7 +8762,7 @@
           <a:p>
             <a:pPr algn="r"/>
             <a:r>
-              <a:t>236</a:t>
+              <a:t>235</a:t>
             </a:r>
             <a:endParaRPr sz="1000" b="1">
               <a:solidFill>
@@ -8941,7 +8861,7 @@
                 </a:solidFill>
                 <a:latin typeface="Cambria"/>
               </a:rPr>
-              <a:t>pair Feedback — One Keep, One Adjust</a:t>
+              <a:t>First Teaching Rep — Both Cards</a:t>
             </a:r>
           </a:p>
         </p:txBody>
@@ -8954,8 +8874,8 @@
         </p:nvSpPr>
         <p:spPr>
           <a:xfrm>
-            <a:off x="822960" y="1554480"/>
-            <a:ext cx="10515600" cy="4892040"/>
+            <a:off x="822960" y="1600200"/>
+            <a:ext cx="5669280" cy="4572000"/>
           </a:xfrm>
           <a:prstGeom prst="rect">
             <a:avLst/>
@@ -8966,128 +8886,208 @@
           <a:bodyPr wrap="square" lIns="91440" tIns="91440" rIns="91440" bIns="91440"/>
           <a:lstStyle/>
           <a:p>
+            <a:pPr marL="342900" indent="-342900">
+              <a:spcAft>
+                <a:spcPts val="650"/>
+              </a:spcAft>
+            </a:pPr>
+            <a:r>
+              <a:rPr sz="1800" b="1" i="0">
+                <a:solidFill>
+                  <a:srgbClr val="97BC62"/>
+                </a:solidFill>
+                <a:latin typeface="Calibri"/>
+              </a:rPr>
+              <a:t>1   </a:t>
+            </a:r>
+            <a:r>
+              <a:rPr sz="1800" b="0" i="0">
+                <a:solidFill>
+                  <a:srgbClr val="222B22"/>
+                </a:solidFill>
+                <a:latin typeface="Calibri"/>
+              </a:rPr>
+              <a:t>The Signs Card (~13 min) — the one question: “Which way does the desire point?” Then the four kinds of dry, from the card’s own table</a:t>
+            </a:r>
+          </a:p>
+          <a:p>
+            <a:pPr marL="685800" indent="-274320">
+              <a:spcAft>
+                <a:spcPts val="500"/>
+              </a:spcAft>
+            </a:pPr>
+            <a:r>
+              <a:rPr sz="1800" b="1" i="0">
+                <a:solidFill>
+                  <a:srgbClr val="97BC62"/>
+                </a:solidFill>
+                <a:latin typeface="Calibri"/>
+              </a:rPr>
+              <a:t>–  </a:t>
+            </a:r>
+            <a:r>
+              <a:rPr sz="1800" b="0" i="1">
+                <a:solidFill>
+                  <a:srgbClr val="222B22"/>
+                </a:solidFill>
+                <a:latin typeface="Calibri"/>
+              </a:rPr>
+              <a:t>Cases 3 and 4 — one says resist, the other says receive; opposite motions. When you cannot tell which you are in, do not decide alone.</a:t>
+            </a:r>
+          </a:p>
+          <a:p>
+            <a:pPr marL="342900" indent="-342900">
+              <a:spcAft>
+                <a:spcPts val="650"/>
+              </a:spcAft>
+            </a:pPr>
+            <a:r>
+              <a:rPr sz="1800" b="1" i="0">
+                <a:solidFill>
+                  <a:srgbClr val="97BC62"/>
+                </a:solidFill>
+                <a:latin typeface="Calibri"/>
+              </a:rPr>
+              <a:t>2   </a:t>
+            </a:r>
+            <a:r>
+              <a:rPr sz="1800" b="0" i="0">
+                <a:solidFill>
+                  <a:srgbClr val="222B22"/>
+                </a:solidFill>
+                <a:latin typeface="Calibri"/>
+              </a:rPr>
+              <a:t>The Path Home Card (~10 min) — the five steps, and the reception: it ends with a feast, not a hearing</a:t>
+            </a:r>
+          </a:p>
+          <a:p>
+            <a:pPr marL="685800" indent="-274320">
+              <a:spcAft>
+                <a:spcPts val="500"/>
+              </a:spcAft>
+            </a:pPr>
+            <a:r>
+              <a:rPr sz="1800" b="1" i="0">
+                <a:solidFill>
+                  <a:srgbClr val="97BC62"/>
+                </a:solidFill>
+                <a:latin typeface="Calibri"/>
+              </a:rPr>
+              <a:t>–  </a:t>
+            </a:r>
+            <a:r>
+              <a:rPr sz="1800" b="0" i="1">
+                <a:solidFill>
+                  <a:srgbClr val="222B22"/>
+                </a:solidFill>
+                <a:latin typeface="Calibri"/>
+              </a:rPr>
+              <a:t>“The door is not locked. The light is on.”</a:t>
+            </a:r>
+          </a:p>
+          <a:p>
+            <a:pPr marL="342900" indent="-342900">
+              <a:spcAft>
+                <a:spcPts val="650"/>
+              </a:spcAft>
+            </a:pPr>
+            <a:r>
+              <a:rPr sz="1800" b="1" i="0">
+                <a:solidFill>
+                  <a:srgbClr val="97BC62"/>
+                </a:solidFill>
+                <a:latin typeface="Calibri"/>
+              </a:rPr>
+              <a:t>3   </a:t>
+            </a:r>
+            <a:r>
+              <a:rPr sz="1800" b="0" i="0">
+                <a:solidFill>
+                  <a:srgbClr val="222B22"/>
+                </a:solidFill>
+                <a:latin typeface="Calibri"/>
+              </a:rPr>
+              <a:t>Close (~2 min) — both cards go home tonight; this week your family gives them a findable spot</a:t>
+            </a:r>
+          </a:p>
+          <a:p>
             <a:pPr marL="274320" indent="-274320">
+              <a:spcAft>
+                <a:spcPts val="650"/>
+              </a:spcAft>
+            </a:pPr>
+            <a:r>
+              <a:rPr sz="1800" b="1" i="0">
+                <a:solidFill>
+                  <a:srgbClr val="97BC62"/>
+                </a:solidFill>
+                <a:latin typeface="Calibri"/>
+              </a:rPr>
+              <a:t>•  </a:t>
+            </a:r>
+            <a:r>
+              <a:rPr sz="1800" b="0" i="0">
+                <a:solidFill>
+                  <a:srgbClr val="222B22"/>
+                </a:solidFill>
+                <a:latin typeface="Calibri"/>
+              </a:rPr>
+              <a:t>Questions of information are welcome — the teacher answers them. The adults hold every door that opens.</a:t>
+            </a:r>
+          </a:p>
+        </p:txBody>
+      </p:sp>
+      <p:sp>
+        <p:nvSpPr>
+          <p:cNvPr id="6" name="TextBox 6"/>
+          <p:cNvSpPr txBox="1"/>
+          <p:nvPr/>
+        </p:nvSpPr>
+        <p:spPr>
+          <a:xfrm>
+            <a:off x="6766560" y="1737360"/>
+            <a:ext cx="4663440" cy="2194560"/>
+          </a:xfrm>
+          <a:prstGeom prst="rect">
+            <a:avLst/>
+          </a:prstGeom>
+          <a:solidFill>
+            <a:srgbClr val="F1F6EC"/>
+          </a:solidFill>
+        </p:spPr>
+        <p:txBody>
+          <a:bodyPr wrap="square" lIns="91440" tIns="91440" rIns="91440" bIns="91440" anchor="ctr"/>
+          <a:lstStyle/>
+          <a:p>
+            <a:pPr>
               <a:spcAft>
                 <a:spcPts val="900"/>
               </a:spcAft>
             </a:pPr>
             <a:r>
-              <a:rPr sz="2800" b="1" i="0">
+              <a:rPr sz="1200" b="1" i="0">
                 <a:solidFill>
                   <a:srgbClr val="97BC62"/>
                 </a:solidFill>
                 <a:latin typeface="Calibri"/>
               </a:rPr>
-              <a:t>•  </a:t>
-            </a:r>
-            <a:r>
-              <a:rPr sz="2800" b="0" i="0">
-                <a:solidFill>
-                  <a:srgbClr val="222B22"/>
-                </a:solidFill>
-                <a:latin typeface="Calibri"/>
-              </a:rPr>
-              <a:t>The adult models first — one specific keep, one specific adjust</a:t>
-            </a:r>
-          </a:p>
-          <a:p>
-            <a:pPr marL="685800" indent="-274320">
+              <a:t>LUKE 15:20</a:t>
+            </a:r>
+          </a:p>
+          <a:p>
+            <a:pPr>
               <a:spcAft>
-                <a:spcPts val="700"/>
+                <a:spcPts val="600"/>
               </a:spcAft>
             </a:pPr>
             <a:r>
-              <a:rPr sz="2000" b="1" i="0">
-                <a:solidFill>
-                  <a:srgbClr val="97BC62"/>
-                </a:solidFill>
-                <a:latin typeface="Calibri"/>
-              </a:rPr>
-              <a:t>–  </a:t>
-            </a:r>
-            <a:r>
-              <a:rPr sz="2000" b="0" i="1">
+              <a:rPr sz="2400" b="0" i="1">
                 <a:solidFill>
                   <a:srgbClr val="222B22"/>
                 </a:solidFill>
-                <a:latin typeface="Calibri"/>
-              </a:rPr>
-              <a:t>Specific means quotable: “keep the way you paused after the desire question” — not “you did great”</a:t>
-            </a:r>
-          </a:p>
-          <a:p>
-            <a:pPr marL="274320" indent="-274320">
-              <a:spcAft>
-                <a:spcPts val="900"/>
-              </a:spcAft>
-            </a:pPr>
-            <a:r>
-              <a:rPr sz="2800" b="1" i="0">
-                <a:solidFill>
-                  <a:srgbClr val="97BC62"/>
-                </a:solidFill>
-                <a:latin typeface="Calibri"/>
-              </a:rPr>
-              <a:t>•  </a:t>
-            </a:r>
-            <a:r>
-              <a:rPr sz="2800" b="0" i="0">
-                <a:solidFill>
-                  <a:srgbClr val="222B22"/>
-                </a:solidFill>
-                <a:latin typeface="Calibri"/>
-              </a:rPr>
-              <a:t>Then a parent adds one; one or two more voices if brief — teens welcome</a:t>
-            </a:r>
-          </a:p>
-          <a:p>
-            <a:pPr marL="274320" indent="-274320">
-              <a:spcAft>
-                <a:spcPts val="900"/>
-              </a:spcAft>
-            </a:pPr>
-            <a:r>
-              <a:rPr sz="2800" b="1" i="0">
-                <a:solidFill>
-                  <a:srgbClr val="97BC62"/>
-                </a:solidFill>
-                <a:latin typeface="Calibri"/>
-              </a:rPr>
-              <a:t>•  </a:t>
-            </a:r>
-            <a:r>
-              <a:rPr sz="2800" b="0" i="0">
-                <a:solidFill>
-                  <a:srgbClr val="222B22"/>
-                </a:solidFill>
-                <a:latin typeface="Calibri"/>
-              </a:rPr>
-              <a:t>The teacher receives without defending — “thank you” is the whole response</a:t>
-            </a:r>
-          </a:p>
-          <a:p>
-            <a:pPr marL="274320" indent="-274320">
-              <a:spcAft>
-                <a:spcPts val="900"/>
-              </a:spcAft>
-            </a:pPr>
-            <a:r>
-              <a:rPr sz="2800" b="1" i="0">
-                <a:solidFill>
-                  <a:srgbClr val="97BC62"/>
-                </a:solidFill>
-                <a:latin typeface="Calibri"/>
-              </a:rPr>
-              <a:t>•  </a:t>
-            </a:r>
-            <a:r>
-              <a:rPr sz="2800" b="0" i="0">
-                <a:solidFill>
-                  <a:srgbClr val="222B22"/>
-                </a:solidFill>
-                <a:latin typeface="Calibri"/>
-              </a:rPr>
-              <a:t>Both gifts go on the note sheet — this block is the reason the evening exists</a:t>
+                <a:latin typeface="Cambria"/>
+              </a:rPr>
+              <a:t>“while he was still a long way off, his father saw him and felt compassion, and ran”</a:t>
             </a:r>
           </a:p>
         </p:txBody>
@@ -9114,7 +9114,7 @@
           <a:p>
             <a:pPr algn="r"/>
             <a:r>
-              <a:t>237</a:t>
+              <a:t>236</a:t>
             </a:r>
             <a:endParaRPr sz="1000" b="1">
               <a:solidFill>
@@ -9213,7 +9213,7 @@
                 </a:solidFill>
                 <a:latin typeface="Cambria"/>
               </a:rPr>
-              <a:t>Second Teaching Rep — Both Cards, Tightened</a:t>
+              <a:t>pair Feedback — One Keep, One Adjust</a:t>
             </a:r>
           </a:p>
         </p:txBody>
@@ -9259,7 +9259,32 @@
                 </a:solidFill>
                 <a:latin typeface="Calibri"/>
               </a:rPr>
-              <a:t>“Teachers, travel.” Each teacher moves one pair over, adjust in hand — the new pair is a clean room</a:t>
+              <a:t>The adult models first — one specific keep, one specific adjust</a:t>
+            </a:r>
+          </a:p>
+          <a:p>
+            <a:pPr marL="685800" indent="-274320">
+              <a:spcAft>
+                <a:spcPts val="700"/>
+              </a:spcAft>
+            </a:pPr>
+            <a:r>
+              <a:rPr sz="2000" b="1" i="0">
+                <a:solidFill>
+                  <a:srgbClr val="97BC62"/>
+                </a:solidFill>
+                <a:latin typeface="Calibri"/>
+              </a:rPr>
+              <a:t>–  </a:t>
+            </a:r>
+            <a:r>
+              <a:rPr sz="2000" b="0" i="1">
+                <a:solidFill>
+                  <a:srgbClr val="222B22"/>
+                </a:solidFill>
+                <a:latin typeface="Calibri"/>
+              </a:rPr>
+              <a:t>Specific means quotable: “keep the way you paused after the desire question” — not “you did great”</a:t>
             </a:r>
           </a:p>
           <a:p>
@@ -9284,7 +9309,7 @@
                 </a:solidFill>
                 <a:latin typeface="Calibri"/>
               </a:rPr>
-              <a:t>The same arc, compressed — Signs ~11 min, Path Home ~8, close ~1</a:t>
+              <a:t>Then a parent adds one; one or two more voices if brief — teens welcome</a:t>
             </a:r>
           </a:p>
           <a:p>
@@ -9309,32 +9334,7 @@
                 </a:solidFill>
                 <a:latin typeface="Calibri"/>
               </a:rPr>
-              <a:t>The compression is the second rep’s own skill — same spine, fewer words, the load-bearing minutes untouched</a:t>
-            </a:r>
-          </a:p>
-          <a:p>
-            <a:pPr marL="685800" indent="-274320">
-              <a:spcAft>
-                <a:spcPts val="700"/>
-              </a:spcAft>
-            </a:pPr>
-            <a:r>
-              <a:rPr sz="2000" b="1" i="0">
-                <a:solidFill>
-                  <a:srgbClr val="97BC62"/>
-                </a:solidFill>
-                <a:latin typeface="Calibri"/>
-              </a:rPr>
-              <a:t>–  </a:t>
-            </a:r>
-            <a:r>
-              <a:rPr sz="2000" b="0" i="1">
-                <a:solidFill>
-                  <a:srgbClr val="222B22"/>
-                </a:solidFill>
-                <a:latin typeface="Calibri"/>
-              </a:rPr>
-              <a:t>The desire question — resist versus receive — the father runs</a:t>
+              <a:t>The teacher receives without defending — “thank you” is the whole response</a:t>
             </a:r>
           </a:p>
           <a:p>
@@ -9359,7 +9359,7 @@
                 </a:solidFill>
                 <a:latin typeface="Calibri"/>
               </a:rPr>
-              <a:t>The adjust from Round 1 gets tried here, while it is warm</a:t>
+              <a:t>Both gifts go on the note sheet — this block is the reason the evening exists</a:t>
             </a:r>
           </a:p>
         </p:txBody>
@@ -9386,7 +9386,7 @@
           <a:p>
             <a:pPr algn="r"/>
             <a:r>
-              <a:t>238</a:t>
+              <a:t>237</a:t>
             </a:r>
             <a:endParaRPr sz="1000" b="1">
               <a:solidFill>

--- a/_implementation-notes/evening-series/FotH Evening Session 19 Slides DRAFT v1.pptx
+++ b/_implementation-notes/evening-series/FotH Evening Session 19 Slides DRAFT v1.pptx
@@ -7345,7 +7345,7 @@
           <p:nvPr/>
         </p:nvPicPr>
         <p:blipFill>
-          <a:blip r:embed="rId4"/>
+          <a:blip r:embed="rId5"/>
           <a:stretch>
             <a:fillRect/>
           </a:stretch>

--- a/_implementation-notes/evening-series/FotH Evening Session 19 Slides DRAFT v1.pptx
+++ b/_implementation-notes/evening-series/FotH Evening Session 19 Slides DRAFT v1.pptx
@@ -5300,7 +5300,7 @@
           <a:p>
             <a:pPr algn="r"/>
             <a:r>
-              <a:t>238</a:t>
+              <a:t>275</a:t>
             </a:r>
             <a:endParaRPr sz="1000" b="1">
               <a:solidFill>
@@ -5522,7 +5522,7 @@
           <a:p>
             <a:pPr algn="r"/>
             <a:r>
-              <a:t>239</a:t>
+              <a:t>276</a:t>
             </a:r>
             <a:endParaRPr sz="1000" b="1">
               <a:solidFill>
@@ -5769,7 +5769,7 @@
           <a:p>
             <a:pPr algn="r"/>
             <a:r>
-              <a:t>240</a:t>
+              <a:t>277</a:t>
             </a:r>
             <a:endParaRPr sz="1000" b="1">
               <a:solidFill>
@@ -5961,7 +5961,7 @@
           <a:p>
             <a:pPr algn="r"/>
             <a:r>
-              <a:t>241</a:t>
+              <a:t>278</a:t>
             </a:r>
             <a:endParaRPr sz="1000" b="1">
               <a:solidFill>
@@ -6153,7 +6153,7 @@
           <a:p>
             <a:pPr algn="r"/>
             <a:r>
-              <a:t>241a</a:t>
+              <a:t>279</a:t>
             </a:r>
             <a:endParaRPr sz="1000" b="1">
               <a:solidFill>
@@ -6562,7 +6562,7 @@
           <a:p>
             <a:pPr algn="r"/>
             <a:r>
-              <a:t>242</a:t>
+              <a:t>280</a:t>
             </a:r>
             <a:endParaRPr sz="1000" b="1">
               <a:solidFill>
@@ -6859,7 +6859,7 @@
           <a:p>
             <a:pPr algn="r"/>
             <a:r>
-              <a:t>243</a:t>
+              <a:t>281</a:t>
             </a:r>
             <a:endParaRPr sz="1000" b="1">
               <a:solidFill>
@@ -7108,7 +7108,7 @@
           <a:p>
             <a:pPr algn="r"/>
             <a:r>
-              <a:t>231</a:t>
+              <a:t>267</a:t>
             </a:r>
             <a:endParaRPr sz="1000" b="1">
               <a:solidFill>
@@ -7325,7 +7325,7 @@
           <a:p>
             <a:pPr algn="r"/>
             <a:r>
-              <a:t>231a</a:t>
+              <a:t>268</a:t>
             </a:r>
             <a:endParaRPr sz="1000" b="1">
               <a:solidFill>
@@ -7789,7 +7789,7 @@
           <a:p>
             <a:pPr algn="r"/>
             <a:r>
-              <a:t>232</a:t>
+              <a:t>269</a:t>
             </a:r>
             <a:endParaRPr sz="1000" b="1">
               <a:solidFill>
@@ -8172,7 +8172,7 @@
           <a:p>
             <a:pPr algn="r"/>
             <a:r>
-              <a:t>233</a:t>
+              <a:t>270</a:t>
             </a:r>
             <a:endParaRPr sz="1000" b="1">
               <a:solidFill>
@@ -8540,7 +8540,7 @@
           <a:p>
             <a:pPr algn="r"/>
             <a:r>
-              <a:t>234</a:t>
+              <a:t>271</a:t>
             </a:r>
             <a:endParaRPr sz="1000" b="1">
               <a:solidFill>
@@ -8762,7 +8762,7 @@
           <a:p>
             <a:pPr algn="r"/>
             <a:r>
-              <a:t>235</a:t>
+              <a:t>272</a:t>
             </a:r>
             <a:endParaRPr sz="1000" b="1">
               <a:solidFill>
@@ -9114,7 +9114,7 @@
           <a:p>
             <a:pPr algn="r"/>
             <a:r>
-              <a:t>236</a:t>
+              <a:t>273</a:t>
             </a:r>
             <a:endParaRPr sz="1000" b="1">
               <a:solidFill>
@@ -9386,7 +9386,7 @@
           <a:p>
             <a:pPr algn="r"/>
             <a:r>
-              <a:t>237</a:t>
+              <a:t>274</a:t>
             </a:r>
             <a:endParaRPr sz="1000" b="1">
               <a:solidFill>

--- a/_implementation-notes/evening-series/FotH Evening Session 19 Slides DRAFT v1.pptx
+++ b/_implementation-notes/evening-series/FotH Evening Session 19 Slides DRAFT v1.pptx
@@ -7345,7 +7345,7 @@
           <p:nvPr/>
         </p:nvPicPr>
         <p:blipFill>
-          <a:blip r:embed="rId5"/>
+          <a:blip r:embed="rId6"/>
           <a:stretch>
             <a:fillRect/>
           </a:stretch>

--- a/_implementation-notes/evening-series/FotH Evening Session 19 Slides DRAFT v1.pptx
+++ b/_implementation-notes/evening-series/FotH Evening Session 19 Slides DRAFT v1.pptx
@@ -1663,7 +1663,7 @@
           <a:p>
             <a:r>
               <a:rPr lang="en-US" sz="1200"/>
-              <a:t>S19 · 8:19–8:20 · LEAD: CONTENT PRESENTER CIRCLE</a:t>
+              <a:t>S19 · 8:19–8:20 · LEAD: CONTAINER HOLDER CIRCLE</a:t>
             </a:r>
           </a:p>
           <a:p>

--- a/_implementation-notes/evening-series/FotH Evening Session 19 Slides DRAFT v1.pptx
+++ b/_implementation-notes/evening-series/FotH Evening Session 19 Slides DRAFT v1.pptx
@@ -1462,7 +1462,7 @@
           <a:p>
             <a:r>
               <a:rPr lang="en-US" sz="1200"/>
-              <a:t>4. Rotation at 4:56: 'Teachers, travel' — each CiF one pair clockwise, adjust in hand; the new pair does not hear the old feedback.</a:t>
+              <a:t>4. Rotation at 7:57: 'Teachers, travel' — each CiF one pair clockwise, adjust in hand; the new pair does not hear the old feedback.</a:t>
             </a:r>
           </a:p>
           <a:p>
@@ -1835,7 +1835,7 @@
           <a:p>
             <a:r>
               <a:rPr lang="en-US" sz="1200"/>
-              <a:t>4. Then a CiF sends the room (5:27): Aaronic blessing, hands up — cards to their spot this week; see you at The Long Walk.</a:t>
+              <a:t>4. Then a CiF sends the room (8:28): Aaronic blessing, hands up — cards to their spot this week; see you at The Long Walk.</a:t>
             </a:r>
           </a:p>
         </p:txBody>

--- a/_implementation-notes/evening-series/FotH Evening Session 19 Slides DRAFT v1.pptx
+++ b/_implementation-notes/evening-series/FotH Evening Session 19 Slides DRAFT v1.pptx
@@ -5300,7 +5300,7 @@
           <a:p>
             <a:pPr algn="r"/>
             <a:r>
-              <a:t>275</a:t>
+              <a:t>276</a:t>
             </a:r>
             <a:endParaRPr sz="1000" b="1">
               <a:solidFill>
@@ -5522,7 +5522,7 @@
           <a:p>
             <a:pPr algn="r"/>
             <a:r>
-              <a:t>276</a:t>
+              <a:t>277</a:t>
             </a:r>
             <a:endParaRPr sz="1000" b="1">
               <a:solidFill>
@@ -5769,7 +5769,7 @@
           <a:p>
             <a:pPr algn="r"/>
             <a:r>
-              <a:t>277</a:t>
+              <a:t>278</a:t>
             </a:r>
             <a:endParaRPr sz="1000" b="1">
               <a:solidFill>
@@ -5961,7 +5961,7 @@
           <a:p>
             <a:pPr algn="r"/>
             <a:r>
-              <a:t>278</a:t>
+              <a:t>279</a:t>
             </a:r>
             <a:endParaRPr sz="1000" b="1">
               <a:solidFill>
@@ -6153,7 +6153,7 @@
           <a:p>
             <a:pPr algn="r"/>
             <a:r>
-              <a:t>279</a:t>
+              <a:t>280</a:t>
             </a:r>
             <a:endParaRPr sz="1000" b="1">
               <a:solidFill>
@@ -6562,7 +6562,7 @@
           <a:p>
             <a:pPr algn="r"/>
             <a:r>
-              <a:t>280</a:t>
+              <a:t>281</a:t>
             </a:r>
             <a:endParaRPr sz="1000" b="1">
               <a:solidFill>
@@ -6859,7 +6859,7 @@
           <a:p>
             <a:pPr algn="r"/>
             <a:r>
-              <a:t>281</a:t>
+              <a:t>282</a:t>
             </a:r>
             <a:endParaRPr sz="1000" b="1">
               <a:solidFill>
@@ -7108,7 +7108,7 @@
           <a:p>
             <a:pPr algn="r"/>
             <a:r>
-              <a:t>267</a:t>
+              <a:t>268</a:t>
             </a:r>
             <a:endParaRPr sz="1000" b="1">
               <a:solidFill>
@@ -7325,7 +7325,7 @@
           <a:p>
             <a:pPr algn="r"/>
             <a:r>
-              <a:t>268</a:t>
+              <a:t>269</a:t>
             </a:r>
             <a:endParaRPr sz="1000" b="1">
               <a:solidFill>
@@ -7789,7 +7789,7 @@
           <a:p>
             <a:pPr algn="r"/>
             <a:r>
-              <a:t>269</a:t>
+              <a:t>270</a:t>
             </a:r>
             <a:endParaRPr sz="1000" b="1">
               <a:solidFill>
@@ -8172,7 +8172,7 @@
           <a:p>
             <a:pPr algn="r"/>
             <a:r>
-              <a:t>270</a:t>
+              <a:t>271</a:t>
             </a:r>
             <a:endParaRPr sz="1000" b="1">
               <a:solidFill>
@@ -8540,7 +8540,7 @@
           <a:p>
             <a:pPr algn="r"/>
             <a:r>
-              <a:t>271</a:t>
+              <a:t>272</a:t>
             </a:r>
             <a:endParaRPr sz="1000" b="1">
               <a:solidFill>
@@ -8762,7 +8762,7 @@
           <a:p>
             <a:pPr algn="r"/>
             <a:r>
-              <a:t>272</a:t>
+              <a:t>273</a:t>
             </a:r>
             <a:endParaRPr sz="1000" b="1">
               <a:solidFill>
@@ -9114,7 +9114,7 @@
           <a:p>
             <a:pPr algn="r"/>
             <a:r>
-              <a:t>273</a:t>
+              <a:t>274</a:t>
             </a:r>
             <a:endParaRPr sz="1000" b="1">
               <a:solidFill>
@@ -9386,7 +9386,7 @@
           <a:p>
             <a:pPr algn="r"/>
             <a:r>
-              <a:t>274</a:t>
+              <a:t>275</a:t>
             </a:r>
             <a:endParaRPr sz="1000" b="1">
               <a:solidFill>

--- a/_implementation-notes/evening-series/FotH Evening Session 19 Slides DRAFT v1.pptx
+++ b/_implementation-notes/evening-series/FotH Evening Session 19 Slides DRAFT v1.pptx
@@ -1733,32 +1733,32 @@
           <a:lstStyle/>
           <a:p>
             <a:r>
-              <a:rPr lang="en-US" sz="1200"/>
               <a:t>S19 · 8:28–8:30 · LEAD: CONTAINER HOLDER CIRCLE</a:t>
             </a:r>
           </a:p>
           <a:p>
             <a:r>
-              <a:rPr lang="en-US" sz="1200"/>
               <a:t>BEATS:</a:t>
             </a:r>
           </a:p>
           <a:p>
             <a:r>
-              <a:rPr lang="en-US" sz="1200"/>
               <a:t>1. A CiF runs the close, brief today: standing circle, one-word landing, the one thing, the one practice.</a:t>
             </a:r>
           </a:p>
           <a:p>
             <a:r>
-              <a:rPr lang="en-US" sz="1200"/>
               <a:t>2. The one practice is the findable spot — committed aloud by a voice from each family.</a:t>
             </a:r>
           </a:p>
           <a:p>
             <a:r>
-              <a:rPr lang="en-US" sz="1200"/>
               <a:t>3. Hold the Aaronic blessing — today it comes after the feedback round; a CiF speaks it at the very end.</a:t>
+            </a:r>
+          </a:p>
+          <a:p>
+            <a:r>
+              <a:t>BLESSINGS: eyes on the person, not the screen — nothing to read; say what is on your heart for them, specific and short.</a:t>
             </a:r>
           </a:p>
         </p:txBody>
@@ -6423,7 +6423,7 @@
                 </a:solidFill>
                 <a:latin typeface="Calibri"/>
               </a:rPr>
-              <a:t>Blessings — specific, witnessed, short</a:t>
+              <a:t>Blessings — eyes on the person, not the screen: say what is on your heart for them. Specific, witnessed, short</a:t>
             </a:r>
           </a:p>
           <a:p>

--- a/_implementation-notes/evening-series/FotH Evening Session 19 Slides DRAFT v1.pptx
+++ b/_implementation-notes/evening-series/FotH Evening Session 19 Slides DRAFT v1.pptx
@@ -5300,7 +5300,7 @@
           <a:p>
             <a:pPr algn="r"/>
             <a:r>
-              <a:t>276</a:t>
+              <a:t>277</a:t>
             </a:r>
             <a:endParaRPr sz="1000" b="1">
               <a:solidFill>
@@ -5522,7 +5522,7 @@
           <a:p>
             <a:pPr algn="r"/>
             <a:r>
-              <a:t>277</a:t>
+              <a:t>278</a:t>
             </a:r>
             <a:endParaRPr sz="1000" b="1">
               <a:solidFill>
@@ -5769,7 +5769,7 @@
           <a:p>
             <a:pPr algn="r"/>
             <a:r>
-              <a:t>278</a:t>
+              <a:t>279</a:t>
             </a:r>
             <a:endParaRPr sz="1000" b="1">
               <a:solidFill>
@@ -5961,7 +5961,7 @@
           <a:p>
             <a:pPr algn="r"/>
             <a:r>
-              <a:t>279</a:t>
+              <a:t>280</a:t>
             </a:r>
             <a:endParaRPr sz="1000" b="1">
               <a:solidFill>
@@ -6153,7 +6153,7 @@
           <a:p>
             <a:pPr algn="r"/>
             <a:r>
-              <a:t>280</a:t>
+              <a:t>281</a:t>
             </a:r>
             <a:endParaRPr sz="1000" b="1">
               <a:solidFill>
@@ -6562,7 +6562,7 @@
           <a:p>
             <a:pPr algn="r"/>
             <a:r>
-              <a:t>281</a:t>
+              <a:t>282</a:t>
             </a:r>
             <a:endParaRPr sz="1000" b="1">
               <a:solidFill>
@@ -6859,7 +6859,7 @@
           <a:p>
             <a:pPr algn="r"/>
             <a:r>
-              <a:t>282</a:t>
+              <a:t>283</a:t>
             </a:r>
             <a:endParaRPr sz="1000" b="1">
               <a:solidFill>
@@ -7108,7 +7108,7 @@
           <a:p>
             <a:pPr algn="r"/>
             <a:r>
-              <a:t>268</a:t>
+              <a:t>269</a:t>
             </a:r>
             <a:endParaRPr sz="1000" b="1">
               <a:solidFill>
@@ -7325,7 +7325,7 @@
           <a:p>
             <a:pPr algn="r"/>
             <a:r>
-              <a:t>269</a:t>
+              <a:t>270</a:t>
             </a:r>
             <a:endParaRPr sz="1000" b="1">
               <a:solidFill>
@@ -7789,7 +7789,7 @@
           <a:p>
             <a:pPr algn="r"/>
             <a:r>
-              <a:t>270</a:t>
+              <a:t>271</a:t>
             </a:r>
             <a:endParaRPr sz="1000" b="1">
               <a:solidFill>
@@ -8172,7 +8172,7 @@
           <a:p>
             <a:pPr algn="r"/>
             <a:r>
-              <a:t>271</a:t>
+              <a:t>272</a:t>
             </a:r>
             <a:endParaRPr sz="1000" b="1">
               <a:solidFill>
@@ -8540,7 +8540,7 @@
           <a:p>
             <a:pPr algn="r"/>
             <a:r>
-              <a:t>272</a:t>
+              <a:t>273</a:t>
             </a:r>
             <a:endParaRPr sz="1000" b="1">
               <a:solidFill>
@@ -8762,7 +8762,7 @@
           <a:p>
             <a:pPr algn="r"/>
             <a:r>
-              <a:t>273</a:t>
+              <a:t>274</a:t>
             </a:r>
             <a:endParaRPr sz="1000" b="1">
               <a:solidFill>
@@ -9114,7 +9114,7 @@
           <a:p>
             <a:pPr algn="r"/>
             <a:r>
-              <a:t>274</a:t>
+              <a:t>275</a:t>
             </a:r>
             <a:endParaRPr sz="1000" b="1">
               <a:solidFill>
@@ -9386,7 +9386,7 @@
           <a:p>
             <a:pPr algn="r"/>
             <a:r>
-              <a:t>275</a:t>
+              <a:t>276</a:t>
             </a:r>
             <a:endParaRPr sz="1000" b="1">
               <a:solidFill>

--- a/_implementation-notes/evening-series/FotH Evening Session 19 Slides DRAFT v1.pptx
+++ b/_implementation-notes/evening-series/FotH Evening Session 19 Slides DRAFT v1.pptx
@@ -5300,7 +5300,7 @@
           <a:p>
             <a:pPr algn="r"/>
             <a:r>
-              <a:t>277</a:t>
+              <a:t>278</a:t>
             </a:r>
             <a:endParaRPr sz="1000" b="1">
               <a:solidFill>
@@ -5522,7 +5522,7 @@
           <a:p>
             <a:pPr algn="r"/>
             <a:r>
-              <a:t>278</a:t>
+              <a:t>279</a:t>
             </a:r>
             <a:endParaRPr sz="1000" b="1">
               <a:solidFill>
@@ -5769,7 +5769,7 @@
           <a:p>
             <a:pPr algn="r"/>
             <a:r>
-              <a:t>279</a:t>
+              <a:t>280</a:t>
             </a:r>
             <a:endParaRPr sz="1000" b="1">
               <a:solidFill>
@@ -5961,7 +5961,7 @@
           <a:p>
             <a:pPr algn="r"/>
             <a:r>
-              <a:t>280</a:t>
+              <a:t>281</a:t>
             </a:r>
             <a:endParaRPr sz="1000" b="1">
               <a:solidFill>
@@ -6153,7 +6153,7 @@
           <a:p>
             <a:pPr algn="r"/>
             <a:r>
-              <a:t>281</a:t>
+              <a:t>282</a:t>
             </a:r>
             <a:endParaRPr sz="1000" b="1">
               <a:solidFill>
@@ -6562,7 +6562,7 @@
           <a:p>
             <a:pPr algn="r"/>
             <a:r>
-              <a:t>282</a:t>
+              <a:t>283</a:t>
             </a:r>
             <a:endParaRPr sz="1000" b="1">
               <a:solidFill>
@@ -6859,7 +6859,7 @@
           <a:p>
             <a:pPr algn="r"/>
             <a:r>
-              <a:t>283</a:t>
+              <a:t>284</a:t>
             </a:r>
             <a:endParaRPr sz="1000" b="1">
               <a:solidFill>
@@ -7108,7 +7108,7 @@
           <a:p>
             <a:pPr algn="r"/>
             <a:r>
-              <a:t>269</a:t>
+              <a:t>270</a:t>
             </a:r>
             <a:endParaRPr sz="1000" b="1">
               <a:solidFill>
@@ -7325,7 +7325,7 @@
           <a:p>
             <a:pPr algn="r"/>
             <a:r>
-              <a:t>270</a:t>
+              <a:t>271</a:t>
             </a:r>
             <a:endParaRPr sz="1000" b="1">
               <a:solidFill>
@@ -7789,7 +7789,7 @@
           <a:p>
             <a:pPr algn="r"/>
             <a:r>
-              <a:t>271</a:t>
+              <a:t>272</a:t>
             </a:r>
             <a:endParaRPr sz="1000" b="1">
               <a:solidFill>
@@ -8172,7 +8172,7 @@
           <a:p>
             <a:pPr algn="r"/>
             <a:r>
-              <a:t>272</a:t>
+              <a:t>273</a:t>
             </a:r>
             <a:endParaRPr sz="1000" b="1">
               <a:solidFill>
@@ -8540,7 +8540,7 @@
           <a:p>
             <a:pPr algn="r"/>
             <a:r>
-              <a:t>273</a:t>
+              <a:t>274</a:t>
             </a:r>
             <a:endParaRPr sz="1000" b="1">
               <a:solidFill>
@@ -8762,7 +8762,7 @@
           <a:p>
             <a:pPr algn="r"/>
             <a:r>
-              <a:t>274</a:t>
+              <a:t>275</a:t>
             </a:r>
             <a:endParaRPr sz="1000" b="1">
               <a:solidFill>
@@ -9114,7 +9114,7 @@
           <a:p>
             <a:pPr algn="r"/>
             <a:r>
-              <a:t>275</a:t>
+              <a:t>276</a:t>
             </a:r>
             <a:endParaRPr sz="1000" b="1">
               <a:solidFill>
@@ -9386,7 +9386,7 @@
           <a:p>
             <a:pPr algn="r"/>
             <a:r>
-              <a:t>276</a:t>
+              <a:t>277</a:t>
             </a:r>
             <a:endParaRPr sz="1000" b="1">
               <a:solidFill>
